--- a/docs/presentation-slides.pptx
+++ b/docs/presentation-slides.pptx
@@ -864,7 +864,7 @@
           <a:p>
             <a:r>
               <a:rPr lang="en-US" dirty="0"/>
-              <a:t>1 minuto (asprenolapo). Elencare solo ciò che il PO ha deciso: il registro è docs/analysis/po-decisions.md. Le righe ancora in attesa vanno chiuse prima di presentare. Telefono e anticipo massimo: da confermare.</a:t>
+              <a:t>1 minuto (asprenolapo). Elencare solo ciò che il PO ha deciso: il registro è docs/analysis/po-decisions.md. Le righe ancora in attesa vanno chiuse prima di presentare. Anticipo massimo di una prenotazione: non deciso.</a:t>
             </a:r>
             <a:endParaRPr lang="en-US" dirty="0"/>
           </a:p>
@@ -952,7 +952,7 @@
           <a:p>
             <a:r>
               <a:rPr lang="en-US" dirty="0"/>
-              <a:t>2 minuti, insieme alla slide successiva. Un database per servizio: nessuna query unisce MongoDB e PostgreSQL. Bookings salva una copia di nome, tipo ed edificio dello spazio e chiede a Spaces i dati attuali con REST e timeout. Dettagli e pro e contro in docs/architecture.md.</a:t>
+              <a:t>2 minuti, insieme alla slide successiva. Un database per servizio: nessuna query unisce MongoDB e PostgreSQL. Bookings salva una copia di nome, tipo ed edificio dello spazio e chiede a Spaces i dati attuali con REST e timeout. Dettagli e pro e contro in docs/architecture.md e negli ADR di docs/decisions/.</a:t>
             </a:r>
             <a:endParaRPr lang="en-US" dirty="0"/>
           </a:p>
@@ -1040,7 +1040,7 @@
           <a:p>
             <a:r>
               <a:rPr lang="en-US" dirty="0"/>
-              <a:t>Continua dalla slide precedente. Dire il perché di ogni scelta e il compromesso accettato. Le scelte D1-D10 con pro e contro sono in docs/architecture.md; il PO non ha ancora validato tutto.</a:t>
+              <a:t>Continua dalla slide precedente. Dire il perché di ogni scelta e il compromesso accettato. Le decisioni D1-D10 con pro e contro sono in docs/architecture.md e negli ADR di docs/decisions/.</a:t>
             </a:r>
             <a:endParaRPr lang="en-US" dirty="0"/>
           </a:p>
@@ -1216,7 +1216,7 @@
           <a:p>
             <a:r>
               <a:rPr lang="en-US" dirty="0"/>
-              <a:t>4 minuti, una parte ciascuno. Percorso su dati sintetici caricati dal seed (SC-SEED-*, vedi data/synthetic/bookings-seed.md). Aggiungere, quando pronti e provati, il login, i gruppi con inviti e la vista admin. Il percorso va provato a voce da tutto il gruppo almeno una volta.</a:t>
+              <a:t>4 minuti, una parte ciascuno. Il percorso completo, con 15 passi e l'esito atteso di ognuno, è in docs/demo-path.md; il 28/10 è stato eseguito sull'API con gli esiti attesi (docs/evidence/2026-10-28-demo-rehearsal-api.md). Va ancora provato nell'interfaccia e a voce da tutto il gruppo.</a:t>
             </a:r>
             <a:endParaRPr lang="en-US" dirty="0"/>
           </a:p>
@@ -1304,7 +1304,7 @@
           <a:p>
             <a:r>
               <a:rPr lang="en-US" dirty="0"/>
-              <a:t>2 minuti (Rhaastrake, FranDeSa456). Citare solo ciò che è stato eseguito, con l'esito vero: la concorrenza sull'aula mista è superata in locale ma in CI c'e stato un fallimento (issue 142, ancora in indagine). Evidenze in docs/evidence/ e nei test di tests/SmartCampus.Bookings.Tests.</a:t>
+              <a:t>2 minuti (Rhaastrake, FranDeSa456). Citare solo ciò che è stato eseguito, con l'esito vero. La concorrenza sull'aula mista è superata in locale; in CI c'è stato un solo fallimento, non riprodotto in 80 esecuzioni (issue 142, chiusa con un'ipotesi). Evidenze in docs/evidence/ e nei test di tests/SmartCampus.Bookings.Tests. Il percorso della demo è stato provato solo sull'API.</a:t>
             </a:r>
             <a:endParaRPr lang="en-US" dirty="0"/>
           </a:p>
@@ -2141,7 +2141,7 @@
       </p:sp>
       <p:sp>
         <p:nvSpPr>
-          <p:cNvPr id="4" name="card-92"/>
+          <p:cNvPr id="4" name="card-100"/>
           <p:cNvSpPr/>
           <p:nvPr/>
         </p:nvSpPr>
@@ -2166,7 +2166,7 @@
       </p:sp>
       <p:sp>
         <p:nvSpPr>
-          <p:cNvPr id="5" name="card-93"/>
+          <p:cNvPr id="5" name="card-101"/>
           <p:cNvSpPr/>
           <p:nvPr/>
         </p:nvSpPr>
@@ -2191,7 +2191,7 @@
       </p:sp>
       <p:sp>
         <p:nvSpPr>
-          <p:cNvPr id="6" name="text-94"/>
+          <p:cNvPr id="6" name="text-102"/>
           <p:cNvSpPr txBox="1"/>
           <p:nvPr/>
         </p:nvSpPr>
@@ -2230,7 +2230,7 @@
       </p:sp>
       <p:sp>
         <p:nvSpPr>
-          <p:cNvPr id="7" name="text-95"/>
+          <p:cNvPr id="7" name="text-103"/>
           <p:cNvSpPr txBox="1"/>
           <p:nvPr/>
         </p:nvSpPr>
@@ -2269,7 +2269,7 @@
       </p:sp>
       <p:sp>
         <p:nvSpPr>
-          <p:cNvPr id="8" name="text-96"/>
+          <p:cNvPr id="8" name="text-104"/>
           <p:cNvSpPr txBox="1"/>
           <p:nvPr/>
         </p:nvSpPr>
@@ -2308,7 +2308,7 @@
       </p:sp>
       <p:sp>
         <p:nvSpPr>
-          <p:cNvPr id="9" name="text-97"/>
+          <p:cNvPr id="9" name="text-105"/>
           <p:cNvSpPr txBox="1"/>
           <p:nvPr/>
         </p:nvSpPr>
@@ -2525,7 +2525,7 @@
       </p:sp>
       <p:graphicFrame>
         <p:nvGraphicFramePr>
-          <p:cNvPr id="12" name="table-98"/>
+          <p:cNvPr id="12" name="table-106"/>
           <p:cNvGraphicFramePr>
             <a:graphicFrameLocks noGrp="1"/>
           </p:cNvGraphicFramePr>
@@ -2632,7 +2632,7 @@
                           <a:ea typeface="Calibri" pitchFamily="34" charset="-122"/>
                           <a:cs typeface="Calibri" pitchFamily="34" charset="-120"/>
                         </a:rPr>
-                        <a:t>Piattaforma: soluzione, Docker Compose, CI, verifica del token; incontro con il PO</a:t>
+                        <a:t>Piattaforma: soluzione, Docker Compose, CI, controllo PR, flusso agentico, ADR</a:t>
                       </a:r>
                       <a:endParaRPr lang="en-US" sz="1400" dirty="0">
                         <a:latin typeface="Calibri" charset="0"/>
@@ -2764,7 +2764,7 @@
                           <a:ea typeface="Calibri" pitchFamily="34" charset="-122"/>
                           <a:cs typeface="Calibri" pitchFamily="34" charset="-120"/>
                         </a:rPr>
-                        <a:t>Spaces su MongoDB: catalogo, indisponibilità, strumenti</a:t>
+                        <a:t>Spaces su MongoDB: catalogo, ricerca, indisponibilità, strumenti</a:t>
                       </a:r>
                       <a:endParaRPr lang="en-US" sz="1400" dirty="0">
                         <a:latin typeface="Calibri" charset="0"/>
@@ -2896,7 +2896,7 @@
                           <a:ea typeface="Calibri" pitchFamily="34" charset="-122"/>
                           <a:cs typeface="Calibri" pitchFamily="34" charset="-120"/>
                         </a:rPr>
-                        <a:t>Bookings: schema, creazione, annullamento, vincoli, aule miste, orari, seed</a:t>
+                        <a:t>Bookings: schema, creazione, annullamento, vincoli, aule miste, fasce orarie, seed</a:t>
                       </a:r>
                       <a:endParaRPr lang="en-US" sz="1400" dirty="0">
                         <a:latin typeface="Calibri" charset="0"/>
@@ -3028,7 +3028,7 @@
                           <a:ea typeface="Calibri" pitchFamily="34" charset="-122"/>
                           <a:cs typeface="Calibri" pitchFamily="34" charset="-120"/>
                         </a:rPr>
-                        <a:t>Bookings: inviti, email, mie prenotazioni, test di concorrenza</a:t>
+                        <a:t>Bookings: gruppi, inviti, scadenza, email, mie prenotazioni, disponibilità</a:t>
                       </a:r>
                       <a:endParaRPr lang="en-US" sz="1400" dirty="0">
                         <a:latin typeface="Calibri" charset="0"/>
@@ -3160,7 +3160,7 @@
                           <a:ea typeface="Calibri" pitchFamily="34" charset="-122"/>
                           <a:cs typeface="Calibri" pitchFamily="34" charset="-120"/>
                         </a:rPr>
-                        <a:t>Users e accesso, commento finale, dati sintetici</a:t>
+                        <a:t>Users e accesso, commento finale, dati sintetici, disponibilità</a:t>
                       </a:r>
                       <a:endParaRPr lang="en-US" sz="1400" dirty="0">
                         <a:latin typeface="Calibri" charset="0"/>
@@ -3292,7 +3292,7 @@
                           <a:ea typeface="Calibri" pitchFamily="34" charset="-122"/>
                           <a:cs typeface="Calibri" pitchFamily="34" charset="-120"/>
                         </a:rPr>
-                        <a:t>Area admin: dashboard, avvisi, eccezioni</a:t>
+                        <a:t>Area admin: dashboard, avvisi, eccezioni, statistiche d'uso</a:t>
                       </a:r>
                       <a:endParaRPr lang="en-US" sz="1400" dirty="0">
                         <a:latin typeface="Calibri" charset="0"/>
@@ -3424,7 +3424,7 @@
                           <a:ea typeface="Calibri" pitchFamily="34" charset="-122"/>
                           <a:cs typeface="Calibri" pitchFamily="34" charset="-120"/>
                         </a:rPr>
-                        <a:t>Frontend utente: accesso, prenotazione, gestione errori</a:t>
+                        <a:t>Frontend utente: accesso, registrazione, prenotazione, gestione errori</a:t>
                       </a:r>
                       <a:endParaRPr lang="en-US" sz="1400" dirty="0">
                         <a:latin typeface="Calibri" charset="0"/>
@@ -7064,8 +7064,8 @@
         </p:nvSpPr>
         <p:spPr>
           <a:xfrm>
-            <a:off x="457200" y="1280160"/>
-            <a:ext cx="4023360" cy="1005840"/>
+            <a:off x="457200" y="1143000"/>
+            <a:ext cx="4023360" cy="777240"/>
           </a:xfrm>
           <a:prstGeom prst="rect">
             <a:avLst/>
@@ -7089,8 +7089,8 @@
         </p:nvSpPr>
         <p:spPr>
           <a:xfrm>
-            <a:off x="640080" y="1463040"/>
-            <a:ext cx="548640" cy="640080"/>
+            <a:off x="640080" y="1234440"/>
+            <a:ext cx="548640" cy="594360"/>
           </a:xfrm>
           <a:prstGeom prst="rect">
             <a:avLst/>
@@ -7106,7 +7106,7 @@
               <a:buNone/>
             </a:pPr>
             <a:r>
-              <a:rPr lang="en-US" sz="3600" b="1" dirty="0">
+              <a:rPr lang="en-US" sz="3000" b="1" dirty="0">
                 <a:solidFill>
                   <a:schemeClr val="accent2"/>
                 </a:solidFill>
@@ -7116,7 +7116,7 @@
               </a:rPr>
               <a:t>1</a:t>
             </a:r>
-            <a:endParaRPr lang="en-US" sz="3600" dirty="0"/>
+            <a:endParaRPr lang="en-US" sz="3000" dirty="0"/>
           </a:p>
         </p:txBody>
       </p:sp>
@@ -7128,8 +7128,8 @@
         </p:nvSpPr>
         <p:spPr>
           <a:xfrm>
-            <a:off x="1325880" y="1389888"/>
-            <a:ext cx="3017520" cy="329184"/>
+            <a:off x="1325880" y="1207008"/>
+            <a:ext cx="3017520" cy="292608"/>
           </a:xfrm>
           <a:prstGeom prst="rect">
             <a:avLst/>
@@ -7145,7 +7145,7 @@
               <a:buNone/>
             </a:pPr>
             <a:r>
-              <a:rPr lang="en-US" sz="1800" b="1" dirty="0">
+              <a:rPr lang="en-US" sz="1600" b="1" dirty="0">
                 <a:solidFill>
                   <a:schemeClr val="tx2"/>
                 </a:solidFill>
@@ -7155,7 +7155,7 @@
               </a:rPr>
               <a:t>Prenotare</a:t>
             </a:r>
-            <a:endParaRPr lang="en-US" sz="1800" dirty="0"/>
+            <a:endParaRPr lang="en-US" sz="1600" dirty="0"/>
           </a:p>
         </p:txBody>
       </p:sp>
@@ -7167,8 +7167,8 @@
         </p:nvSpPr>
         <p:spPr>
           <a:xfrm>
-            <a:off x="1325880" y="1737360"/>
-            <a:ext cx="3017520" cy="502920"/>
+            <a:off x="1325880" y="1508760"/>
+            <a:ext cx="3017520" cy="384048"/>
           </a:xfrm>
           <a:prstGeom prst="rect">
             <a:avLst/>
@@ -7184,7 +7184,7 @@
               <a:buNone/>
             </a:pPr>
             <a:r>
-              <a:rPr lang="en-US" sz="1400" dirty="0">
+              <a:rPr lang="en-US" sz="1200" dirty="0">
                 <a:solidFill>
                   <a:schemeClr val="tx1"/>
                 </a:solidFill>
@@ -7194,7 +7194,7 @@
               </a:rPr>
               <a:t>Aula 101 in una fascia libera: conferma con codice leggibile</a:t>
             </a:r>
-            <a:endParaRPr lang="en-US" sz="1400" dirty="0"/>
+            <a:endParaRPr lang="en-US" sz="1200" dirty="0"/>
           </a:p>
         </p:txBody>
       </p:sp>
@@ -7206,8 +7206,8 @@
         </p:nvSpPr>
         <p:spPr>
           <a:xfrm>
-            <a:off x="4663440" y="1280160"/>
-            <a:ext cx="4023360" cy="1005840"/>
+            <a:off x="4663440" y="1143000"/>
+            <a:ext cx="4023360" cy="777240"/>
           </a:xfrm>
           <a:prstGeom prst="rect">
             <a:avLst/>
@@ -7231,8 +7231,8 @@
         </p:nvSpPr>
         <p:spPr>
           <a:xfrm>
-            <a:off x="4846320" y="1463040"/>
-            <a:ext cx="548640" cy="640080"/>
+            <a:off x="4846320" y="1234440"/>
+            <a:ext cx="548640" cy="594360"/>
           </a:xfrm>
           <a:prstGeom prst="rect">
             <a:avLst/>
@@ -7248,7 +7248,7 @@
               <a:buNone/>
             </a:pPr>
             <a:r>
-              <a:rPr lang="en-US" sz="3600" b="1" dirty="0">
+              <a:rPr lang="en-US" sz="3000" b="1" dirty="0">
                 <a:solidFill>
                   <a:schemeClr val="accent2"/>
                 </a:solidFill>
@@ -7258,7 +7258,7 @@
               </a:rPr>
               <a:t>2</a:t>
             </a:r>
-            <a:endParaRPr lang="en-US" sz="3600" dirty="0"/>
+            <a:endParaRPr lang="en-US" sz="3000" dirty="0"/>
           </a:p>
         </p:txBody>
       </p:sp>
@@ -7270,8 +7270,8 @@
         </p:nvSpPr>
         <p:spPr>
           <a:xfrm>
-            <a:off x="5532120" y="1389888"/>
-            <a:ext cx="3017520" cy="329184"/>
+            <a:off x="5532120" y="1207008"/>
+            <a:ext cx="3017520" cy="292608"/>
           </a:xfrm>
           <a:prstGeom prst="rect">
             <a:avLst/>
@@ -7287,7 +7287,7 @@
               <a:buNone/>
             </a:pPr>
             <a:r>
-              <a:rPr lang="en-US" sz="1800" b="1" dirty="0">
+              <a:rPr lang="en-US" sz="1600" b="1" dirty="0">
                 <a:solidFill>
                   <a:schemeClr val="tx2"/>
                 </a:solidFill>
@@ -7297,7 +7297,7 @@
               </a:rPr>
               <a:t>Conflitto</a:t>
             </a:r>
-            <a:endParaRPr lang="en-US" sz="1800" dirty="0"/>
+            <a:endParaRPr lang="en-US" sz="1600" dirty="0"/>
           </a:p>
         </p:txBody>
       </p:sp>
@@ -7309,8 +7309,8 @@
         </p:nvSpPr>
         <p:spPr>
           <a:xfrm>
-            <a:off x="5532120" y="1737360"/>
-            <a:ext cx="3017520" cy="502920"/>
+            <a:off x="5532120" y="1508760"/>
+            <a:ext cx="3017520" cy="384048"/>
           </a:xfrm>
           <a:prstGeom prst="rect">
             <a:avLst/>
@@ -7326,7 +7326,7 @@
               <a:buNone/>
             </a:pPr>
             <a:r>
-              <a:rPr lang="en-US" sz="1400" dirty="0">
+              <a:rPr lang="en-US" sz="1200" dirty="0">
                 <a:solidFill>
                   <a:schemeClr val="tx1"/>
                 </a:solidFill>
@@ -7336,7 +7336,7 @@
               </a:rPr>
               <a:t>Fascia sovrapposta: messaggio e 409</a:t>
             </a:r>
-            <a:endParaRPr lang="en-US" sz="1400" dirty="0"/>
+            <a:endParaRPr lang="en-US" sz="1200" dirty="0"/>
           </a:p>
         </p:txBody>
       </p:sp>
@@ -7348,8 +7348,8 @@
         </p:nvSpPr>
         <p:spPr>
           <a:xfrm>
-            <a:off x="457200" y="2423160"/>
-            <a:ext cx="4023360" cy="1005840"/>
+            <a:off x="457200" y="2029968"/>
+            <a:ext cx="4023360" cy="777240"/>
           </a:xfrm>
           <a:prstGeom prst="rect">
             <a:avLst/>
@@ -7373,8 +7373,8 @@
         </p:nvSpPr>
         <p:spPr>
           <a:xfrm>
-            <a:off x="640080" y="2606040"/>
-            <a:ext cx="548640" cy="640080"/>
+            <a:off x="640080" y="2121408"/>
+            <a:ext cx="548640" cy="594360"/>
           </a:xfrm>
           <a:prstGeom prst="rect">
             <a:avLst/>
@@ -7390,7 +7390,7 @@
               <a:buNone/>
             </a:pPr>
             <a:r>
-              <a:rPr lang="en-US" sz="3600" b="1" dirty="0">
+              <a:rPr lang="en-US" sz="3000" b="1" dirty="0">
                 <a:solidFill>
                   <a:schemeClr val="accent2"/>
                 </a:solidFill>
@@ -7400,7 +7400,7 @@
               </a:rPr>
               <a:t>3</a:t>
             </a:r>
-            <a:endParaRPr lang="en-US" sz="3600" dirty="0"/>
+            <a:endParaRPr lang="en-US" sz="3000" dirty="0"/>
           </a:p>
         </p:txBody>
       </p:sp>
@@ -7412,8 +7412,8 @@
         </p:nvSpPr>
         <p:spPr>
           <a:xfrm>
-            <a:off x="1325880" y="2532888"/>
-            <a:ext cx="3017520" cy="329184"/>
+            <a:off x="1325880" y="2093976"/>
+            <a:ext cx="3017520" cy="292608"/>
           </a:xfrm>
           <a:prstGeom prst="rect">
             <a:avLst/>
@@ -7429,7 +7429,7 @@
               <a:buNone/>
             </a:pPr>
             <a:r>
-              <a:rPr lang="en-US" sz="1800" b="1" dirty="0">
+              <a:rPr lang="en-US" sz="1600" b="1" dirty="0">
                 <a:solidFill>
                   <a:schemeClr val="tx2"/>
                 </a:solidFill>
@@ -7439,7 +7439,7 @@
               </a:rPr>
               <a:t>Adiacenti</a:t>
             </a:r>
-            <a:endParaRPr lang="en-US" sz="1800" dirty="0"/>
+            <a:endParaRPr lang="en-US" sz="1600" dirty="0"/>
           </a:p>
         </p:txBody>
       </p:sp>
@@ -7451,8 +7451,8 @@
         </p:nvSpPr>
         <p:spPr>
           <a:xfrm>
-            <a:off x="1325880" y="2880360"/>
-            <a:ext cx="3017520" cy="502920"/>
+            <a:off x="1325880" y="2395728"/>
+            <a:ext cx="3017520" cy="384048"/>
           </a:xfrm>
           <a:prstGeom prst="rect">
             <a:avLst/>
@@ -7468,7 +7468,7 @@
               <a:buNone/>
             </a:pPr>
             <a:r>
-              <a:rPr lang="en-US" sz="1400" dirty="0">
+              <a:rPr lang="en-US" sz="1200" dirty="0">
                 <a:solidFill>
                   <a:schemeClr val="tx1"/>
                 </a:solidFill>
@@ -7478,7 +7478,7 @@
               </a:rPr>
               <a:t>Una finisce quando inizia l'altra: entrambe accettate</a:t>
             </a:r>
-            <a:endParaRPr lang="en-US" sz="1400" dirty="0"/>
+            <a:endParaRPr lang="en-US" sz="1200" dirty="0"/>
           </a:p>
         </p:txBody>
       </p:sp>
@@ -7490,8 +7490,8 @@
         </p:nvSpPr>
         <p:spPr>
           <a:xfrm>
-            <a:off x="4663440" y="2423160"/>
-            <a:ext cx="4023360" cy="1005840"/>
+            <a:off x="4663440" y="2029968"/>
+            <a:ext cx="4023360" cy="777240"/>
           </a:xfrm>
           <a:prstGeom prst="rect">
             <a:avLst/>
@@ -7515,8 +7515,8 @@
         </p:nvSpPr>
         <p:spPr>
           <a:xfrm>
-            <a:off x="4846320" y="2606040"/>
-            <a:ext cx="548640" cy="640080"/>
+            <a:off x="4846320" y="2121408"/>
+            <a:ext cx="548640" cy="594360"/>
           </a:xfrm>
           <a:prstGeom prst="rect">
             <a:avLst/>
@@ -7532,7 +7532,7 @@
               <a:buNone/>
             </a:pPr>
             <a:r>
-              <a:rPr lang="en-US" sz="3600" b="1" dirty="0">
+              <a:rPr lang="en-US" sz="3000" b="1" dirty="0">
                 <a:solidFill>
                   <a:schemeClr val="accent2"/>
                 </a:solidFill>
@@ -7542,7 +7542,7 @@
               </a:rPr>
               <a:t>4</a:t>
             </a:r>
-            <a:endParaRPr lang="en-US" sz="3600" dirty="0"/>
+            <a:endParaRPr lang="en-US" sz="3000" dirty="0"/>
           </a:p>
         </p:txBody>
       </p:sp>
@@ -7554,8 +7554,8 @@
         </p:nvSpPr>
         <p:spPr>
           <a:xfrm>
-            <a:off x="5532120" y="2532888"/>
-            <a:ext cx="3017520" cy="329184"/>
+            <a:off x="5532120" y="2093976"/>
+            <a:ext cx="3017520" cy="292608"/>
           </a:xfrm>
           <a:prstGeom prst="rect">
             <a:avLst/>
@@ -7571,7 +7571,7 @@
               <a:buNone/>
             </a:pPr>
             <a:r>
-              <a:rPr lang="en-US" sz="1800" b="1" dirty="0">
+              <a:rPr lang="en-US" sz="1600" b="1" dirty="0">
                 <a:solidFill>
                   <a:schemeClr val="tx2"/>
                 </a:solidFill>
@@ -7581,7 +7581,7 @@
               </a:rPr>
               <a:t>Annullare</a:t>
             </a:r>
-            <a:endParaRPr lang="en-US" sz="1800" dirty="0"/>
+            <a:endParaRPr lang="en-US" sz="1600" dirty="0"/>
           </a:p>
         </p:txBody>
       </p:sp>
@@ -7593,8 +7593,8 @@
         </p:nvSpPr>
         <p:spPr>
           <a:xfrm>
-            <a:off x="5532120" y="2880360"/>
-            <a:ext cx="3017520" cy="502920"/>
+            <a:off x="5532120" y="2395728"/>
+            <a:ext cx="3017520" cy="384048"/>
           </a:xfrm>
           <a:prstGeom prst="rect">
             <a:avLst/>
@@ -7610,7 +7610,7 @@
               <a:buNone/>
             </a:pPr>
             <a:r>
-              <a:rPr lang="en-US" sz="1400" dirty="0">
+              <a:rPr lang="en-US" sz="1200" dirty="0">
                 <a:solidFill>
                   <a:schemeClr val="tx1"/>
                 </a:solidFill>
@@ -7618,9 +7618,9 @@
                 <a:ea typeface="Calibri" pitchFamily="34" charset="-122"/>
                 <a:cs typeface="Calibri" pitchFamily="34" charset="-120"/>
               </a:rPr>
-              <a:t>La fascia torna libera per tutti</a:t>
-            </a:r>
-            <a:endParaRPr lang="en-US" sz="1400" dirty="0"/>
+              <a:t>Solo l'organizzatore; la fascia torna libera per tutti</a:t>
+            </a:r>
+            <a:endParaRPr lang="en-US" sz="1200" dirty="0"/>
           </a:p>
         </p:txBody>
       </p:sp>
@@ -7632,8 +7632,8 @@
         </p:nvSpPr>
         <p:spPr>
           <a:xfrm>
-            <a:off x="457200" y="3566160"/>
-            <a:ext cx="4023360" cy="1005840"/>
+            <a:off x="457200" y="2916936"/>
+            <a:ext cx="4023360" cy="777240"/>
           </a:xfrm>
           <a:prstGeom prst="rect">
             <a:avLst/>
@@ -7657,8 +7657,8 @@
         </p:nvSpPr>
         <p:spPr>
           <a:xfrm>
-            <a:off x="640080" y="3749040"/>
-            <a:ext cx="548640" cy="640080"/>
+            <a:off x="640080" y="3008376"/>
+            <a:ext cx="548640" cy="594360"/>
           </a:xfrm>
           <a:prstGeom prst="rect">
             <a:avLst/>
@@ -7674,7 +7674,7 @@
               <a:buNone/>
             </a:pPr>
             <a:r>
-              <a:rPr lang="en-US" sz="3600" b="1" dirty="0">
+              <a:rPr lang="en-US" sz="3000" b="1" dirty="0">
                 <a:solidFill>
                   <a:schemeClr val="accent2"/>
                 </a:solidFill>
@@ -7684,7 +7684,7 @@
               </a:rPr>
               <a:t>5</a:t>
             </a:r>
-            <a:endParaRPr lang="en-US" sz="3600" dirty="0"/>
+            <a:endParaRPr lang="en-US" sz="3000" dirty="0"/>
           </a:p>
         </p:txBody>
       </p:sp>
@@ -7696,8 +7696,8 @@
         </p:nvSpPr>
         <p:spPr>
           <a:xfrm>
-            <a:off x="1325880" y="3675888"/>
-            <a:ext cx="3017520" cy="329184"/>
+            <a:off x="1325880" y="2980944"/>
+            <a:ext cx="3017520" cy="292608"/>
           </a:xfrm>
           <a:prstGeom prst="rect">
             <a:avLst/>
@@ -7713,7 +7713,7 @@
               <a:buNone/>
             </a:pPr>
             <a:r>
-              <a:rPr lang="en-US" sz="1800" b="1" dirty="0">
+              <a:rPr lang="en-US" sz="1600" b="1" dirty="0">
                 <a:solidFill>
                   <a:schemeClr val="tx2"/>
                 </a:solidFill>
@@ -7723,7 +7723,7 @@
               </a:rPr>
               <a:t>Aula piena</a:t>
             </a:r>
-            <a:endParaRPr lang="en-US" sz="1800" dirty="0"/>
+            <a:endParaRPr lang="en-US" sz="1600" dirty="0"/>
           </a:p>
         </p:txBody>
       </p:sp>
@@ -7735,8 +7735,8 @@
         </p:nvSpPr>
         <p:spPr>
           <a:xfrm>
-            <a:off x="1325880" y="4023360"/>
-            <a:ext cx="3017520" cy="502920"/>
+            <a:off x="1325880" y="3282696"/>
+            <a:ext cx="3017520" cy="384048"/>
           </a:xfrm>
           <a:prstGeom prst="rect">
             <a:avLst/>
@@ -7752,7 +7752,7 @@
               <a:buNone/>
             </a:pPr>
             <a:r>
-              <a:rPr lang="en-US" sz="1400" dirty="0">
+              <a:rPr lang="en-US" sz="1200" dirty="0">
                 <a:solidFill>
                   <a:schemeClr val="tx1"/>
                 </a:solidFill>
@@ -7762,7 +7762,7 @@
               </a:rPr>
               <a:t>Aula 204 da 6 posti: la settima persona viene rifiutata</a:t>
             </a:r>
-            <a:endParaRPr lang="en-US" sz="1400" dirty="0"/>
+            <a:endParaRPr lang="en-US" sz="1200" dirty="0"/>
           </a:p>
         </p:txBody>
       </p:sp>
@@ -7774,8 +7774,8 @@
         </p:nvSpPr>
         <p:spPr>
           <a:xfrm>
-            <a:off x="4663440" y="3566160"/>
-            <a:ext cx="4023360" cy="1005840"/>
+            <a:off x="4663440" y="2916936"/>
+            <a:ext cx="4023360" cy="777240"/>
           </a:xfrm>
           <a:prstGeom prst="rect">
             <a:avLst/>
@@ -7799,8 +7799,8 @@
         </p:nvSpPr>
         <p:spPr>
           <a:xfrm>
-            <a:off x="4846320" y="3749040"/>
-            <a:ext cx="548640" cy="640080"/>
+            <a:off x="4846320" y="3008376"/>
+            <a:ext cx="548640" cy="594360"/>
           </a:xfrm>
           <a:prstGeom prst="rect">
             <a:avLst/>
@@ -7816,7 +7816,7 @@
               <a:buNone/>
             </a:pPr>
             <a:r>
-              <a:rPr lang="en-US" sz="3600" b="1" dirty="0">
+              <a:rPr lang="en-US" sz="3000" b="1" dirty="0">
                 <a:solidFill>
                   <a:schemeClr val="accent2"/>
                 </a:solidFill>
@@ -7826,7 +7826,7 @@
               </a:rPr>
               <a:t>6</a:t>
             </a:r>
-            <a:endParaRPr lang="en-US" sz="3600" dirty="0"/>
+            <a:endParaRPr lang="en-US" sz="3000" dirty="0"/>
           </a:p>
         </p:txBody>
       </p:sp>
@@ -7838,8 +7838,8 @@
         </p:nvSpPr>
         <p:spPr>
           <a:xfrm>
-            <a:off x="5532120" y="3675888"/>
-            <a:ext cx="3017520" cy="329184"/>
+            <a:off x="5532120" y="2980944"/>
+            <a:ext cx="3017520" cy="292608"/>
           </a:xfrm>
           <a:prstGeom prst="rect">
             <a:avLst/>
@@ -7855,7 +7855,7 @@
               <a:buNone/>
             </a:pPr>
             <a:r>
-              <a:rPr lang="en-US" sz="1800" b="1" dirty="0">
+              <a:rPr lang="en-US" sz="1600" b="1" dirty="0">
                 <a:solidFill>
                   <a:schemeClr val="tx2"/>
                 </a:solidFill>
@@ -7865,7 +7865,7 @@
               </a:rPr>
               <a:t>Commento</a:t>
             </a:r>
-            <a:endParaRPr lang="en-US" sz="1800" dirty="0"/>
+            <a:endParaRPr lang="en-US" sz="1600" dirty="0"/>
           </a:p>
         </p:txBody>
       </p:sp>
@@ -7877,8 +7877,8 @@
         </p:nvSpPr>
         <p:spPr>
           <a:xfrm>
-            <a:off x="5532120" y="4023360"/>
-            <a:ext cx="3017520" cy="502920"/>
+            <a:off x="5532120" y="3282696"/>
+            <a:ext cx="3017520" cy="384048"/>
           </a:xfrm>
           <a:prstGeom prst="rect">
             <a:avLst/>
@@ -7894,7 +7894,7 @@
               <a:buNone/>
             </a:pPr>
             <a:r>
-              <a:rPr lang="en-US" sz="1400" dirty="0">
+              <a:rPr lang="en-US" sz="1200" dirty="0">
                 <a:solidFill>
                   <a:schemeClr val="tx1"/>
                 </a:solidFill>
@@ -7904,7 +7904,291 @@
               </a:rPr>
               <a:t>Senza commento finale non si prenota di nuovo</a:t>
             </a:r>
-            <a:endParaRPr lang="en-US" sz="1400" dirty="0"/>
+            <a:endParaRPr lang="en-US" sz="1200" dirty="0"/>
+          </a:p>
+        </p:txBody>
+      </p:sp>
+      <p:sp>
+        <p:nvSpPr>
+          <p:cNvPr id="28" name="card-87"/>
+          <p:cNvSpPr/>
+          <p:nvPr/>
+        </p:nvSpPr>
+        <p:spPr>
+          <a:xfrm>
+            <a:off x="457200" y="3803904"/>
+            <a:ext cx="4023360" cy="777240"/>
+          </a:xfrm>
+          <a:prstGeom prst="rect">
+            <a:avLst/>
+          </a:prstGeom>
+          <a:solidFill>
+            <a:schemeClr val="bg2"/>
+          </a:solidFill>
+          <a:ln w="12700">
+            <a:solidFill>
+              <a:schemeClr val="bg2"/>
+            </a:solidFill>
+            <a:prstDash val="solid"/>
+          </a:ln>
+        </p:spPr>
+      </p:sp>
+      <p:sp>
+        <p:nvSpPr>
+          <p:cNvPr id="29" name="text-88"/>
+          <p:cNvSpPr txBox="1"/>
+          <p:nvPr/>
+        </p:nvSpPr>
+        <p:spPr>
+          <a:xfrm>
+            <a:off x="640080" y="3895344"/>
+            <a:ext cx="548640" cy="594360"/>
+          </a:xfrm>
+          <a:prstGeom prst="rect">
+            <a:avLst/>
+          </a:prstGeom>
+          <a:noFill/>
+          <a:ln/>
+        </p:spPr>
+        <p:txBody>
+          <a:bodyPr wrap="square" lIns="0" tIns="0" rIns="0" bIns="0" rtlCol="0" anchor="ctr"/>
+          <a:lstStyle/>
+          <a:p>
+            <a:pPr indent="0" marL="0">
+              <a:buNone/>
+            </a:pPr>
+            <a:r>
+              <a:rPr lang="en-US" sz="3000" b="1" dirty="0">
+                <a:solidFill>
+                  <a:schemeClr val="accent2"/>
+                </a:solidFill>
+                <a:latin typeface="Cambria" pitchFamily="34" charset="0"/>
+                <a:ea typeface="Cambria" pitchFamily="34" charset="-122"/>
+                <a:cs typeface="Cambria" pitchFamily="34" charset="-120"/>
+              </a:rPr>
+              <a:t>7</a:t>
+            </a:r>
+            <a:endParaRPr lang="en-US" sz="3000" dirty="0"/>
+          </a:p>
+        </p:txBody>
+      </p:sp>
+      <p:sp>
+        <p:nvSpPr>
+          <p:cNvPr id="30" name="text-89"/>
+          <p:cNvSpPr txBox="1"/>
+          <p:nvPr/>
+        </p:nvSpPr>
+        <p:spPr>
+          <a:xfrm>
+            <a:off x="1325880" y="3867912"/>
+            <a:ext cx="3017520" cy="292608"/>
+          </a:xfrm>
+          <a:prstGeom prst="rect">
+            <a:avLst/>
+          </a:prstGeom>
+          <a:noFill/>
+          <a:ln/>
+        </p:spPr>
+        <p:txBody>
+          <a:bodyPr wrap="square" lIns="0" tIns="0" rIns="0" bIns="0" rtlCol="0" anchor="t"/>
+          <a:lstStyle/>
+          <a:p>
+            <a:pPr indent="0" marL="0">
+              <a:buNone/>
+            </a:pPr>
+            <a:r>
+              <a:rPr lang="en-US" sz="1600" b="1" dirty="0">
+                <a:solidFill>
+                  <a:schemeClr val="tx2"/>
+                </a:solidFill>
+                <a:latin typeface="Cambria" pitchFamily="34" charset="0"/>
+                <a:ea typeface="Cambria" pitchFamily="34" charset="-122"/>
+                <a:cs typeface="Cambria" pitchFamily="34" charset="-120"/>
+              </a:rPr>
+              <a:t>Gruppo</a:t>
+            </a:r>
+            <a:endParaRPr lang="en-US" sz="1600" dirty="0"/>
+          </a:p>
+        </p:txBody>
+      </p:sp>
+      <p:sp>
+        <p:nvSpPr>
+          <p:cNvPr id="31" name="text-90"/>
+          <p:cNvSpPr txBox="1"/>
+          <p:nvPr/>
+        </p:nvSpPr>
+        <p:spPr>
+          <a:xfrm>
+            <a:off x="1325880" y="4169664"/>
+            <a:ext cx="3017520" cy="384048"/>
+          </a:xfrm>
+          <a:prstGeom prst="rect">
+            <a:avLst/>
+          </a:prstGeom>
+          <a:noFill/>
+          <a:ln/>
+        </p:spPr>
+        <p:txBody>
+          <a:bodyPr wrap="square" lIns="0" tIns="0" rIns="0" bIns="0" rtlCol="0" anchor="t"/>
+          <a:lstStyle/>
+          <a:p>
+            <a:pPr indent="0" marL="0">
+              <a:buNone/>
+            </a:pPr>
+            <a:r>
+              <a:rPr lang="en-US" sz="1200" dirty="0">
+                <a:solidFill>
+                  <a:schemeClr val="tx1"/>
+                </a:solidFill>
+                <a:latin typeface="Calibri" pitchFamily="34" charset="0"/>
+                <a:ea typeface="Calibri" pitchFamily="34" charset="-122"/>
+                <a:cs typeface="Calibri" pitchFamily="34" charset="-120"/>
+              </a:rPr>
+              <a:t>Inviti per email; l'invitato conferma, un altro utente no</a:t>
+            </a:r>
+            <a:endParaRPr lang="en-US" sz="1200" dirty="0"/>
+          </a:p>
+        </p:txBody>
+      </p:sp>
+      <p:sp>
+        <p:nvSpPr>
+          <p:cNvPr id="32" name="card-91"/>
+          <p:cNvSpPr/>
+          <p:nvPr/>
+        </p:nvSpPr>
+        <p:spPr>
+          <a:xfrm>
+            <a:off x="4663440" y="3803904"/>
+            <a:ext cx="4023360" cy="777240"/>
+          </a:xfrm>
+          <a:prstGeom prst="rect">
+            <a:avLst/>
+          </a:prstGeom>
+          <a:solidFill>
+            <a:schemeClr val="bg2"/>
+          </a:solidFill>
+          <a:ln w="12700">
+            <a:solidFill>
+              <a:schemeClr val="bg2"/>
+            </a:solidFill>
+            <a:prstDash val="solid"/>
+          </a:ln>
+        </p:spPr>
+      </p:sp>
+      <p:sp>
+        <p:nvSpPr>
+          <p:cNvPr id="33" name="text-92"/>
+          <p:cNvSpPr txBox="1"/>
+          <p:nvPr/>
+        </p:nvSpPr>
+        <p:spPr>
+          <a:xfrm>
+            <a:off x="4846320" y="3895344"/>
+            <a:ext cx="548640" cy="594360"/>
+          </a:xfrm>
+          <a:prstGeom prst="rect">
+            <a:avLst/>
+          </a:prstGeom>
+          <a:noFill/>
+          <a:ln/>
+        </p:spPr>
+        <p:txBody>
+          <a:bodyPr wrap="square" lIns="0" tIns="0" rIns="0" bIns="0" rtlCol="0" anchor="ctr"/>
+          <a:lstStyle/>
+          <a:p>
+            <a:pPr indent="0" marL="0">
+              <a:buNone/>
+            </a:pPr>
+            <a:r>
+              <a:rPr lang="en-US" sz="3000" b="1" dirty="0">
+                <a:solidFill>
+                  <a:schemeClr val="accent2"/>
+                </a:solidFill>
+                <a:latin typeface="Cambria" pitchFamily="34" charset="0"/>
+                <a:ea typeface="Cambria" pitchFamily="34" charset="-122"/>
+                <a:cs typeface="Cambria" pitchFamily="34" charset="-120"/>
+              </a:rPr>
+              <a:t>8</a:t>
+            </a:r>
+            <a:endParaRPr lang="en-US" sz="3000" dirty="0"/>
+          </a:p>
+        </p:txBody>
+      </p:sp>
+      <p:sp>
+        <p:nvSpPr>
+          <p:cNvPr id="34" name="text-93"/>
+          <p:cNvSpPr txBox="1"/>
+          <p:nvPr/>
+        </p:nvSpPr>
+        <p:spPr>
+          <a:xfrm>
+            <a:off x="5532120" y="3867912"/>
+            <a:ext cx="3017520" cy="292608"/>
+          </a:xfrm>
+          <a:prstGeom prst="rect">
+            <a:avLst/>
+          </a:prstGeom>
+          <a:noFill/>
+          <a:ln/>
+        </p:spPr>
+        <p:txBody>
+          <a:bodyPr wrap="square" lIns="0" tIns="0" rIns="0" bIns="0" rtlCol="0" anchor="t"/>
+          <a:lstStyle/>
+          <a:p>
+            <a:pPr indent="0" marL="0">
+              <a:buNone/>
+            </a:pPr>
+            <a:r>
+              <a:rPr lang="en-US" sz="1600" b="1" dirty="0">
+                <a:solidFill>
+                  <a:schemeClr val="tx2"/>
+                </a:solidFill>
+                <a:latin typeface="Cambria" pitchFamily="34" charset="0"/>
+                <a:ea typeface="Cambria" pitchFamily="34" charset="-122"/>
+                <a:cs typeface="Cambria" pitchFamily="34" charset="-120"/>
+              </a:rPr>
+              <a:t>Admin</a:t>
+            </a:r>
+            <a:endParaRPr lang="en-US" sz="1600" dirty="0"/>
+          </a:p>
+        </p:txBody>
+      </p:sp>
+      <p:sp>
+        <p:nvSpPr>
+          <p:cNvPr id="35" name="text-94"/>
+          <p:cNvSpPr txBox="1"/>
+          <p:nvPr/>
+        </p:nvSpPr>
+        <p:spPr>
+          <a:xfrm>
+            <a:off x="5532120" y="4169664"/>
+            <a:ext cx="3017520" cy="384048"/>
+          </a:xfrm>
+          <a:prstGeom prst="rect">
+            <a:avLst/>
+          </a:prstGeom>
+          <a:noFill/>
+          <a:ln/>
+        </p:spPr>
+        <p:txBody>
+          <a:bodyPr wrap="square" lIns="0" tIns="0" rIns="0" bIns="0" rtlCol="0" anchor="t"/>
+          <a:lstStyle/>
+          <a:p>
+            <a:pPr indent="0" marL="0">
+              <a:buNone/>
+            </a:pPr>
+            <a:r>
+              <a:rPr lang="en-US" sz="1200" dirty="0">
+                <a:solidFill>
+                  <a:schemeClr val="tx1"/>
+                </a:solidFill>
+                <a:latin typeface="Calibri" pitchFamily="34" charset="0"/>
+                <a:ea typeface="Calibri" pitchFamily="34" charset="-122"/>
+                <a:cs typeface="Calibri" pitchFamily="34" charset="-120"/>
+              </a:rPr>
+              <a:t>La dashboard solo per l'admin; Spaces fermo: 503</a:t>
+            </a:r>
+            <a:endParaRPr lang="en-US" sz="1200" dirty="0"/>
           </a:p>
         </p:txBody>
       </p:sp>
@@ -8021,7 +8305,7 @@
       </p:sp>
       <p:graphicFrame>
         <p:nvGraphicFramePr>
-          <p:cNvPr id="9" name="table-87"/>
+          <p:cNvPr id="9" name="table-95"/>
           <p:cNvGraphicFramePr>
             <a:graphicFrameLocks noGrp="1"/>
           </p:cNvGraphicFramePr>
@@ -8034,7 +8318,7 @@
           </p:nvPr>
         </p:nvGraphicFramePr>
         <p:xfrm>
-          <a:off x="457200" y="1234440"/>
+          <a:off x="457200" y="1188720"/>
           <a:ext cx="8229600" cy="914400"/>
         </p:xfrm>
         <a:graphic>
@@ -8043,10 +8327,10 @@
               <a:tblPr/>
               <a:tblGrid>
                 <a:gridCol w="2194560"/>
-                <a:gridCol w="4206240"/>
-                <a:gridCol w="1828800"/>
+                <a:gridCol w="4114800"/>
+                <a:gridCol w="1920240"/>
               </a:tblGrid>
-              <a:tr h="548640">
+              <a:tr h="475488">
                 <a:tc>
                   <a:txBody>
                     <a:bodyPr/>
@@ -8056,7 +8340,7 @@
                         <a:buNone/>
                       </a:pPr>
                       <a:r>
-                        <a:rPr lang="en-US" sz="1300" b="1" dirty="0">
+                        <a:rPr lang="en-US" sz="1200" b="1" dirty="0">
                           <a:solidFill>
                             <a:schemeClr val="bg1"/>
                           </a:solidFill>
@@ -8066,14 +8350,14 @@
                         </a:rPr>
                         <a:t>Prova</a:t>
                       </a:r>
-                      <a:endParaRPr lang="en-US" sz="1300" dirty="0">
+                      <a:endParaRPr lang="en-US" sz="1200" dirty="0">
                         <a:latin typeface="Calibri" charset="0"/>
                         <a:ea typeface="Calibri" charset="0"/>
                         <a:cs typeface="Calibri" charset="0"/>
                       </a:endParaRPr>
                     </a:p>
                   </a:txBody>
-                  <a:tcPr marL="91440" marR="91440" marT="45720" marB="45720" anchor="ctr">
+                  <a:tcPr marL="91440" marR="91440" marT="36576" marB="36576" anchor="ctr">
                     <a:lnL w="9525" cap="flat" cmpd="sng" algn="ctr">
                       <a:solidFill>
                         <a:srgbClr val="D5DEDC"/>
@@ -8124,7 +8408,7 @@
                         <a:buNone/>
                       </a:pPr>
                       <a:r>
-                        <a:rPr lang="en-US" sz="1300" b="1" dirty="0">
+                        <a:rPr lang="en-US" sz="1200" b="1" dirty="0">
                           <a:solidFill>
                             <a:schemeClr val="bg1"/>
                           </a:solidFill>
@@ -8134,14 +8418,14 @@
                         </a:rPr>
                         <a:t>Cosa dimostra</a:t>
                       </a:r>
-                      <a:endParaRPr lang="en-US" sz="1300" dirty="0">
+                      <a:endParaRPr lang="en-US" sz="1200" dirty="0">
                         <a:latin typeface="Calibri" charset="0"/>
                         <a:ea typeface="Calibri" charset="0"/>
                         <a:cs typeface="Calibri" charset="0"/>
                       </a:endParaRPr>
                     </a:p>
                   </a:txBody>
-                  <a:tcPr marL="91440" marR="91440" marT="45720" marB="45720" anchor="ctr">
+                  <a:tcPr marL="91440" marR="91440" marT="36576" marB="36576" anchor="ctr">
                     <a:lnL w="9525" cap="flat" cmpd="sng" algn="ctr">
                       <a:solidFill>
                         <a:srgbClr val="D5DEDC"/>
@@ -8192,7 +8476,7 @@
                         <a:buNone/>
                       </a:pPr>
                       <a:r>
-                        <a:rPr lang="en-US" sz="1300" b="1" dirty="0">
+                        <a:rPr lang="en-US" sz="1200" b="1" dirty="0">
                           <a:solidFill>
                             <a:schemeClr val="bg1"/>
                           </a:solidFill>
@@ -8202,14 +8486,14 @@
                         </a:rPr>
                         <a:t>Esito</a:t>
                       </a:r>
-                      <a:endParaRPr lang="en-US" sz="1300" dirty="0">
+                      <a:endParaRPr lang="en-US" sz="1200" dirty="0">
                         <a:latin typeface="Calibri" charset="0"/>
                         <a:ea typeface="Calibri" charset="0"/>
                         <a:cs typeface="Calibri" charset="0"/>
                       </a:endParaRPr>
                     </a:p>
                   </a:txBody>
-                  <a:tcPr marL="91440" marR="91440" marT="45720" marB="45720" anchor="ctr">
+                  <a:tcPr marL="91440" marR="91440" marT="36576" marB="36576" anchor="ctr">
                     <a:lnL w="9525" cap="flat" cmpd="sng" algn="ctr">
                       <a:solidFill>
                         <a:srgbClr val="D5DEDC"/>
@@ -8252,7 +8536,7 @@
                   </a:tcPr>
                 </a:tc>
               </a:tr>
-              <a:tr h="548640">
+              <a:tr h="475488">
                 <a:tc>
                   <a:txBody>
                     <a:bodyPr/>
@@ -8262,7 +8546,7 @@
                         <a:buNone/>
                       </a:pPr>
                       <a:r>
-                        <a:rPr lang="en-US" sz="1300" b="1" dirty="0">
+                        <a:rPr lang="en-US" sz="1200" b="1" dirty="0">
                           <a:solidFill>
                             <a:schemeClr val="tx2"/>
                           </a:solidFill>
@@ -8272,14 +8556,14 @@
                         </a:rPr>
                         <a:t>Concorrenza sul database</a:t>
                       </a:r>
-                      <a:endParaRPr lang="en-US" sz="1300" dirty="0">
+                      <a:endParaRPr lang="en-US" sz="1200" dirty="0">
                         <a:latin typeface="Calibri" charset="0"/>
                         <a:ea typeface="Calibri" charset="0"/>
                         <a:cs typeface="Calibri" charset="0"/>
                       </a:endParaRPr>
                     </a:p>
                   </a:txBody>
-                  <a:tcPr marL="91440" marR="91440" marT="45720" marB="45720" anchor="ctr">
+                  <a:tcPr marL="91440" marR="91440" marT="36576" marB="36576" anchor="ctr">
                     <a:lnL w="9525" cap="flat" cmpd="sng" algn="ctr">
                       <a:solidFill>
                         <a:srgbClr val="D5DEDC"/>
@@ -8327,7 +8611,7 @@
                         <a:buNone/>
                       </a:pPr>
                       <a:r>
-                        <a:rPr lang="en-US" sz="1300" dirty="0">
+                        <a:rPr lang="en-US" sz="1200" dirty="0">
                           <a:solidFill>
                             <a:schemeClr val="tx1"/>
                           </a:solidFill>
@@ -8337,14 +8621,14 @@
                         </a:rPr>
                         <a:t>16 richieste simultanee: una sola accettata sull'aula dedicata</a:t>
                       </a:r>
-                      <a:endParaRPr lang="en-US" sz="1300" dirty="0">
+                      <a:endParaRPr lang="en-US" sz="1200" dirty="0">
                         <a:latin typeface="Calibri" charset="0"/>
                         <a:ea typeface="Calibri" charset="0"/>
                         <a:cs typeface="Calibri" charset="0"/>
                       </a:endParaRPr>
                     </a:p>
                   </a:txBody>
-                  <a:tcPr marL="91440" marR="91440" marT="45720" marB="45720" anchor="ctr">
+                  <a:tcPr marL="91440" marR="91440" marT="36576" marB="36576" anchor="ctr">
                     <a:lnL w="9525" cap="flat" cmpd="sng" algn="ctr">
                       <a:solidFill>
                         <a:srgbClr val="D5DEDC"/>
@@ -8392,7 +8676,7 @@
                         <a:buNone/>
                       </a:pPr>
                       <a:r>
-                        <a:rPr lang="en-US" sz="1300" b="1" dirty="0">
+                        <a:rPr lang="en-US" sz="1200" b="1" dirty="0">
                           <a:solidFill>
                             <a:schemeClr val="accent5"/>
                           </a:solidFill>
@@ -8402,14 +8686,14 @@
                         </a:rPr>
                         <a:t>Superata</a:t>
                       </a:r>
-                      <a:endParaRPr lang="en-US" sz="1300" dirty="0">
+                      <a:endParaRPr lang="en-US" sz="1200" dirty="0">
                         <a:latin typeface="Calibri" charset="0"/>
                         <a:ea typeface="Calibri" charset="0"/>
                         <a:cs typeface="Calibri" charset="0"/>
                       </a:endParaRPr>
                     </a:p>
                   </a:txBody>
-                  <a:tcPr marL="91440" marR="91440" marT="45720" marB="45720" anchor="ctr">
+                  <a:tcPr marL="91440" marR="91440" marT="36576" marB="36576" anchor="ctr">
                     <a:lnL w="9525" cap="flat" cmpd="sng" algn="ctr">
                       <a:solidFill>
                         <a:srgbClr val="D5DEDC"/>
@@ -8449,7 +8733,7 @@
                   </a:tcPr>
                 </a:tc>
               </a:tr>
-              <a:tr h="548640">
+              <a:tr h="475488">
                 <a:tc>
                   <a:txBody>
                     <a:bodyPr/>
@@ -8459,7 +8743,7 @@
                         <a:buNone/>
                       </a:pPr>
                       <a:r>
-                        <a:rPr lang="en-US" sz="1300" b="1" dirty="0">
+                        <a:rPr lang="en-US" sz="1200" b="1" dirty="0">
                           <a:solidFill>
                             <a:schemeClr val="tx2"/>
                           </a:solidFill>
@@ -8469,14 +8753,14 @@
                         </a:rPr>
                         <a:t>Concorrenza via HTTP, aula mista</a:t>
                       </a:r>
-                      <a:endParaRPr lang="en-US" sz="1300" dirty="0">
+                      <a:endParaRPr lang="en-US" sz="1200" dirty="0">
                         <a:latin typeface="Calibri" charset="0"/>
                         <a:ea typeface="Calibri" charset="0"/>
                         <a:cs typeface="Calibri" charset="0"/>
                       </a:endParaRPr>
                     </a:p>
                   </a:txBody>
-                  <a:tcPr marL="91440" marR="91440" marT="45720" marB="45720" anchor="ctr">
+                  <a:tcPr marL="91440" marR="91440" marT="36576" marB="36576" anchor="ctr">
                     <a:lnL w="9525" cap="flat" cmpd="sng" algn="ctr">
                       <a:solidFill>
                         <a:srgbClr val="D5DEDC"/>
@@ -8524,7 +8808,7 @@
                         <a:buNone/>
                       </a:pPr>
                       <a:r>
-                        <a:rPr lang="en-US" sz="1300" dirty="0">
+                        <a:rPr lang="en-US" sz="1200" dirty="0">
                           <a:solidFill>
                             <a:schemeClr val="tx1"/>
                           </a:solidFill>
@@ -8534,14 +8818,14 @@
                         </a:rPr>
                         <a:t>30 richieste su 5 posti: 5 accettate</a:t>
                       </a:r>
-                      <a:endParaRPr lang="en-US" sz="1300" dirty="0">
+                      <a:endParaRPr lang="en-US" sz="1200" dirty="0">
                         <a:latin typeface="Calibri" charset="0"/>
                         <a:ea typeface="Calibri" charset="0"/>
                         <a:cs typeface="Calibri" charset="0"/>
                       </a:endParaRPr>
                     </a:p>
                   </a:txBody>
-                  <a:tcPr marL="91440" marR="91440" marT="45720" marB="45720" anchor="ctr">
+                  <a:tcPr marL="91440" marR="91440" marT="36576" marB="36576" anchor="ctr">
                     <a:lnL w="9525" cap="flat" cmpd="sng" algn="ctr">
                       <a:solidFill>
                         <a:srgbClr val="D5DEDC"/>
@@ -8589,7 +8873,7 @@
                         <a:buNone/>
                       </a:pPr>
                       <a:r>
-                        <a:rPr lang="en-US" sz="1300" b="1" dirty="0">
+                        <a:rPr lang="en-US" sz="1200" b="1" dirty="0">
                           <a:solidFill>
                             <a:schemeClr val="accent2"/>
                           </a:solidFill>
@@ -8597,16 +8881,16 @@
                           <a:ea typeface="Calibri" pitchFamily="34" charset="-122"/>
                           <a:cs typeface="Calibri" pitchFamily="34" charset="-120"/>
                         </a:rPr>
-                        <a:t>Locale sì, in CI un fallimento</a:t>
+                        <a:t>Superata; un fallimento in CI, non riprodotto</a:t>
                       </a:r>
-                      <a:endParaRPr lang="en-US" sz="1300" dirty="0">
+                      <a:endParaRPr lang="en-US" sz="1200" dirty="0">
                         <a:latin typeface="Calibri" charset="0"/>
                         <a:ea typeface="Calibri" charset="0"/>
                         <a:cs typeface="Calibri" charset="0"/>
                       </a:endParaRPr>
                     </a:p>
                   </a:txBody>
-                  <a:tcPr marL="91440" marR="91440" marT="45720" marB="45720" anchor="ctr">
+                  <a:tcPr marL="91440" marR="91440" marT="36576" marB="36576" anchor="ctr">
                     <a:lnL w="9525" cap="flat" cmpd="sng" algn="ctr">
                       <a:solidFill>
                         <a:srgbClr val="D5DEDC"/>
@@ -8646,7 +8930,7 @@
                   </a:tcPr>
                 </a:tc>
               </a:tr>
-              <a:tr h="548640">
+              <a:tr h="475488">
                 <a:tc>
                   <a:txBody>
                     <a:bodyPr/>
@@ -8656,7 +8940,7 @@
                         <a:buNone/>
                       </a:pPr>
                       <a:r>
-                        <a:rPr lang="en-US" sz="1300" b="1" dirty="0">
+                        <a:rPr lang="en-US" sz="1200" b="1" dirty="0">
                           <a:solidFill>
                             <a:schemeClr val="tx2"/>
                           </a:solidFill>
@@ -8666,14 +8950,14 @@
                         </a:rPr>
                         <a:t>Vincoli su spazi e persone</a:t>
                       </a:r>
-                      <a:endParaRPr lang="en-US" sz="1300" dirty="0">
+                      <a:endParaRPr lang="en-US" sz="1200" dirty="0">
                         <a:latin typeface="Calibri" charset="0"/>
                         <a:ea typeface="Calibri" charset="0"/>
                         <a:cs typeface="Calibri" charset="0"/>
                       </a:endParaRPr>
                     </a:p>
                   </a:txBody>
-                  <a:tcPr marL="91440" marR="91440" marT="45720" marB="45720" anchor="ctr">
+                  <a:tcPr marL="91440" marR="91440" marT="36576" marB="36576" anchor="ctr">
                     <a:lnL w="9525" cap="flat" cmpd="sng" algn="ctr">
                       <a:solidFill>
                         <a:srgbClr val="D5DEDC"/>
@@ -8721,7 +9005,7 @@
                         <a:buNone/>
                       </a:pPr>
                       <a:r>
-                        <a:rPr lang="en-US" sz="1300" dirty="0">
+                        <a:rPr lang="en-US" sz="1200" dirty="0">
                           <a:solidFill>
                             <a:schemeClr val="tx1"/>
                           </a:solidFill>
@@ -8731,14 +9015,14 @@
                         </a:rPr>
                         <a:t>Il database rifiuta le sovrapposizioni, accetta le adiacenti</a:t>
                       </a:r>
-                      <a:endParaRPr lang="en-US" sz="1300" dirty="0">
+                      <a:endParaRPr lang="en-US" sz="1200" dirty="0">
                         <a:latin typeface="Calibri" charset="0"/>
                         <a:ea typeface="Calibri" charset="0"/>
                         <a:cs typeface="Calibri" charset="0"/>
                       </a:endParaRPr>
                     </a:p>
                   </a:txBody>
-                  <a:tcPr marL="91440" marR="91440" marT="45720" marB="45720" anchor="ctr">
+                  <a:tcPr marL="91440" marR="91440" marT="36576" marB="36576" anchor="ctr">
                     <a:lnL w="9525" cap="flat" cmpd="sng" algn="ctr">
                       <a:solidFill>
                         <a:srgbClr val="D5DEDC"/>
@@ -8786,7 +9070,7 @@
                         <a:buNone/>
                       </a:pPr>
                       <a:r>
-                        <a:rPr lang="en-US" sz="1300" b="1" dirty="0">
+                        <a:rPr lang="en-US" sz="1200" b="1" dirty="0">
                           <a:solidFill>
                             <a:schemeClr val="accent5"/>
                           </a:solidFill>
@@ -8796,14 +9080,14 @@
                         </a:rPr>
                         <a:t>Superata</a:t>
                       </a:r>
-                      <a:endParaRPr lang="en-US" sz="1300" dirty="0">
+                      <a:endParaRPr lang="en-US" sz="1200" dirty="0">
                         <a:latin typeface="Calibri" charset="0"/>
                         <a:ea typeface="Calibri" charset="0"/>
                         <a:cs typeface="Calibri" charset="0"/>
                       </a:endParaRPr>
                     </a:p>
                   </a:txBody>
-                  <a:tcPr marL="91440" marR="91440" marT="45720" marB="45720" anchor="ctr">
+                  <a:tcPr marL="91440" marR="91440" marT="36576" marB="36576" anchor="ctr">
                     <a:lnL w="9525" cap="flat" cmpd="sng" algn="ctr">
                       <a:solidFill>
                         <a:srgbClr val="D5DEDC"/>
@@ -8843,7 +9127,7 @@
                   </a:tcPr>
                 </a:tc>
               </a:tr>
-              <a:tr h="548640">
+              <a:tr h="475488">
                 <a:tc>
                   <a:txBody>
                     <a:bodyPr/>
@@ -8853,7 +9137,7 @@
                         <a:buNone/>
                       </a:pPr>
                       <a:r>
-                        <a:rPr lang="en-US" sz="1300" b="1" dirty="0">
+                        <a:rPr lang="en-US" sz="1200" b="1" dirty="0">
                           <a:solidFill>
                             <a:schemeClr val="tx2"/>
                           </a:solidFill>
@@ -8863,14 +9147,14 @@
                         </a:rPr>
                         <a:t>Orari e ora legale</a:t>
                       </a:r>
-                      <a:endParaRPr lang="en-US" sz="1300" dirty="0">
+                      <a:endParaRPr lang="en-US" sz="1200" dirty="0">
                         <a:latin typeface="Calibri" charset="0"/>
                         <a:ea typeface="Calibri" charset="0"/>
                         <a:cs typeface="Calibri" charset="0"/>
                       </a:endParaRPr>
                     </a:p>
                   </a:txBody>
-                  <a:tcPr marL="91440" marR="91440" marT="45720" marB="45720" anchor="ctr">
+                  <a:tcPr marL="91440" marR="91440" marT="36576" marB="36576" anchor="ctr">
                     <a:lnL w="9525" cap="flat" cmpd="sng" algn="ctr">
                       <a:solidFill>
                         <a:srgbClr val="D5DEDC"/>
@@ -8918,7 +9202,7 @@
                         <a:buNone/>
                       </a:pPr>
                       <a:r>
-                        <a:rPr lang="en-US" sz="1300" dirty="0">
+                        <a:rPr lang="en-US" sz="1200" dirty="0">
                           <a:solidFill>
                             <a:schemeClr val="tx1"/>
                           </a:solidFill>
@@ -8928,14 +9212,14 @@
                         </a:rPr>
                         <a:t>10:00 a Roma resta 10:00 nei giorni del cambio ora</a:t>
                       </a:r>
-                      <a:endParaRPr lang="en-US" sz="1300" dirty="0">
+                      <a:endParaRPr lang="en-US" sz="1200" dirty="0">
                         <a:latin typeface="Calibri" charset="0"/>
                         <a:ea typeface="Calibri" charset="0"/>
                         <a:cs typeface="Calibri" charset="0"/>
                       </a:endParaRPr>
                     </a:p>
                   </a:txBody>
-                  <a:tcPr marL="91440" marR="91440" marT="45720" marB="45720" anchor="ctr">
+                  <a:tcPr marL="91440" marR="91440" marT="36576" marB="36576" anchor="ctr">
                     <a:lnL w="9525" cap="flat" cmpd="sng" algn="ctr">
                       <a:solidFill>
                         <a:srgbClr val="D5DEDC"/>
@@ -8983,7 +9267,7 @@
                         <a:buNone/>
                       </a:pPr>
                       <a:r>
-                        <a:rPr lang="en-US" sz="1300" b="1" dirty="0">
+                        <a:rPr lang="en-US" sz="1200" b="1" dirty="0">
                           <a:solidFill>
                             <a:schemeClr val="accent5"/>
                           </a:solidFill>
@@ -8993,14 +9277,14 @@
                         </a:rPr>
                         <a:t>Superata</a:t>
                       </a:r>
-                      <a:endParaRPr lang="en-US" sz="1300" dirty="0">
+                      <a:endParaRPr lang="en-US" sz="1200" dirty="0">
                         <a:latin typeface="Calibri" charset="0"/>
                         <a:ea typeface="Calibri" charset="0"/>
                         <a:cs typeface="Calibri" charset="0"/>
                       </a:endParaRPr>
                     </a:p>
                   </a:txBody>
-                  <a:tcPr marL="91440" marR="91440" marT="45720" marB="45720" anchor="ctr">
+                  <a:tcPr marL="91440" marR="91440" marT="36576" marB="36576" anchor="ctr">
                     <a:lnL w="9525" cap="flat" cmpd="sng" algn="ctr">
                       <a:solidFill>
                         <a:srgbClr val="D5DEDC"/>
@@ -9040,7 +9324,7 @@
                   </a:tcPr>
                 </a:tc>
               </a:tr>
-              <a:tr h="548640">
+              <a:tr h="475488">
                 <a:tc>
                   <a:txBody>
                     <a:bodyPr/>
@@ -9050,7 +9334,7 @@
                         <a:buNone/>
                       </a:pPr>
                       <a:r>
-                        <a:rPr lang="en-US" sz="1300" b="1" dirty="0">
+                        <a:rPr lang="en-US" sz="1200" b="1" dirty="0">
                           <a:solidFill>
                             <a:schemeClr val="tx2"/>
                           </a:solidFill>
@@ -9060,14 +9344,14 @@
                         </a:rPr>
                         <a:t>Seed dei dati sintetici</a:t>
                       </a:r>
-                      <a:endParaRPr lang="en-US" sz="1300" dirty="0">
+                      <a:endParaRPr lang="en-US" sz="1200" dirty="0">
                         <a:latin typeface="Calibri" charset="0"/>
                         <a:ea typeface="Calibri" charset="0"/>
                         <a:cs typeface="Calibri" charset="0"/>
                       </a:endParaRPr>
                     </a:p>
                   </a:txBody>
-                  <a:tcPr marL="91440" marR="91440" marT="45720" marB="45720" anchor="ctr">
+                  <a:tcPr marL="91440" marR="91440" marT="36576" marB="36576" anchor="ctr">
                     <a:lnL w="9525" cap="flat" cmpd="sng" algn="ctr">
                       <a:solidFill>
                         <a:srgbClr val="D5DEDC"/>
@@ -9115,7 +9399,7 @@
                         <a:buNone/>
                       </a:pPr>
                       <a:r>
-                        <a:rPr lang="en-US" sz="1300" dirty="0">
+                        <a:rPr lang="en-US" sz="1200" dirty="0">
                           <a:solidFill>
                             <a:schemeClr val="tx1"/>
                           </a:solidFill>
@@ -9125,14 +9409,14 @@
                         </a:rPr>
                         <a:t>Due avvii non duplicano i dati</a:t>
                       </a:r>
-                      <a:endParaRPr lang="en-US" sz="1300" dirty="0">
+                      <a:endParaRPr lang="en-US" sz="1200" dirty="0">
                         <a:latin typeface="Calibri" charset="0"/>
                         <a:ea typeface="Calibri" charset="0"/>
                         <a:cs typeface="Calibri" charset="0"/>
                       </a:endParaRPr>
                     </a:p>
                   </a:txBody>
-                  <a:tcPr marL="91440" marR="91440" marT="45720" marB="45720" anchor="ctr">
+                  <a:tcPr marL="91440" marR="91440" marT="36576" marB="36576" anchor="ctr">
                     <a:lnL w="9525" cap="flat" cmpd="sng" algn="ctr">
                       <a:solidFill>
                         <a:srgbClr val="D5DEDC"/>
@@ -9180,7 +9464,7 @@
                         <a:buNone/>
                       </a:pPr>
                       <a:r>
-                        <a:rPr lang="en-US" sz="1300" b="1" dirty="0">
+                        <a:rPr lang="en-US" sz="1200" b="1" dirty="0">
                           <a:solidFill>
                             <a:schemeClr val="accent5"/>
                           </a:solidFill>
@@ -9190,14 +9474,211 @@
                         </a:rPr>
                         <a:t>Superata</a:t>
                       </a:r>
-                      <a:endParaRPr lang="en-US" sz="1300" dirty="0">
+                      <a:endParaRPr lang="en-US" sz="1200" dirty="0">
                         <a:latin typeface="Calibri" charset="0"/>
                         <a:ea typeface="Calibri" charset="0"/>
                         <a:cs typeface="Calibri" charset="0"/>
                       </a:endParaRPr>
                     </a:p>
                   </a:txBody>
-                  <a:tcPr marL="91440" marR="91440" marT="45720" marB="45720" anchor="ctr">
+                  <a:tcPr marL="91440" marR="91440" marT="36576" marB="36576" anchor="ctr">
+                    <a:lnL w="9525" cap="flat" cmpd="sng" algn="ctr">
+                      <a:solidFill>
+                        <a:srgbClr val="D5DEDC"/>
+                      </a:solidFill>
+                      <a:prstDash val="solid"/>
+                      <a:round/>
+                      <a:headEnd type="none" w="med" len="med"/>
+                      <a:tailEnd type="none" w="med" len="med"/>
+                    </a:lnL>
+                    <a:lnR w="9525" cap="flat" cmpd="sng" algn="ctr">
+                      <a:solidFill>
+                        <a:srgbClr val="D5DEDC"/>
+                      </a:solidFill>
+                      <a:prstDash val="solid"/>
+                      <a:round/>
+                      <a:headEnd type="none" w="med" len="med"/>
+                      <a:tailEnd type="none" w="med" len="med"/>
+                    </a:lnR>
+                    <a:lnT w="9525" cap="flat" cmpd="sng" algn="ctr">
+                      <a:solidFill>
+                        <a:srgbClr val="D5DEDC"/>
+                      </a:solidFill>
+                      <a:prstDash val="solid"/>
+                      <a:round/>
+                      <a:headEnd type="none" w="med" len="med"/>
+                      <a:tailEnd type="none" w="med" len="med"/>
+                    </a:lnT>
+                    <a:lnB w="9525" cap="flat" cmpd="sng" algn="ctr">
+                      <a:solidFill>
+                        <a:srgbClr val="D5DEDC"/>
+                      </a:solidFill>
+                      <a:prstDash val="solid"/>
+                      <a:round/>
+                      <a:headEnd type="none" w="med" len="med"/>
+                      <a:tailEnd type="none" w="med" len="med"/>
+                    </a:lnB>
+                  </a:tcPr>
+                </a:tc>
+              </a:tr>
+              <a:tr h="475488">
+                <a:tc>
+                  <a:txBody>
+                    <a:bodyPr/>
+                    <a:lstStyle/>
+                    <a:p>
+                      <a:pPr indent="0" marL="0">
+                        <a:buNone/>
+                      </a:pPr>
+                      <a:r>
+                        <a:rPr lang="en-US" sz="1200" b="1" dirty="0">
+                          <a:solidFill>
+                            <a:schemeClr val="tx2"/>
+                          </a:solidFill>
+                          <a:latin typeface="Calibri" pitchFamily="34" charset="0"/>
+                          <a:ea typeface="Calibri" pitchFamily="34" charset="-122"/>
+                          <a:cs typeface="Calibri" pitchFamily="34" charset="-120"/>
+                        </a:rPr>
+                        <a:t>Percorso della demo sull'API</a:t>
+                      </a:r>
+                      <a:endParaRPr lang="en-US" sz="1200" dirty="0">
+                        <a:latin typeface="Calibri" charset="0"/>
+                        <a:ea typeface="Calibri" charset="0"/>
+                        <a:cs typeface="Calibri" charset="0"/>
+                      </a:endParaRPr>
+                    </a:p>
+                  </a:txBody>
+                  <a:tcPr marL="91440" marR="91440" marT="36576" marB="36576" anchor="ctr">
+                    <a:lnL w="9525" cap="flat" cmpd="sng" algn="ctr">
+                      <a:solidFill>
+                        <a:srgbClr val="D5DEDC"/>
+                      </a:solidFill>
+                      <a:prstDash val="solid"/>
+                      <a:round/>
+                      <a:headEnd type="none" w="med" len="med"/>
+                      <a:tailEnd type="none" w="med" len="med"/>
+                    </a:lnL>
+                    <a:lnR w="9525" cap="flat" cmpd="sng" algn="ctr">
+                      <a:solidFill>
+                        <a:srgbClr val="D5DEDC"/>
+                      </a:solidFill>
+                      <a:prstDash val="solid"/>
+                      <a:round/>
+                      <a:headEnd type="none" w="med" len="med"/>
+                      <a:tailEnd type="none" w="med" len="med"/>
+                    </a:lnR>
+                    <a:lnT w="9525" cap="flat" cmpd="sng" algn="ctr">
+                      <a:solidFill>
+                        <a:srgbClr val="D5DEDC"/>
+                      </a:solidFill>
+                      <a:prstDash val="solid"/>
+                      <a:round/>
+                      <a:headEnd type="none" w="med" len="med"/>
+                      <a:tailEnd type="none" w="med" len="med"/>
+                    </a:lnT>
+                    <a:lnB w="9525" cap="flat" cmpd="sng" algn="ctr">
+                      <a:solidFill>
+                        <a:srgbClr val="D5DEDC"/>
+                      </a:solidFill>
+                      <a:prstDash val="solid"/>
+                      <a:round/>
+                      <a:headEnd type="none" w="med" len="med"/>
+                      <a:tailEnd type="none" w="med" len="med"/>
+                    </a:lnB>
+                  </a:tcPr>
+                </a:tc>
+                <a:tc>
+                  <a:txBody>
+                    <a:bodyPr/>
+                    <a:lstStyle/>
+                    <a:p>
+                      <a:pPr indent="0" marL="0">
+                        <a:buNone/>
+                      </a:pPr>
+                      <a:r>
+                        <a:rPr lang="en-US" sz="1200" dirty="0">
+                          <a:solidFill>
+                            <a:schemeClr val="tx1"/>
+                          </a:solidFill>
+                          <a:latin typeface="Calibri" pitchFamily="34" charset="0"/>
+                          <a:ea typeface="Calibri" pitchFamily="34" charset="-122"/>
+                          <a:cs typeface="Calibri" pitchFamily="34" charset="-120"/>
+                        </a:rPr>
+                        <a:t>28 chiamate su tre servizi veri: tutte come atteso</a:t>
+                      </a:r>
+                      <a:endParaRPr lang="en-US" sz="1200" dirty="0">
+                        <a:latin typeface="Calibri" charset="0"/>
+                        <a:ea typeface="Calibri" charset="0"/>
+                        <a:cs typeface="Calibri" charset="0"/>
+                      </a:endParaRPr>
+                    </a:p>
+                  </a:txBody>
+                  <a:tcPr marL="91440" marR="91440" marT="36576" marB="36576" anchor="ctr">
+                    <a:lnL w="9525" cap="flat" cmpd="sng" algn="ctr">
+                      <a:solidFill>
+                        <a:srgbClr val="D5DEDC"/>
+                      </a:solidFill>
+                      <a:prstDash val="solid"/>
+                      <a:round/>
+                      <a:headEnd type="none" w="med" len="med"/>
+                      <a:tailEnd type="none" w="med" len="med"/>
+                    </a:lnL>
+                    <a:lnR w="9525" cap="flat" cmpd="sng" algn="ctr">
+                      <a:solidFill>
+                        <a:srgbClr val="D5DEDC"/>
+                      </a:solidFill>
+                      <a:prstDash val="solid"/>
+                      <a:round/>
+                      <a:headEnd type="none" w="med" len="med"/>
+                      <a:tailEnd type="none" w="med" len="med"/>
+                    </a:lnR>
+                    <a:lnT w="9525" cap="flat" cmpd="sng" algn="ctr">
+                      <a:solidFill>
+                        <a:srgbClr val="D5DEDC"/>
+                      </a:solidFill>
+                      <a:prstDash val="solid"/>
+                      <a:round/>
+                      <a:headEnd type="none" w="med" len="med"/>
+                      <a:tailEnd type="none" w="med" len="med"/>
+                    </a:lnT>
+                    <a:lnB w="9525" cap="flat" cmpd="sng" algn="ctr">
+                      <a:solidFill>
+                        <a:srgbClr val="D5DEDC"/>
+                      </a:solidFill>
+                      <a:prstDash val="solid"/>
+                      <a:round/>
+                      <a:headEnd type="none" w="med" len="med"/>
+                      <a:tailEnd type="none" w="med" len="med"/>
+                    </a:lnB>
+                  </a:tcPr>
+                </a:tc>
+                <a:tc>
+                  <a:txBody>
+                    <a:bodyPr/>
+                    <a:lstStyle/>
+                    <a:p>
+                      <a:pPr indent="0" marL="0">
+                        <a:buNone/>
+                      </a:pPr>
+                      <a:r>
+                        <a:rPr lang="en-US" sz="1200" b="1" dirty="0">
+                          <a:solidFill>
+                            <a:schemeClr val="accent5"/>
+                          </a:solidFill>
+                          <a:latin typeface="Calibri" pitchFamily="34" charset="0"/>
+                          <a:ea typeface="Calibri" pitchFamily="34" charset="-122"/>
+                          <a:cs typeface="Calibri" pitchFamily="34" charset="-120"/>
+                        </a:rPr>
+                        <a:t>Superata (28/10)</a:t>
+                      </a:r>
+                      <a:endParaRPr lang="en-US" sz="1200" dirty="0">
+                        <a:latin typeface="Calibri" charset="0"/>
+                        <a:ea typeface="Calibri" charset="0"/>
+                        <a:cs typeface="Calibri" charset="0"/>
+                      </a:endParaRPr>
+                    </a:p>
+                  </a:txBody>
+                  <a:tcPr marL="91440" marR="91440" marT="36576" marB="36576" anchor="ctr">
                     <a:lnL w="9525" cap="flat" cmpd="sng" algn="ctr">
                       <a:solidFill>
                         <a:srgbClr val="D5DEDC"/>
@@ -9243,14 +9724,14 @@
       </p:graphicFrame>
       <p:sp>
         <p:nvSpPr>
-          <p:cNvPr id="5" name="text-88"/>
+          <p:cNvPr id="5" name="text-96"/>
           <p:cNvSpPr txBox="1"/>
           <p:nvPr/>
         </p:nvSpPr>
         <p:spPr>
           <a:xfrm>
             <a:off x="457200" y="4572000"/>
-            <a:ext cx="7315200" cy="274320"/>
+            <a:ext cx="7680960" cy="274320"/>
           </a:xfrm>
           <a:prstGeom prst="rect">
             <a:avLst/>
@@ -9274,7 +9755,7 @@
                 <a:ea typeface="Calibri" pitchFamily="34" charset="-122"/>
                 <a:cs typeface="Calibri" pitchFamily="34" charset="-120"/>
               </a:rPr>
-              <a:t>Tutte su PostgreSQL reale, non in memoria.</a:t>
+              <a:t>Tutte su PostgreSQL e MongoDB reali, non in memoria. L'interfaccia non è ancora provata.</a:t>
             </a:r>
             <a:endParaRPr lang="en-US" sz="1200" dirty="0"/>
           </a:p>
@@ -9393,14 +9874,14 @@
       </p:sp>
       <p:sp>
         <p:nvSpPr>
-          <p:cNvPr id="4" name="card-89"/>
+          <p:cNvPr id="4" name="card-97"/>
           <p:cNvSpPr/>
           <p:nvPr/>
         </p:nvSpPr>
         <p:spPr>
           <a:xfrm>
-            <a:off x="457200" y="1234440"/>
-            <a:ext cx="8229600" cy="868680"/>
+            <a:off x="457200" y="1188720"/>
+            <a:ext cx="8229600" cy="777240"/>
           </a:xfrm>
           <a:prstGeom prst="rect">
             <a:avLst/>
@@ -9418,14 +9899,14 @@
       </p:sp>
       <p:sp>
         <p:nvSpPr>
-          <p:cNvPr id="5" name="text-90"/>
+          <p:cNvPr id="5" name="text-98"/>
           <p:cNvSpPr txBox="1"/>
           <p:nvPr/>
         </p:nvSpPr>
         <p:spPr>
           <a:xfrm>
-            <a:off x="685800" y="1325880"/>
-            <a:ext cx="7772400" cy="685800"/>
+            <a:off x="685800" y="1261872"/>
+            <a:ext cx="7772400" cy="640080"/>
           </a:xfrm>
           <a:prstGeom prst="rect">
             <a:avLst/>
@@ -9441,7 +9922,7 @@
               <a:buNone/>
             </a:pPr>
             <a:r>
-              <a:rPr lang="en-US" sz="2000" b="1" dirty="0">
+              <a:rPr lang="en-US" sz="1900" b="1" dirty="0">
                 <a:solidFill>
                   <a:schemeClr val="bg1"/>
                 </a:solidFill>
@@ -9451,20 +9932,20 @@
               </a:rPr>
               <a:t>I dati sintetici verificano il prototipo, ma non dimostrano benefici reali per il campus.</a:t>
             </a:r>
-            <a:endParaRPr lang="en-US" sz="2000" dirty="0"/>
-          </a:p>
-        </p:txBody>
-      </p:sp>
-      <p:sp>
-        <p:nvSpPr>
-          <p:cNvPr id="6" name="text-91"/>
+            <a:endParaRPr lang="en-US" sz="1900" dirty="0"/>
+          </a:p>
+        </p:txBody>
+      </p:sp>
+      <p:sp>
+        <p:nvSpPr>
+          <p:cNvPr id="6" name="text-99"/>
           <p:cNvSpPr txBox="1"/>
           <p:nvPr/>
         </p:nvSpPr>
         <p:spPr>
           <a:xfrm>
-            <a:off x="457200" y="2331720"/>
-            <a:ext cx="8229600" cy="2377440"/>
+            <a:off x="457200" y="2148840"/>
+            <a:ext cx="8229600" cy="2560320"/>
           </a:xfrm>
           <a:prstGeom prst="rect">
             <a:avLst/>
@@ -9478,13 +9959,13 @@
           <a:p>
             <a:pPr marL="342900" indent="-342900">
               <a:spcAft>
-                <a:spcPts val="800"/>
+                <a:spcPts val="600"/>
               </a:spcAft>
               <a:buSzPct val="100000"/>
               <a:buChar char="•"/>
             </a:pPr>
             <a:r>
-              <a:rPr lang="en-US" sz="1600" dirty="0">
+              <a:rPr lang="en-US" sz="1400" dirty="0">
                 <a:solidFill>
                   <a:schemeClr val="tx1"/>
                 </a:solidFill>
@@ -9492,20 +9973,20 @@
                 <a:ea typeface="Calibri" pitchFamily="34" charset="-122"/>
                 <a:cs typeface="Calibri" pitchFamily="34" charset="-120"/>
               </a:rPr>
-              <a:t>Concorrenza provata su un solo servizio e un solo database PostgreSQL; con più istanze va ripetuta</a:t>
-            </a:r>
-            <a:endParaRPr lang="en-US" sz="1600" dirty="0"/>
+              <a:t>Interfaccia non ancora provata su due sistemi operativi e su uno smartphone</a:t>
+            </a:r>
+            <a:endParaRPr lang="en-US" sz="1400" dirty="0"/>
           </a:p>
           <a:p>
             <a:pPr marL="342900" indent="-342900">
               <a:spcAft>
-                <a:spcPts val="800"/>
+                <a:spcPts val="600"/>
               </a:spcAft>
               <a:buSzPct val="100000"/>
               <a:buChar char="•"/>
             </a:pPr>
             <a:r>
-              <a:rPr lang="en-US" sz="1600" dirty="0">
+              <a:rPr lang="en-US" sz="1400" dirty="0">
                 <a:solidFill>
                   <a:schemeClr val="tx1"/>
                 </a:solidFill>
@@ -9513,20 +9994,20 @@
                 <a:ea typeface="Calibri" pitchFamily="34" charset="-122"/>
                 <a:cs typeface="Calibri" pitchFamily="34" charset="-120"/>
               </a:rPr>
-              <a:t>Aula mista: un fallimento in CI ancora in indagine, il tetto di capienza non è dimostrato in modo affidabile</a:t>
-            </a:r>
-            <a:endParaRPr lang="en-US" sz="1600" dirty="0"/>
+              <a:t>Concorrenza provata su un solo servizio e un solo database; con più istanze va ripetuta</a:t>
+            </a:r>
+            <a:endParaRPr lang="en-US" sz="1400" dirty="0"/>
           </a:p>
           <a:p>
             <a:pPr marL="342900" indent="-342900">
               <a:spcAft>
-                <a:spcPts val="800"/>
+                <a:spcPts val="600"/>
               </a:spcAft>
               <a:buSzPct val="100000"/>
               <a:buChar char="•"/>
             </a:pPr>
             <a:r>
-              <a:rPr lang="en-US" sz="1600" dirty="0">
+              <a:rPr lang="en-US" sz="1400" dirty="0">
                 <a:solidFill>
                   <a:schemeClr val="tx1"/>
                 </a:solidFill>
@@ -9534,20 +10015,20 @@
                 <a:ea typeface="Calibri" pitchFamily="34" charset="-122"/>
                 <a:cs typeface="Calibri" pitchFamily="34" charset="-120"/>
               </a:rPr>
-              <a:t>Email come file .eml, nessun invio reale</a:t>
-            </a:r>
-            <a:endParaRPr lang="en-US" sz="1600" dirty="0"/>
+              <a:t>Aula mista: un fallimento in CI visto una volta e non riprodotto; causa probabile, non dimostrata</a:t>
+            </a:r>
+            <a:endParaRPr lang="en-US" sz="1400" dirty="0"/>
           </a:p>
           <a:p>
             <a:pPr marL="342900" indent="-342900">
               <a:spcAft>
-                <a:spcPts val="800"/>
+                <a:spcPts val="600"/>
               </a:spcAft>
               <a:buSzPct val="100000"/>
               <a:buChar char="•"/>
             </a:pPr>
             <a:r>
-              <a:rPr lang="en-US" sz="1600" dirty="0">
+              <a:rPr lang="en-US" sz="1400" dirty="0">
                 <a:solidFill>
                   <a:schemeClr val="tx1"/>
                 </a:solidFill>
@@ -9555,20 +10036,41 @@
                 <a:ea typeface="Calibri" pitchFamily="34" charset="-122"/>
                 <a:cs typeface="Calibri" pitchFamily="34" charset="-120"/>
               </a:rPr>
-              <a:t>Prenotazioni già terminate non annullabili (scelta del gruppo, da confermare)</a:t>
-            </a:r>
-            <a:endParaRPr lang="en-US" sz="1600" dirty="0"/>
+              <a:t>Con PostgreSQL fermo Bookings risponde dopo circa un minuto: da correggere</a:t>
+            </a:r>
+            <a:endParaRPr lang="en-US" sz="1400" dirty="0"/>
           </a:p>
           <a:p>
             <a:pPr marL="342900" indent="-342900">
               <a:spcAft>
-                <a:spcPts val="800"/>
+                <a:spcPts val="600"/>
               </a:spcAft>
               <a:buSzPct val="100000"/>
               <a:buChar char="•"/>
             </a:pPr>
             <a:r>
-              <a:rPr lang="en-US" sz="1600" dirty="0">
+              <a:rPr lang="en-US" sz="1400" dirty="0">
+                <a:solidFill>
+                  <a:schemeClr val="tx1"/>
+                </a:solidFill>
+                <a:latin typeface="Calibri" pitchFamily="34" charset="0"/>
+                <a:ea typeface="Calibri" pitchFamily="34" charset="-122"/>
+                <a:cs typeface="Calibri" pitchFamily="34" charset="-120"/>
+              </a:rPr>
+              <a:t>Email in coda nel database: i file .eml arrivano con un task successivo</a:t>
+            </a:r>
+            <a:endParaRPr lang="en-US" sz="1400" dirty="0"/>
+          </a:p>
+          <a:p>
+            <a:pPr marL="342900" indent="-342900">
+              <a:spcAft>
+                <a:spcPts val="600"/>
+              </a:spcAft>
+              <a:buSzPct val="100000"/>
+              <a:buChar char="•"/>
+            </a:pPr>
+            <a:r>
+              <a:rPr lang="en-US" sz="1400" dirty="0">
                 <a:solidFill>
                   <a:schemeClr val="tx1"/>
                 </a:solidFill>
@@ -9578,7 +10080,7 @@
               </a:rPr>
               <a:t>Decisioni del PO ancora in attesa nel registro</a:t>
             </a:r>
-            <a:endParaRPr lang="en-US" sz="1600" dirty="0"/>
+            <a:endParaRPr lang="en-US" sz="1400" dirty="0"/>
           </a:p>
         </p:txBody>
       </p:sp>

--- a/docs/presentation-slides.pptx
+++ b/docs/presentation-slides.pptx
@@ -16,9 +16,10 @@
     <p:sldId id="264" r:id="rId10"/>
     <p:sldId id="265" r:id="rId11"/>
     <p:sldId id="266" r:id="rId12"/>
+    <p:sldId id="267" r:id="rId13"/>
   </p:sldIdLst>
   <p:notesMasterIdLst>
-    <p:notesMasterId r:id="rId13"/>
+    <p:notesMasterId r:id="rId14"/>
   </p:notesMasterIdLst>
   <p:sldSz cx="9144000" cy="5143500"/>
   <p:notesSz cx="5143500" cy="9144000"/>
@@ -600,7 +601,7 @@
           <a:p>
             <a:r>
               <a:rPr lang="en-US" dirty="0"/>
-              <a:t>1 minuto (FranDeSa456 per i costi). I costi di sviluppo e di gestione vanno compilati dal responsabile prima della presentazione: qui non sono stati inventati. Gli sviluppi futuri sono proposte, non impegni.</a:t>
+              <a:t>1 minuto. Dichiarare i limiti prima che li trovi qualcun altro. Frase da dire: i dati sintetici verificano il prototipo ma non dimostrano benefici reali per il campus.</a:t>
             </a:r>
             <a:endParaRPr lang="en-US" dirty="0"/>
           </a:p>
@@ -688,7 +689,7 @@
           <a:p>
             <a:r>
               <a:rPr lang="en-US" dirty="0"/>
-              <a:t>Ognuno spiega in 20 secondi il proprio contributo e un'evidenza che può mostrare. Ognuno rilegge e fa proprio il documento della propria area prima della presentazione.</a:t>
+              <a:t>1 minuto. I numeri sono stime di progetto, non misure in produzione: la fonte è docs/analysis/value-and-costs.md, che li dichiara uno per uno. Gli sviluppi futuri sono proposte, non impegni.</a:t>
             </a:r>
             <a:endParaRPr lang="en-US" dirty="0"/>
           </a:p>
@@ -712,6 +713,94 @@
             <a:fld id="{F7021451-1387-4CA6-816F-3879F97B5CBC}" type="slidenum">
               <a:rPr lang="en-US"/>
               <a:t>11</a:t>
+            </a:fld>
+            <a:endParaRPr lang="en-US"/>
+          </a:p>
+        </p:txBody>
+      </p:sp>
+    </p:spTree>
+    <p:extLst>
+      <p:ext uri="{BB962C8B-B14F-4D97-AF65-F5344CB8AC3E}">
+        <p14:creationId xmlns:p14="http://schemas.microsoft.com/office/powerpoint/2010/main" val="1024086991"/>
+      </p:ext>
+    </p:extLst>
+  </p:cSld>
+  <p:clrMapOvr>
+    <a:masterClrMapping/>
+  </p:clrMapOvr>
+</p:notes>
+</file>
+
+<file path=ppt/notesSlides/notesSlide12.xml><?xml version="1.0" encoding="utf-8"?>
+<p:notes xmlns:a="http://schemas.openxmlformats.org/drawingml/2006/main" xmlns:r="http://schemas.openxmlformats.org/officeDocument/2006/relationships" xmlns:p="http://schemas.openxmlformats.org/presentationml/2006/main">
+  <p:cSld>
+    <p:spTree>
+      <p:nvGrpSpPr>
+        <p:cNvPr id="1" name=""/>
+        <p:cNvGrpSpPr/>
+        <p:nvPr/>
+      </p:nvGrpSpPr>
+      <p:grpSpPr>
+        <a:xfrm>
+          <a:off x="0" y="0"/>
+          <a:ext cx="0" cy="0"/>
+          <a:chOff x="0" y="0"/>
+          <a:chExt cx="0" cy="0"/>
+        </a:xfrm>
+      </p:grpSpPr>
+      <p:sp>
+        <p:nvSpPr>
+          <p:cNvPr id="2" name="Slide Image Placeholder 1"/>
+          <p:cNvSpPr>
+            <a:spLocks noGrp="1" noRot="1" noChangeAspect="1"/>
+          </p:cNvSpPr>
+          <p:nvPr>
+            <p:ph type="sldImg"/>
+          </p:nvPr>
+        </p:nvSpPr>
+        <p:spPr/>
+      </p:sp>
+      <p:sp>
+        <p:nvSpPr>
+          <p:cNvPr id="3" name="Notes Placeholder 2"/>
+          <p:cNvSpPr>
+            <a:spLocks noGrp="1"/>
+          </p:cNvSpPr>
+          <p:nvPr>
+            <p:ph type="body" idx="1"/>
+          </p:nvPr>
+        </p:nvSpPr>
+        <p:spPr/>
+        <p:txBody>
+          <a:bodyPr/>
+          <a:lstStyle/>
+          <a:p>
+            <a:r>
+              <a:rPr lang="en-US" dirty="0"/>
+              <a:t>Ognuno spiega in 20 secondi il proprio contributo e un'evidenza che può mostrare. Il numero di PR è quello delle PR mergiate dal 26/10 al 28/10 (fonte: GitHub). Ognuno rilegge e fa proprio il documento della propria area prima della presentazione.</a:t>
+            </a:r>
+            <a:endParaRPr lang="en-US" dirty="0"/>
+          </a:p>
+        </p:txBody>
+      </p:sp>
+      <p:sp>
+        <p:nvSpPr>
+          <p:cNvPr id="4" name="Slide Number Placeholder 3"/>
+          <p:cNvSpPr>
+            <a:spLocks noGrp="1"/>
+          </p:cNvSpPr>
+          <p:nvPr>
+            <p:ph type="sldNum" sz="quarter" idx="10"/>
+          </p:nvPr>
+        </p:nvSpPr>
+        <p:spPr/>
+        <p:txBody>
+          <a:bodyPr/>
+          <a:lstStyle/>
+          <a:p>
+            <a:fld id="{F7021451-1387-4CA6-816F-3879F97B5CBC}" type="slidenum">
+              <a:rPr lang="en-US"/>
+              <a:t>12</a:t>
             </a:fld>
             <a:endParaRPr lang="en-US"/>
           </a:p>
@@ -1216,7 +1305,7 @@
           <a:p>
             <a:r>
               <a:rPr lang="en-US" dirty="0"/>
-              <a:t>4 minuti, una parte ciascuno. Il percorso completo, con 15 passi e l'esito atteso di ognuno, è in docs/demo-path.md; il 28/10 è stato eseguito sull'API con gli esiti attesi (docs/evidence/2026-10-28-demo-rehearsal-api.md). Va ancora provato nell'interfaccia e a voce da tutto il gruppo.</a:t>
+              <a:t>1 minuto. Sprint Goal 2 (proposta da confermare con il PO): i gruppi confermano la partecipazione entro due ore, chi ha prenotato lascia il commento finale, e l'admin vede aule prenotate e libere, avvisi e statistiche. In due giorni sono state mergiate 76 PR, tutte con la CI obbligatoria e la review di un altro membro. Cosa non è completo: prove di guasto da eseguire, interfaccia da provare su più dispositivi, email solo come file .eml.</a:t>
             </a:r>
             <a:endParaRPr lang="en-US" dirty="0"/>
           </a:p>
@@ -1304,7 +1393,7 @@
           <a:p>
             <a:r>
               <a:rPr lang="en-US" dirty="0"/>
-              <a:t>2 minuti (Rhaastrake, FranDeSa456). Citare solo ciò che è stato eseguito, con l'esito vero. La concorrenza sull'aula mista è superata in locale; in CI c'è stato un solo fallimento, non riprodotto in 80 esecuzioni (issue 142, chiusa con un'ipotesi). Evidenze in docs/evidence/ e nei test di tests/SmartCampus.Bookings.Tests. Il percorso della demo è stato provato solo sull'API.</a:t>
+              <a:t>4 minuti, una parte ciascuno. Il percorso completo, con 15 passi e l'esito atteso di ognuno, è in docs/demo-path.md; il 28/10 è stato eseguito sull'API con gli esiti attesi (docs/evidence/2026-10-28-demo-rehearsal-api.md). Va ancora provato nell'interfaccia e a voce da tutto il gruppo.</a:t>
             </a:r>
             <a:endParaRPr lang="en-US" dirty="0"/>
           </a:p>
@@ -1392,7 +1481,7 @@
           <a:p>
             <a:r>
               <a:rPr lang="en-US" dirty="0"/>
-              <a:t>1 minuto. Dichiarare i limiti prima che li trovi qualcun altro. Frase da dire: i dati sintetici verificano il prototipo ma non dimostrano benefici reali per il campus.</a:t>
+              <a:t>2 minuti (Rhaastrake, FranDeSa456). Citare solo ciò che è stato eseguito, con l'esito vero. La concorrenza sull'aula mista è superata in locale; in CI c'è stato un solo fallimento, non riprodotto in 80 esecuzioni (issue 142, chiusa con un'ipotesi). Evidenze in docs/evidence/ e nei test di tests/SmartCampus.Bookings.Tests. Il percorso della demo è stato provato solo sull'API. Le prove di guasto hanno la procedura scritta ma non sono ancora eseguite.</a:t>
             </a:r>
             <a:endParaRPr lang="en-US" dirty="0"/>
           </a:p>
@@ -2133,7 +2222,7 @@
                 <a:ea typeface="Cambria" pitchFamily="34" charset="-122"/>
                 <a:cs typeface="Cambria" pitchFamily="34" charset="-120"/>
               </a:rPr>
-              <a:t>Costi e sviluppi futuri</a:t>
+              <a:t>Limiti noti</a:t>
             </a:r>
             <a:endParaRPr lang="en-US" sz="3200" dirty="0"/>
           </a:p>
@@ -2141,24 +2230,24 @@
       </p:sp>
       <p:sp>
         <p:nvSpPr>
-          <p:cNvPr id="4" name="card-100"/>
+          <p:cNvPr id="4" name="card-115"/>
           <p:cNvSpPr/>
           <p:nvPr/>
         </p:nvSpPr>
         <p:spPr>
           <a:xfrm>
-            <a:off x="457200" y="1280160"/>
-            <a:ext cx="4023360" cy="3200400"/>
+            <a:off x="457200" y="1188720"/>
+            <a:ext cx="8229600" cy="777240"/>
           </a:xfrm>
           <a:prstGeom prst="rect">
             <a:avLst/>
           </a:prstGeom>
           <a:solidFill>
-            <a:schemeClr val="bg2"/>
+            <a:schemeClr val="accent1"/>
           </a:solidFill>
           <a:ln w="12700">
             <a:solidFill>
-              <a:schemeClr val="bg2"/>
+              <a:schemeClr val="accent1"/>
             </a:solidFill>
             <a:prstDash val="solid"/>
           </a:ln>
@@ -2166,39 +2255,14 @@
       </p:sp>
       <p:sp>
         <p:nvSpPr>
-          <p:cNvPr id="5" name="card-101"/>
-          <p:cNvSpPr/>
-          <p:nvPr/>
-        </p:nvSpPr>
-        <p:spPr>
-          <a:xfrm>
-            <a:off x="4663440" y="1280160"/>
-            <a:ext cx="4023360" cy="3200400"/>
-          </a:xfrm>
-          <a:prstGeom prst="rect">
-            <a:avLst/>
-          </a:prstGeom>
-          <a:solidFill>
-            <a:schemeClr val="bg2"/>
-          </a:solidFill>
-          <a:ln w="12700">
-            <a:solidFill>
-              <a:schemeClr val="bg2"/>
-            </a:solidFill>
-            <a:prstDash val="solid"/>
-          </a:ln>
-        </p:spPr>
-      </p:sp>
-      <p:sp>
-        <p:nvSpPr>
-          <p:cNvPr id="6" name="text-102"/>
+          <p:cNvPr id="5" name="text-116"/>
           <p:cNvSpPr txBox="1"/>
           <p:nvPr/>
         </p:nvSpPr>
         <p:spPr>
           <a:xfrm>
-            <a:off x="685800" y="1417320"/>
-            <a:ext cx="3566160" cy="365760"/>
+            <a:off x="685800" y="1261872"/>
+            <a:ext cx="7772400" cy="640080"/>
           </a:xfrm>
           <a:prstGeom prst="rect">
             <a:avLst/>
@@ -2207,115 +2271,37 @@
           <a:ln/>
         </p:spPr>
         <p:txBody>
-          <a:bodyPr wrap="square" lIns="0" tIns="0" rIns="0" bIns="0" rtlCol="0" anchor="t"/>
+          <a:bodyPr wrap="square" lIns="0" tIns="0" rIns="0" bIns="0" rtlCol="0" anchor="ctr"/>
           <a:lstStyle/>
           <a:p>
             <a:pPr indent="0" marL="0">
               <a:buNone/>
             </a:pPr>
             <a:r>
-              <a:rPr lang="en-US" sz="2200" b="1" dirty="0">
-                <a:solidFill>
-                  <a:schemeClr val="tx2"/>
+              <a:rPr lang="en-US" sz="1900" b="1" dirty="0">
+                <a:solidFill>
+                  <a:schemeClr val="bg1"/>
                 </a:solidFill>
                 <a:latin typeface="Cambria" pitchFamily="34" charset="0"/>
                 <a:ea typeface="Cambria" pitchFamily="34" charset="-122"/>
                 <a:cs typeface="Cambria" pitchFamily="34" charset="-120"/>
               </a:rPr>
-              <a:t>Costi</a:t>
-            </a:r>
-            <a:endParaRPr lang="en-US" sz="2200" dirty="0"/>
-          </a:p>
-        </p:txBody>
-      </p:sp>
-      <p:sp>
-        <p:nvSpPr>
-          <p:cNvPr id="7" name="text-103"/>
+              <a:t>I dati sintetici verificano il prototipo, ma non dimostrano benefici reali per il campus.</a:t>
+            </a:r>
+            <a:endParaRPr lang="en-US" sz="1900" dirty="0"/>
+          </a:p>
+        </p:txBody>
+      </p:sp>
+      <p:sp>
+        <p:nvSpPr>
+          <p:cNvPr id="6" name="text-117"/>
           <p:cNvSpPr txBox="1"/>
           <p:nvPr/>
         </p:nvSpPr>
         <p:spPr>
           <a:xfrm>
-            <a:off x="685800" y="1920240"/>
-            <a:ext cx="3566160" cy="1371600"/>
-          </a:xfrm>
-          <a:prstGeom prst="rect">
-            <a:avLst/>
-          </a:prstGeom>
-          <a:noFill/>
-          <a:ln/>
-        </p:spPr>
-        <p:txBody>
-          <a:bodyPr wrap="square" lIns="0" tIns="0" rIns="0" bIns="0" rtlCol="0" anchor="t"/>
-          <a:lstStyle/>
-          <a:p>
-            <a:pPr indent="0" marL="0">
-              <a:buNone/>
-            </a:pPr>
-            <a:r>
-              <a:rPr lang="en-US" sz="1600" dirty="0">
-                <a:solidFill>
-                  <a:schemeClr val="accent4"/>
-                </a:solidFill>
-                <a:latin typeface="Calibri" pitchFamily="34" charset="0"/>
-                <a:ea typeface="Calibri" pitchFamily="34" charset="-122"/>
-                <a:cs typeface="Calibri" pitchFamily="34" charset="-120"/>
-              </a:rPr>
-              <a:t>Da completare con chi cura la valutazione dei costi: sviluppo, gestione e dipendenze.</a:t>
-            </a:r>
-            <a:endParaRPr lang="en-US" sz="1600" dirty="0"/>
-          </a:p>
-        </p:txBody>
-      </p:sp>
-      <p:sp>
-        <p:nvSpPr>
-          <p:cNvPr id="8" name="text-104"/>
-          <p:cNvSpPr txBox="1"/>
-          <p:nvPr/>
-        </p:nvSpPr>
-        <p:spPr>
-          <a:xfrm>
-            <a:off x="4892040" y="1417320"/>
-            <a:ext cx="3566160" cy="365760"/>
-          </a:xfrm>
-          <a:prstGeom prst="rect">
-            <a:avLst/>
-          </a:prstGeom>
-          <a:noFill/>
-          <a:ln/>
-        </p:spPr>
-        <p:txBody>
-          <a:bodyPr wrap="square" lIns="0" tIns="0" rIns="0" bIns="0" rtlCol="0" anchor="t"/>
-          <a:lstStyle/>
-          <a:p>
-            <a:pPr indent="0" marL="0">
-              <a:buNone/>
-            </a:pPr>
-            <a:r>
-              <a:rPr lang="en-US" sz="2200" b="1" dirty="0">
-                <a:solidFill>
-                  <a:schemeClr val="tx2"/>
-                </a:solidFill>
-                <a:latin typeface="Cambria" pitchFamily="34" charset="0"/>
-                <a:ea typeface="Cambria" pitchFamily="34" charset="-122"/>
-                <a:cs typeface="Cambria" pitchFamily="34" charset="-120"/>
-              </a:rPr>
-              <a:t>Sviluppi futuri</a:t>
-            </a:r>
-            <a:endParaRPr lang="en-US" sz="2200" dirty="0"/>
-          </a:p>
-        </p:txBody>
-      </p:sp>
-      <p:sp>
-        <p:nvSpPr>
-          <p:cNvPr id="9" name="text-105"/>
-          <p:cNvSpPr txBox="1"/>
-          <p:nvPr/>
-        </p:nvSpPr>
-        <p:spPr>
-          <a:xfrm>
-            <a:off x="4892040" y="1920240"/>
-            <a:ext cx="3566160" cy="2468880"/>
+            <a:off x="457200" y="2148840"/>
+            <a:ext cx="8229600" cy="2560320"/>
           </a:xfrm>
           <a:prstGeom prst="rect">
             <a:avLst/>
@@ -2335,7 +2321,7 @@
               <a:buChar char="•"/>
             </a:pPr>
             <a:r>
-              <a:rPr lang="en-US" sz="1500" dirty="0">
+              <a:rPr lang="en-US" sz="1400" dirty="0">
                 <a:solidFill>
                   <a:schemeClr val="tx1"/>
                 </a:solidFill>
@@ -2343,9 +2329,9 @@
                 <a:ea typeface="Calibri" pitchFamily="34" charset="-122"/>
                 <a:cs typeface="Calibri" pitchFamily="34" charset="-120"/>
               </a:rPr>
-              <a:t>Email reali al posto dei file .eml</a:t>
-            </a:r>
-            <a:endParaRPr lang="en-US" sz="1500" dirty="0"/>
+              <a:t>Interfaccia non ancora provata su due sistemi operativi e su uno smartphone</a:t>
+            </a:r>
+            <a:endParaRPr lang="en-US" sz="1400" dirty="0"/>
           </a:p>
           <a:p>
             <a:pPr marL="342900" indent="-342900">
@@ -2356,7 +2342,7 @@
               <a:buChar char="•"/>
             </a:pPr>
             <a:r>
-              <a:rPr lang="en-US" sz="1500" dirty="0">
+              <a:rPr lang="en-US" sz="1400" dirty="0">
                 <a:solidFill>
                   <a:schemeClr val="tx1"/>
                 </a:solidFill>
@@ -2364,9 +2350,9 @@
                 <a:ea typeface="Calibri" pitchFamily="34" charset="-122"/>
                 <a:cs typeface="Calibri" pitchFamily="34" charset="-120"/>
               </a:rPr>
-              <a:t>Autenticazione con account dell'istituto</a:t>
-            </a:r>
-            <a:endParaRPr lang="en-US" sz="1500" dirty="0"/>
+              <a:t>Concorrenza provata su un solo servizio e un solo database; con più istanze va ripetuta</a:t>
+            </a:r>
+            <a:endParaRPr lang="en-US" sz="1400" dirty="0"/>
           </a:p>
           <a:p>
             <a:pPr marL="342900" indent="-342900">
@@ -2377,7 +2363,7 @@
               <a:buChar char="•"/>
             </a:pPr>
             <a:r>
-              <a:rPr lang="en-US" sz="1500" dirty="0">
+              <a:rPr lang="en-US" sz="1400" dirty="0">
                 <a:solidFill>
                   <a:schemeClr val="tx1"/>
                 </a:solidFill>
@@ -2385,9 +2371,9 @@
                 <a:ea typeface="Calibri" pitchFamily="34" charset="-122"/>
                 <a:cs typeface="Calibri" pitchFamily="34" charset="-120"/>
               </a:rPr>
-              <a:t>Statistiche d'uso dai commenti finali</a:t>
-            </a:r>
-            <a:endParaRPr lang="en-US" sz="1500" dirty="0"/>
+              <a:t>Aula mista: un fallimento in CI visto una volta e non riprodotto; causa probabile, non dimostrata</a:t>
+            </a:r>
+            <a:endParaRPr lang="en-US" sz="1400" dirty="0"/>
           </a:p>
           <a:p>
             <a:pPr marL="342900" indent="-342900">
@@ -2398,7 +2384,7 @@
               <a:buChar char="•"/>
             </a:pPr>
             <a:r>
-              <a:rPr lang="en-US" sz="1500" dirty="0">
+              <a:rPr lang="en-US" sz="1400" dirty="0">
                 <a:solidFill>
                   <a:schemeClr val="tx1"/>
                 </a:solidFill>
@@ -2406,9 +2392,51 @@
                 <a:ea typeface="Calibri" pitchFamily="34" charset="-122"/>
                 <a:cs typeface="Calibri" pitchFamily="34" charset="-120"/>
               </a:rPr>
-              <a:t>Più istanze dei servizi, con prove di concorrenza ripetute</a:t>
-            </a:r>
-            <a:endParaRPr lang="en-US" sz="1500" dirty="0"/>
+              <a:t>Prove di guasto con la procedura scritta ma non ancora eseguite</a:t>
+            </a:r>
+            <a:endParaRPr lang="en-US" sz="1400" dirty="0"/>
+          </a:p>
+          <a:p>
+            <a:pPr marL="342900" indent="-342900">
+              <a:spcAft>
+                <a:spcPts val="600"/>
+              </a:spcAft>
+              <a:buSzPct val="100000"/>
+              <a:buChar char="•"/>
+            </a:pPr>
+            <a:r>
+              <a:rPr lang="en-US" sz="1400" dirty="0">
+                <a:solidFill>
+                  <a:schemeClr val="tx1"/>
+                </a:solidFill>
+                <a:latin typeface="Calibri" pitchFamily="34" charset="0"/>
+                <a:ea typeface="Calibri" pitchFamily="34" charset="-122"/>
+                <a:cs typeface="Calibri" pitchFamily="34" charset="-120"/>
+              </a:rPr>
+              <a:t>Email come file .eml in una cartella locale, nessun invio reale</a:t>
+            </a:r>
+            <a:endParaRPr lang="en-US" sz="1400" dirty="0"/>
+          </a:p>
+          <a:p>
+            <a:pPr marL="342900" indent="-342900">
+              <a:spcAft>
+                <a:spcPts val="600"/>
+              </a:spcAft>
+              <a:buSzPct val="100000"/>
+              <a:buChar char="•"/>
+            </a:pPr>
+            <a:r>
+              <a:rPr lang="en-US" sz="1400" dirty="0">
+                <a:solidFill>
+                  <a:schemeClr val="tx1"/>
+                </a:solidFill>
+                <a:latin typeface="Calibri" pitchFamily="34" charset="0"/>
+                <a:ea typeface="Calibri" pitchFamily="34" charset="-122"/>
+                <a:cs typeface="Calibri" pitchFamily="34" charset="-120"/>
+              </a:rPr>
+              <a:t>Decisioni del PO ancora in attesa nel registro</a:t>
+            </a:r>
+            <a:endParaRPr lang="en-US" sz="1400" dirty="0"/>
           </a:p>
         </p:txBody>
       </p:sp>
@@ -2517,6 +2545,457 @@
                 <a:ea typeface="Cambria" pitchFamily="34" charset="-122"/>
                 <a:cs typeface="Cambria" pitchFamily="34" charset="-120"/>
               </a:rPr>
+              <a:t>Costi e sviluppi futuri</a:t>
+            </a:r>
+            <a:endParaRPr lang="en-US" sz="3200" dirty="0"/>
+          </a:p>
+        </p:txBody>
+      </p:sp>
+      <p:sp>
+        <p:nvSpPr>
+          <p:cNvPr id="4" name="card-118"/>
+          <p:cNvSpPr/>
+          <p:nvPr/>
+        </p:nvSpPr>
+        <p:spPr>
+          <a:xfrm>
+            <a:off x="457200" y="1280160"/>
+            <a:ext cx="4023360" cy="3200400"/>
+          </a:xfrm>
+          <a:prstGeom prst="rect">
+            <a:avLst/>
+          </a:prstGeom>
+          <a:solidFill>
+            <a:schemeClr val="bg2"/>
+          </a:solidFill>
+          <a:ln w="12700">
+            <a:solidFill>
+              <a:schemeClr val="bg2"/>
+            </a:solidFill>
+            <a:prstDash val="solid"/>
+          </a:ln>
+        </p:spPr>
+      </p:sp>
+      <p:sp>
+        <p:nvSpPr>
+          <p:cNvPr id="5" name="card-119"/>
+          <p:cNvSpPr/>
+          <p:nvPr/>
+        </p:nvSpPr>
+        <p:spPr>
+          <a:xfrm>
+            <a:off x="4663440" y="1280160"/>
+            <a:ext cx="4023360" cy="3200400"/>
+          </a:xfrm>
+          <a:prstGeom prst="rect">
+            <a:avLst/>
+          </a:prstGeom>
+          <a:solidFill>
+            <a:schemeClr val="bg2"/>
+          </a:solidFill>
+          <a:ln w="12700">
+            <a:solidFill>
+              <a:schemeClr val="bg2"/>
+            </a:solidFill>
+            <a:prstDash val="solid"/>
+          </a:ln>
+        </p:spPr>
+      </p:sp>
+      <p:sp>
+        <p:nvSpPr>
+          <p:cNvPr id="6" name="text-120"/>
+          <p:cNvSpPr txBox="1"/>
+          <p:nvPr/>
+        </p:nvSpPr>
+        <p:spPr>
+          <a:xfrm>
+            <a:off x="685800" y="1417320"/>
+            <a:ext cx="3566160" cy="365760"/>
+          </a:xfrm>
+          <a:prstGeom prst="rect">
+            <a:avLst/>
+          </a:prstGeom>
+          <a:noFill/>
+          <a:ln/>
+        </p:spPr>
+        <p:txBody>
+          <a:bodyPr wrap="square" lIns="0" tIns="0" rIns="0" bIns="0" rtlCol="0" anchor="t"/>
+          <a:lstStyle/>
+          <a:p>
+            <a:pPr indent="0" marL="0">
+              <a:buNone/>
+            </a:pPr>
+            <a:r>
+              <a:rPr lang="en-US" sz="2200" b="1" dirty="0">
+                <a:solidFill>
+                  <a:schemeClr val="tx2"/>
+                </a:solidFill>
+                <a:latin typeface="Cambria" pitchFamily="34" charset="0"/>
+                <a:ea typeface="Cambria" pitchFamily="34" charset="-122"/>
+                <a:cs typeface="Cambria" pitchFamily="34" charset="-120"/>
+              </a:rPr>
+              <a:t>Costi (stime)</a:t>
+            </a:r>
+            <a:endParaRPr lang="en-US" sz="2200" dirty="0"/>
+          </a:p>
+        </p:txBody>
+      </p:sp>
+      <p:sp>
+        <p:nvSpPr>
+          <p:cNvPr id="7" name="text-121"/>
+          <p:cNvSpPr txBox="1"/>
+          <p:nvPr/>
+        </p:nvSpPr>
+        <p:spPr>
+          <a:xfrm>
+            <a:off x="685800" y="1874520"/>
+            <a:ext cx="3566160" cy="2560320"/>
+          </a:xfrm>
+          <a:prstGeom prst="rect">
+            <a:avLst/>
+          </a:prstGeom>
+          <a:noFill/>
+          <a:ln/>
+        </p:spPr>
+        <p:txBody>
+          <a:bodyPr wrap="square" lIns="0" tIns="0" rIns="0" bIns="0" rtlCol="0" anchor="t"/>
+          <a:lstStyle/>
+          <a:p>
+            <a:pPr marL="342900" indent="-342900">
+              <a:spcAft>
+                <a:spcPts val="600"/>
+              </a:spcAft>
+              <a:buSzPct val="100000"/>
+              <a:buChar char="•"/>
+            </a:pPr>
+            <a:r>
+              <a:rPr lang="en-US" sz="1400" dirty="0">
+                <a:solidFill>
+                  <a:schemeClr val="tx1"/>
+                </a:solidFill>
+                <a:latin typeface="Calibri" pitchFamily="34" charset="0"/>
+                <a:ea typeface="Calibri" pitchFamily="34" charset="-122"/>
+                <a:cs typeface="Calibri" pitchFamily="34" charset="-120"/>
+              </a:rPr>
+              <a:t>Zero licenze: .NET, PostgreSQL, MongoDB e Angular sono aperti</a:t>
+            </a:r>
+            <a:endParaRPr lang="en-US" sz="1400" dirty="0"/>
+          </a:p>
+          <a:p>
+            <a:pPr marL="342900" indent="-342900">
+              <a:spcAft>
+                <a:spcPts val="600"/>
+              </a:spcAft>
+              <a:buSzPct val="100000"/>
+              <a:buChar char="•"/>
+            </a:pPr>
+            <a:r>
+              <a:rPr lang="en-US" sz="1400" dirty="0">
+                <a:solidFill>
+                  <a:schemeClr val="tx1"/>
+                </a:solidFill>
+                <a:latin typeface="Calibri" pitchFamily="34" charset="0"/>
+                <a:ea typeface="Calibri" pitchFamily="34" charset="-122"/>
+                <a:cs typeface="Calibri" pitchFamily="34" charset="-120"/>
+              </a:rPr>
+              <a:t>Demo e pilota in locale: nessun costo di cloud</a:t>
+            </a:r>
+            <a:endParaRPr lang="en-US" sz="1400" dirty="0"/>
+          </a:p>
+          <a:p>
+            <a:pPr marL="342900" indent="-342900">
+              <a:spcAft>
+                <a:spcPts val="600"/>
+              </a:spcAft>
+              <a:buSzPct val="100000"/>
+              <a:buChar char="•"/>
+            </a:pPr>
+            <a:r>
+              <a:rPr lang="en-US" sz="1400" dirty="0">
+                <a:solidFill>
+                  <a:schemeClr val="tx1"/>
+                </a:solidFill>
+                <a:latin typeface="Calibri" pitchFamily="34" charset="0"/>
+                <a:ea typeface="Calibri" pitchFamily="34" charset="-122"/>
+                <a:cs typeface="Calibri" pitchFamily="34" charset="-120"/>
+              </a:rPr>
+              <a:t>Esercizio per un ateneo: circa 2 vCPU e 2-4 GB per i database, da validare con prove di carico</a:t>
+            </a:r>
+            <a:endParaRPr lang="en-US" sz="1400" dirty="0"/>
+          </a:p>
+          <a:p>
+            <a:pPr marL="342900" indent="-342900">
+              <a:spcAft>
+                <a:spcPts val="600"/>
+              </a:spcAft>
+              <a:buSzPct val="100000"/>
+              <a:buChar char="•"/>
+            </a:pPr>
+            <a:r>
+              <a:rPr lang="en-US" sz="1400" dirty="0">
+                <a:solidFill>
+                  <a:schemeClr val="tx1"/>
+                </a:solidFill>
+                <a:latin typeface="Calibri" pitchFamily="34" charset="0"/>
+                <a:ea typeface="Calibri" pitchFamily="34" charset="-122"/>
+                <a:cs typeface="Calibri" pitchFamily="34" charset="-120"/>
+              </a:rPr>
+              <a:t>Manutenzione stimata: 2-4 ore al mese di personale già in organico</a:t>
+            </a:r>
+            <a:endParaRPr lang="en-US" sz="1400" dirty="0"/>
+          </a:p>
+        </p:txBody>
+      </p:sp>
+      <p:sp>
+        <p:nvSpPr>
+          <p:cNvPr id="8" name="text-122"/>
+          <p:cNvSpPr txBox="1"/>
+          <p:nvPr/>
+        </p:nvSpPr>
+        <p:spPr>
+          <a:xfrm>
+            <a:off x="4892040" y="1417320"/>
+            <a:ext cx="3566160" cy="365760"/>
+          </a:xfrm>
+          <a:prstGeom prst="rect">
+            <a:avLst/>
+          </a:prstGeom>
+          <a:noFill/>
+          <a:ln/>
+        </p:spPr>
+        <p:txBody>
+          <a:bodyPr wrap="square" lIns="0" tIns="0" rIns="0" bIns="0" rtlCol="0" anchor="t"/>
+          <a:lstStyle/>
+          <a:p>
+            <a:pPr indent="0" marL="0">
+              <a:buNone/>
+            </a:pPr>
+            <a:r>
+              <a:rPr lang="en-US" sz="2200" b="1" dirty="0">
+                <a:solidFill>
+                  <a:schemeClr val="tx2"/>
+                </a:solidFill>
+                <a:latin typeface="Cambria" pitchFamily="34" charset="0"/>
+                <a:ea typeface="Cambria" pitchFamily="34" charset="-122"/>
+                <a:cs typeface="Cambria" pitchFamily="34" charset="-120"/>
+              </a:rPr>
+              <a:t>Sviluppi futuri</a:t>
+            </a:r>
+            <a:endParaRPr lang="en-US" sz="2200" dirty="0"/>
+          </a:p>
+        </p:txBody>
+      </p:sp>
+      <p:sp>
+        <p:nvSpPr>
+          <p:cNvPr id="9" name="text-123"/>
+          <p:cNvSpPr txBox="1"/>
+          <p:nvPr/>
+        </p:nvSpPr>
+        <p:spPr>
+          <a:xfrm>
+            <a:off x="4892040" y="1874520"/>
+            <a:ext cx="3566160" cy="2560320"/>
+          </a:xfrm>
+          <a:prstGeom prst="rect">
+            <a:avLst/>
+          </a:prstGeom>
+          <a:noFill/>
+          <a:ln/>
+        </p:spPr>
+        <p:txBody>
+          <a:bodyPr wrap="square" lIns="0" tIns="0" rIns="0" bIns="0" rtlCol="0" anchor="t"/>
+          <a:lstStyle/>
+          <a:p>
+            <a:pPr marL="342900" indent="-342900">
+              <a:spcAft>
+                <a:spcPts val="600"/>
+              </a:spcAft>
+              <a:buSzPct val="100000"/>
+              <a:buChar char="•"/>
+            </a:pPr>
+            <a:r>
+              <a:rPr lang="en-US" sz="1400" dirty="0">
+                <a:solidFill>
+                  <a:schemeClr val="tx1"/>
+                </a:solidFill>
+                <a:latin typeface="Calibri" pitchFamily="34" charset="0"/>
+                <a:ea typeface="Calibri" pitchFamily="34" charset="-122"/>
+                <a:cs typeface="Calibri" pitchFamily="34" charset="-120"/>
+              </a:rPr>
+              <a:t>Email reali al posto dei file .eml</a:t>
+            </a:r>
+            <a:endParaRPr lang="en-US" sz="1400" dirty="0"/>
+          </a:p>
+          <a:p>
+            <a:pPr marL="342900" indent="-342900">
+              <a:spcAft>
+                <a:spcPts val="600"/>
+              </a:spcAft>
+              <a:buSzPct val="100000"/>
+              <a:buChar char="•"/>
+            </a:pPr>
+            <a:r>
+              <a:rPr lang="en-US" sz="1400" dirty="0">
+                <a:solidFill>
+                  <a:schemeClr val="tx1"/>
+                </a:solidFill>
+                <a:latin typeface="Calibri" pitchFamily="34" charset="0"/>
+                <a:ea typeface="Calibri" pitchFamily="34" charset="-122"/>
+                <a:cs typeface="Calibri" pitchFamily="34" charset="-120"/>
+              </a:rPr>
+              <a:t>Accesso con gli account dell'istituto</a:t>
+            </a:r>
+            <a:endParaRPr lang="en-US" sz="1400" dirty="0"/>
+          </a:p>
+          <a:p>
+            <a:pPr marL="342900" indent="-342900">
+              <a:spcAft>
+                <a:spcPts val="600"/>
+              </a:spcAft>
+              <a:buSzPct val="100000"/>
+              <a:buChar char="•"/>
+            </a:pPr>
+            <a:r>
+              <a:rPr lang="en-US" sz="1400" dirty="0">
+                <a:solidFill>
+                  <a:schemeClr val="tx1"/>
+                </a:solidFill>
+                <a:latin typeface="Calibri" pitchFamily="34" charset="0"/>
+                <a:ea typeface="Calibri" pitchFamily="34" charset="-122"/>
+                <a:cs typeface="Calibri" pitchFamily="34" charset="-120"/>
+              </a:rPr>
+              <a:t>Più sedi e più istanze dei servizi, con prove di concorrenza ripetute</a:t>
+            </a:r>
+            <a:endParaRPr lang="en-US" sz="1400" dirty="0"/>
+          </a:p>
+          <a:p>
+            <a:pPr marL="342900" indent="-342900">
+              <a:spcAft>
+                <a:spcPts val="600"/>
+              </a:spcAft>
+              <a:buSzPct val="100000"/>
+              <a:buChar char="•"/>
+            </a:pPr>
+            <a:r>
+              <a:rPr lang="en-US" sz="1400" dirty="0">
+                <a:solidFill>
+                  <a:schemeClr val="tx1"/>
+                </a:solidFill>
+                <a:latin typeface="Calibri" pitchFamily="34" charset="0"/>
+                <a:ea typeface="Calibri" pitchFamily="34" charset="-122"/>
+                <a:cs typeface="Calibri" pitchFamily="34" charset="-120"/>
+              </a:rPr>
+              <a:t>Sensori di presenza per superare il dato solo dichiarato</a:t>
+            </a:r>
+            <a:endParaRPr lang="en-US" sz="1400" dirty="0"/>
+          </a:p>
+        </p:txBody>
+      </p:sp>
+      <p:sp>
+        <p:nvSpPr>
+          <p:cNvPr id="25" name="Slide Number Placeholder 0"/>
+          <p:cNvSpPr>
+            <a:spLocks noGrp="1"/>
+          </p:cNvSpPr>
+          <p:nvPr>
+            <p:ph type="sldNum" sz="quarter" idx="4294967295"/>
+          </p:nvPr>
+        </p:nvSpPr>
+        <p:spPr>
+          <a:xfrm>
+            <a:off x="8321040" y="4754880"/>
+            <a:ext cx="457200" cy="274320"/>
+          </a:xfrm>
+          <a:prstGeom prst="rect">
+            <a:avLst/>
+          </a:prstGeom>
+          <a:extLst>
+            <a:ext uri="{C572A759-6A51-4108-AA02-DFA0A04FC94B}">
+              <ma14:wrappingTextBoxFlag xmlns:ma14="http://schemas.microsoft.com/office/mac/drawingml/2011/main" val="0"/>
+            </a:ext>
+          </a:extLst>
+        </p:spPr>
+        <p:txBody>
+          <a:bodyPr/>
+          <a:lstStyle>
+            <a:lvl1pPr>
+              <a:defRPr sz="1000">
+                <a:solidFill>
+                  <a:schemeClr val="accent6"/>
+                </a:solidFill>
+              </a:defRPr>
+            </a:lvl1pPr>
+          </a:lstStyle>
+          <a:p>
+            <a:pPr algn="r"/>
+            <a:fld id="{F7021451-1387-4CA6-816F-3879F97B5CBC}" type="slidenum">
+              <a:rPr b="0" lang="en-US"/>
+              <a:t>11</a:t>
+            </a:fld>
+            <a:endParaRPr lang="en-US"/>
+          </a:p>
+        </p:txBody>
+      </p:sp>
+    </p:spTree>
+  </p:cSld>
+  <p:clrMapOvr>
+    <a:masterClrMapping/>
+  </p:clrMapOvr>
+</p:sld>
+</file>
+
+<file path=ppt/slides/slide12.xml><?xml version="1.0" encoding="utf-8"?>
+<p:sld xmlns:a="http://schemas.openxmlformats.org/drawingml/2006/main" xmlns:r="http://schemas.openxmlformats.org/officeDocument/2006/relationships" xmlns:p="http://schemas.openxmlformats.org/presentationml/2006/main">
+  <p:cSld name="Slide 12">
+    <p:spTree>
+      <p:nvGrpSpPr>
+        <p:cNvPr id="1" name=""/>
+        <p:cNvGrpSpPr/>
+        <p:nvPr/>
+      </p:nvGrpSpPr>
+      <p:grpSpPr>
+        <a:xfrm>
+          <a:off x="0" y="0"/>
+          <a:ext cx="0" cy="0"/>
+          <a:chOff x="0" y="0"/>
+          <a:chExt cx="0" cy="0"/>
+        </a:xfrm>
+      </p:grpSpPr>
+      <p:sp>
+        <p:nvSpPr>
+          <p:cNvPr id="2" name="Text 0"/>
+          <p:cNvSpPr/>
+          <p:nvPr>
+            <p:ph idx="100" type="title" hasCustomPrompt="1"/>
+          </p:nvPr>
+        </p:nvSpPr>
+        <p:spPr>
+          <a:xfrm>
+            <a:off x="457200" y="274320"/>
+            <a:ext cx="8229600" cy="731520"/>
+          </a:xfrm>
+          <a:prstGeom prst="rect">
+            <a:avLst/>
+          </a:prstGeom>
+          <a:noFill/>
+          <a:ln/>
+        </p:spPr>
+        <p:txBody>
+          <a:bodyPr wrap="square" lIns="0" tIns="0" rIns="0" bIns="0" rtlCol="0" anchor="ctr"/>
+          <a:lstStyle/>
+          <a:p>
+            <a:pPr algn="l" indent="0" marL="0">
+              <a:buNone/>
+            </a:pPr>
+            <a:r>
+              <a:rPr lang="en-US" sz="3200" b="1" dirty="0">
+                <a:solidFill>
+                  <a:schemeClr val="tx2"/>
+                </a:solidFill>
+                <a:latin typeface="Cambria" pitchFamily="34" charset="0"/>
+                <a:ea typeface="Cambria" pitchFamily="34" charset="-122"/>
+                <a:cs typeface="Cambria" pitchFamily="34" charset="-120"/>
+              </a:rPr>
               <a:t>Chi ha fatto cosa</a:t>
             </a:r>
             <a:endParaRPr lang="en-US" sz="3200" dirty="0"/>
@@ -2525,7 +3004,7 @@
       </p:sp>
       <p:graphicFrame>
         <p:nvGraphicFramePr>
-          <p:cNvPr id="12" name="table-106"/>
+          <p:cNvPr id="13" name="table-124"/>
           <p:cNvGraphicFramePr>
             <a:graphicFrameLocks noGrp="1"/>
           </p:cNvGraphicFramePr>
@@ -2538,7 +3017,7 @@
           </p:nvPr>
         </p:nvGraphicFramePr>
         <p:xfrm>
-          <a:off x="457200" y="1188720"/>
+          <a:off x="457200" y="1143000"/>
           <a:ext cx="8229600" cy="914400"/>
         </p:xfrm>
         <a:graphic>
@@ -2546,10 +3025,11 @@
             <a:tbl>
               <a:tblPr/>
               <a:tblGrid>
-                <a:gridCol w="2011680"/>
-                <a:gridCol w="6217920"/>
+                <a:gridCol w="1737360"/>
+                <a:gridCol w="640080"/>
+                <a:gridCol w="5852160"/>
               </a:tblGrid>
-              <a:tr h="457200">
+              <a:tr h="420624">
                 <a:tc>
                   <a:txBody>
                     <a:bodyPr/>
@@ -2559,7 +3039,213 @@
                         <a:buNone/>
                       </a:pPr>
                       <a:r>
-                        <a:rPr lang="en-US" sz="1400" b="1" dirty="0">
+                        <a:rPr lang="en-US" sz="1300" b="1" dirty="0">
+                          <a:solidFill>
+                            <a:schemeClr val="bg1"/>
+                          </a:solidFill>
+                          <a:latin typeface="Calibri" pitchFamily="34" charset="0"/>
+                          <a:ea typeface="Calibri" pitchFamily="34" charset="-122"/>
+                          <a:cs typeface="Calibri" pitchFamily="34" charset="-120"/>
+                        </a:rPr>
+                        <a:t>Chi</a:t>
+                      </a:r>
+                      <a:endParaRPr lang="en-US" sz="1300" dirty="0">
+                        <a:latin typeface="Calibri" charset="0"/>
+                        <a:ea typeface="Calibri" charset="0"/>
+                        <a:cs typeface="Calibri" charset="0"/>
+                      </a:endParaRPr>
+                    </a:p>
+                  </a:txBody>
+                  <a:tcPr marL="91440" marR="91440" marT="36576" marB="36576" anchor="ctr">
+                    <a:lnL w="9525" cap="flat" cmpd="sng" algn="ctr">
+                      <a:solidFill>
+                        <a:srgbClr val="D5DEDC"/>
+                      </a:solidFill>
+                      <a:prstDash val="solid"/>
+                      <a:round/>
+                      <a:headEnd type="none" w="med" len="med"/>
+                      <a:tailEnd type="none" w="med" len="med"/>
+                    </a:lnL>
+                    <a:lnR w="9525" cap="flat" cmpd="sng" algn="ctr">
+                      <a:solidFill>
+                        <a:srgbClr val="D5DEDC"/>
+                      </a:solidFill>
+                      <a:prstDash val="solid"/>
+                      <a:round/>
+                      <a:headEnd type="none" w="med" len="med"/>
+                      <a:tailEnd type="none" w="med" len="med"/>
+                    </a:lnR>
+                    <a:lnT w="9525" cap="flat" cmpd="sng" algn="ctr">
+                      <a:solidFill>
+                        <a:srgbClr val="D5DEDC"/>
+                      </a:solidFill>
+                      <a:prstDash val="solid"/>
+                      <a:round/>
+                      <a:headEnd type="none" w="med" len="med"/>
+                      <a:tailEnd type="none" w="med" len="med"/>
+                    </a:lnT>
+                    <a:lnB w="9525" cap="flat" cmpd="sng" algn="ctr">
+                      <a:solidFill>
+                        <a:srgbClr val="D5DEDC"/>
+                      </a:solidFill>
+                      <a:prstDash val="solid"/>
+                      <a:round/>
+                      <a:headEnd type="none" w="med" len="med"/>
+                      <a:tailEnd type="none" w="med" len="med"/>
+                    </a:lnB>
+                    <a:solidFill>
+                      <a:schemeClr val="accent1"/>
+                    </a:solidFill>
+                  </a:tcPr>
+                </a:tc>
+                <a:tc>
+                  <a:txBody>
+                    <a:bodyPr/>
+                    <a:lstStyle/>
+                    <a:p>
+                      <a:pPr indent="0" marL="0">
+                        <a:buNone/>
+                      </a:pPr>
+                      <a:r>
+                        <a:rPr lang="en-US" sz="1300" b="1" dirty="0">
+                          <a:solidFill>
+                            <a:schemeClr val="bg1"/>
+                          </a:solidFill>
+                          <a:latin typeface="Calibri" pitchFamily="34" charset="0"/>
+                          <a:ea typeface="Calibri" pitchFamily="34" charset="-122"/>
+                          <a:cs typeface="Calibri" pitchFamily="34" charset="-120"/>
+                        </a:rPr>
+                        <a:t>PR</a:t>
+                      </a:r>
+                      <a:endParaRPr lang="en-US" sz="1300" dirty="0">
+                        <a:latin typeface="Calibri" charset="0"/>
+                        <a:ea typeface="Calibri" charset="0"/>
+                        <a:cs typeface="Calibri" charset="0"/>
+                      </a:endParaRPr>
+                    </a:p>
+                  </a:txBody>
+                  <a:tcPr marL="91440" marR="91440" marT="36576" marB="36576" anchor="ctr">
+                    <a:lnL w="9525" cap="flat" cmpd="sng" algn="ctr">
+                      <a:solidFill>
+                        <a:srgbClr val="D5DEDC"/>
+                      </a:solidFill>
+                      <a:prstDash val="solid"/>
+                      <a:round/>
+                      <a:headEnd type="none" w="med" len="med"/>
+                      <a:tailEnd type="none" w="med" len="med"/>
+                    </a:lnL>
+                    <a:lnR w="9525" cap="flat" cmpd="sng" algn="ctr">
+                      <a:solidFill>
+                        <a:srgbClr val="D5DEDC"/>
+                      </a:solidFill>
+                      <a:prstDash val="solid"/>
+                      <a:round/>
+                      <a:headEnd type="none" w="med" len="med"/>
+                      <a:tailEnd type="none" w="med" len="med"/>
+                    </a:lnR>
+                    <a:lnT w="9525" cap="flat" cmpd="sng" algn="ctr">
+                      <a:solidFill>
+                        <a:srgbClr val="D5DEDC"/>
+                      </a:solidFill>
+                      <a:prstDash val="solid"/>
+                      <a:round/>
+                      <a:headEnd type="none" w="med" len="med"/>
+                      <a:tailEnd type="none" w="med" len="med"/>
+                    </a:lnT>
+                    <a:lnB w="9525" cap="flat" cmpd="sng" algn="ctr">
+                      <a:solidFill>
+                        <a:srgbClr val="D5DEDC"/>
+                      </a:solidFill>
+                      <a:prstDash val="solid"/>
+                      <a:round/>
+                      <a:headEnd type="none" w="med" len="med"/>
+                      <a:tailEnd type="none" w="med" len="med"/>
+                    </a:lnB>
+                    <a:solidFill>
+                      <a:schemeClr val="accent1"/>
+                    </a:solidFill>
+                  </a:tcPr>
+                </a:tc>
+                <a:tc>
+                  <a:txBody>
+                    <a:bodyPr/>
+                    <a:lstStyle/>
+                    <a:p>
+                      <a:pPr indent="0" marL="0">
+                        <a:buNone/>
+                      </a:pPr>
+                      <a:r>
+                        <a:rPr lang="en-US" sz="1300" b="1" dirty="0">
+                          <a:solidFill>
+                            <a:schemeClr val="bg1"/>
+                          </a:solidFill>
+                          <a:latin typeface="Calibri" pitchFamily="34" charset="0"/>
+                          <a:ea typeface="Calibri" pitchFamily="34" charset="-122"/>
+                          <a:cs typeface="Calibri" pitchFamily="34" charset="-120"/>
+                        </a:rPr>
+                        <a:t>Contributo</a:t>
+                      </a:r>
+                      <a:endParaRPr lang="en-US" sz="1300" dirty="0">
+                        <a:latin typeface="Calibri" charset="0"/>
+                        <a:ea typeface="Calibri" charset="0"/>
+                        <a:cs typeface="Calibri" charset="0"/>
+                      </a:endParaRPr>
+                    </a:p>
+                  </a:txBody>
+                  <a:tcPr marL="91440" marR="91440" marT="36576" marB="36576" anchor="ctr">
+                    <a:lnL w="9525" cap="flat" cmpd="sng" algn="ctr">
+                      <a:solidFill>
+                        <a:srgbClr val="D5DEDC"/>
+                      </a:solidFill>
+                      <a:prstDash val="solid"/>
+                      <a:round/>
+                      <a:headEnd type="none" w="med" len="med"/>
+                      <a:tailEnd type="none" w="med" len="med"/>
+                    </a:lnL>
+                    <a:lnR w="9525" cap="flat" cmpd="sng" algn="ctr">
+                      <a:solidFill>
+                        <a:srgbClr val="D5DEDC"/>
+                      </a:solidFill>
+                      <a:prstDash val="solid"/>
+                      <a:round/>
+                      <a:headEnd type="none" w="med" len="med"/>
+                      <a:tailEnd type="none" w="med" len="med"/>
+                    </a:lnR>
+                    <a:lnT w="9525" cap="flat" cmpd="sng" algn="ctr">
+                      <a:solidFill>
+                        <a:srgbClr val="D5DEDC"/>
+                      </a:solidFill>
+                      <a:prstDash val="solid"/>
+                      <a:round/>
+                      <a:headEnd type="none" w="med" len="med"/>
+                      <a:tailEnd type="none" w="med" len="med"/>
+                    </a:lnT>
+                    <a:lnB w="9525" cap="flat" cmpd="sng" algn="ctr">
+                      <a:solidFill>
+                        <a:srgbClr val="D5DEDC"/>
+                      </a:solidFill>
+                      <a:prstDash val="solid"/>
+                      <a:round/>
+                      <a:headEnd type="none" w="med" len="med"/>
+                      <a:tailEnd type="none" w="med" len="med"/>
+                    </a:lnB>
+                    <a:solidFill>
+                      <a:schemeClr val="accent1"/>
+                    </a:solidFill>
+                  </a:tcPr>
+                </a:tc>
+              </a:tr>
+              <a:tr h="420624">
+                <a:tc>
+                  <a:txBody>
+                    <a:bodyPr/>
+                    <a:lstStyle/>
+                    <a:p>
+                      <a:pPr indent="0" marL="0">
+                        <a:buNone/>
+                      </a:pPr>
+                      <a:r>
+                        <a:rPr lang="en-US" sz="1300" b="1" dirty="0">
                           <a:solidFill>
                             <a:schemeClr val="tx2"/>
                           </a:solidFill>
@@ -2569,14 +3255,79 @@
                         </a:rPr>
                         <a:t>asprenolapo</a:t>
                       </a:r>
-                      <a:endParaRPr lang="en-US" sz="1400" dirty="0">
+                      <a:endParaRPr lang="en-US" sz="1300" dirty="0">
                         <a:latin typeface="Calibri" charset="0"/>
                         <a:ea typeface="Calibri" charset="0"/>
                         <a:cs typeface="Calibri" charset="0"/>
                       </a:endParaRPr>
                     </a:p>
                   </a:txBody>
-                  <a:tcPr marL="109728" marR="109728" marT="36576" marB="36576" anchor="ctr">
+                  <a:tcPr marL="91440" marR="91440" marT="36576" marB="36576" anchor="ctr">
+                    <a:lnL w="9525" cap="flat" cmpd="sng" algn="ctr">
+                      <a:solidFill>
+                        <a:srgbClr val="D5DEDC"/>
+                      </a:solidFill>
+                      <a:prstDash val="solid"/>
+                      <a:round/>
+                      <a:headEnd type="none" w="med" len="med"/>
+                      <a:tailEnd type="none" w="med" len="med"/>
+                    </a:lnL>
+                    <a:lnR w="9525" cap="flat" cmpd="sng" algn="ctr">
+                      <a:solidFill>
+                        <a:srgbClr val="D5DEDC"/>
+                      </a:solidFill>
+                      <a:prstDash val="solid"/>
+                      <a:round/>
+                      <a:headEnd type="none" w="med" len="med"/>
+                      <a:tailEnd type="none" w="med" len="med"/>
+                    </a:lnR>
+                    <a:lnT w="9525" cap="flat" cmpd="sng" algn="ctr">
+                      <a:solidFill>
+                        <a:srgbClr val="D5DEDC"/>
+                      </a:solidFill>
+                      <a:prstDash val="solid"/>
+                      <a:round/>
+                      <a:headEnd type="none" w="med" len="med"/>
+                      <a:tailEnd type="none" w="med" len="med"/>
+                    </a:lnT>
+                    <a:lnB w="9525" cap="flat" cmpd="sng" algn="ctr">
+                      <a:solidFill>
+                        <a:srgbClr val="D5DEDC"/>
+                      </a:solidFill>
+                      <a:prstDash val="solid"/>
+                      <a:round/>
+                      <a:headEnd type="none" w="med" len="med"/>
+                      <a:tailEnd type="none" w="med" len="med"/>
+                    </a:lnB>
+                  </a:tcPr>
+                </a:tc>
+                <a:tc>
+                  <a:txBody>
+                    <a:bodyPr/>
+                    <a:lstStyle/>
+                    <a:p>
+                      <a:pPr algn="ctr" indent="0" marL="0">
+                        <a:buNone/>
+                      </a:pPr>
+                      <a:r>
+                        <a:rPr lang="en-US" sz="1300" dirty="0">
+                          <a:solidFill>
+                            <a:schemeClr val="tx1"/>
+                          </a:solidFill>
+                          <a:latin typeface="Calibri" pitchFamily="34" charset="0"/>
+                          <a:ea typeface="Calibri" pitchFamily="34" charset="-122"/>
+                          <a:cs typeface="Calibri" pitchFamily="34" charset="-120"/>
+                        </a:rPr>
+                        <a:t>11</a:t>
+                      </a:r>
+                      <a:endParaRPr lang="en-US" sz="1300" dirty="0">
+                        <a:latin typeface="Calibri" charset="0"/>
+                        <a:ea typeface="Calibri" charset="0"/>
+                        <a:cs typeface="Calibri" charset="0"/>
+                      </a:endParaRPr>
+                    </a:p>
+                  </a:txBody>
+                  <a:tcPr marL="91440" marR="91440" marT="36576" marB="36576" anchor="ctr">
                     <a:lnL w="9525" cap="flat" cmpd="sng" algn="ctr">
                       <a:solidFill>
                         <a:srgbClr val="D5DEDC"/>
@@ -2624,7 +3375,7 @@
                         <a:buNone/>
                       </a:pPr>
                       <a:r>
-                        <a:rPr lang="en-US" sz="1400" dirty="0">
+                        <a:rPr lang="en-US" sz="1200" dirty="0">
                           <a:solidFill>
                             <a:schemeClr val="tx1"/>
                           </a:solidFill>
@@ -2632,16 +3383,16 @@
                           <a:ea typeface="Calibri" pitchFamily="34" charset="-122"/>
                           <a:cs typeface="Calibri" pitchFamily="34" charset="-120"/>
                         </a:rPr>
-                        <a:t>Piattaforma: soluzione, Docker Compose, CI, controllo PR, flusso agentico, ADR</a:t>
+                        <a:t>Piattaforma: CI, MongoDB 7.0, ADR, prove di guasto, flusso agentico e controllo PR</a:t>
                       </a:r>
-                      <a:endParaRPr lang="en-US" sz="1400" dirty="0">
+                      <a:endParaRPr lang="en-US" sz="1200" dirty="0">
                         <a:latin typeface="Calibri" charset="0"/>
                         <a:ea typeface="Calibri" charset="0"/>
                         <a:cs typeface="Calibri" charset="0"/>
                       </a:endParaRPr>
                     </a:p>
                   </a:txBody>
-                  <a:tcPr marL="109728" marR="109728" marT="36576" marB="36576" anchor="ctr">
+                  <a:tcPr marL="91440" marR="91440" marT="36576" marB="36576" anchor="ctr">
                     <a:lnL w="9525" cap="flat" cmpd="sng" algn="ctr">
                       <a:solidFill>
                         <a:srgbClr val="D5DEDC"/>
@@ -2681,7 +3432,7 @@
                   </a:tcPr>
                 </a:tc>
               </a:tr>
-              <a:tr h="457200">
+              <a:tr h="420624">
                 <a:tc>
                   <a:txBody>
                     <a:bodyPr/>
@@ -2691,7 +3442,7 @@
                         <a:buNone/>
                       </a:pPr>
                       <a:r>
-                        <a:rPr lang="en-US" sz="1400" b="1" dirty="0">
+                        <a:rPr lang="en-US" sz="1300" b="1" dirty="0">
                           <a:solidFill>
                             <a:schemeClr val="tx2"/>
                           </a:solidFill>
@@ -2701,14 +3452,79 @@
                         </a:rPr>
                         <a:t>AldAndrew0</a:t>
                       </a:r>
-                      <a:endParaRPr lang="en-US" sz="1400" dirty="0">
+                      <a:endParaRPr lang="en-US" sz="1300" dirty="0">
                         <a:latin typeface="Calibri" charset="0"/>
                         <a:ea typeface="Calibri" charset="0"/>
                         <a:cs typeface="Calibri" charset="0"/>
                       </a:endParaRPr>
                     </a:p>
                   </a:txBody>
-                  <a:tcPr marL="109728" marR="109728" marT="36576" marB="36576" anchor="ctr">
+                  <a:tcPr marL="91440" marR="91440" marT="36576" marB="36576" anchor="ctr">
+                    <a:lnL w="9525" cap="flat" cmpd="sng" algn="ctr">
+                      <a:solidFill>
+                        <a:srgbClr val="D5DEDC"/>
+                      </a:solidFill>
+                      <a:prstDash val="solid"/>
+                      <a:round/>
+                      <a:headEnd type="none" w="med" len="med"/>
+                      <a:tailEnd type="none" w="med" len="med"/>
+                    </a:lnL>
+                    <a:lnR w="9525" cap="flat" cmpd="sng" algn="ctr">
+                      <a:solidFill>
+                        <a:srgbClr val="D5DEDC"/>
+                      </a:solidFill>
+                      <a:prstDash val="solid"/>
+                      <a:round/>
+                      <a:headEnd type="none" w="med" len="med"/>
+                      <a:tailEnd type="none" w="med" len="med"/>
+                    </a:lnR>
+                    <a:lnT w="9525" cap="flat" cmpd="sng" algn="ctr">
+                      <a:solidFill>
+                        <a:srgbClr val="D5DEDC"/>
+                      </a:solidFill>
+                      <a:prstDash val="solid"/>
+                      <a:round/>
+                      <a:headEnd type="none" w="med" len="med"/>
+                      <a:tailEnd type="none" w="med" len="med"/>
+                    </a:lnT>
+                    <a:lnB w="9525" cap="flat" cmpd="sng" algn="ctr">
+                      <a:solidFill>
+                        <a:srgbClr val="D5DEDC"/>
+                      </a:solidFill>
+                      <a:prstDash val="solid"/>
+                      <a:round/>
+                      <a:headEnd type="none" w="med" len="med"/>
+                      <a:tailEnd type="none" w="med" len="med"/>
+                    </a:lnB>
+                  </a:tcPr>
+                </a:tc>
+                <a:tc>
+                  <a:txBody>
+                    <a:bodyPr/>
+                    <a:lstStyle/>
+                    <a:p>
+                      <a:pPr algn="ctr" indent="0" marL="0">
+                        <a:buNone/>
+                      </a:pPr>
+                      <a:r>
+                        <a:rPr lang="en-US" sz="1300" dirty="0">
+                          <a:solidFill>
+                            <a:schemeClr val="tx1"/>
+                          </a:solidFill>
+                          <a:latin typeface="Calibri" pitchFamily="34" charset="0"/>
+                          <a:ea typeface="Calibri" pitchFamily="34" charset="-122"/>
+                          <a:cs typeface="Calibri" pitchFamily="34" charset="-120"/>
+                        </a:rPr>
+                        <a:t>10</a:t>
+                      </a:r>
+                      <a:endParaRPr lang="en-US" sz="1300" dirty="0">
+                        <a:latin typeface="Calibri" charset="0"/>
+                        <a:ea typeface="Calibri" charset="0"/>
+                        <a:cs typeface="Calibri" charset="0"/>
+                      </a:endParaRPr>
+                    </a:p>
+                  </a:txBody>
+                  <a:tcPr marL="91440" marR="91440" marT="36576" marB="36576" anchor="ctr">
                     <a:lnL w="9525" cap="flat" cmpd="sng" algn="ctr">
                       <a:solidFill>
                         <a:srgbClr val="D5DEDC"/>
@@ -2756,7 +3572,7 @@
                         <a:buNone/>
                       </a:pPr>
                       <a:r>
-                        <a:rPr lang="en-US" sz="1400" dirty="0">
+                        <a:rPr lang="en-US" sz="1200" dirty="0">
                           <a:solidFill>
                             <a:schemeClr val="tx1"/>
                           </a:solidFill>
@@ -2764,16 +3580,16 @@
                           <a:ea typeface="Calibri" pitchFamily="34" charset="-122"/>
                           <a:cs typeface="Calibri" pitchFamily="34" charset="-120"/>
                         </a:rPr>
-                        <a:t>Spaces su MongoDB: catalogo, ricerca, indisponibilità, strumenti</a:t>
+                        <a:t>Spaces: catalogo e ricerca, indisponibilità, strumenti, pagine del catalogo</a:t>
                       </a:r>
-                      <a:endParaRPr lang="en-US" sz="1400" dirty="0">
+                      <a:endParaRPr lang="en-US" sz="1200" dirty="0">
                         <a:latin typeface="Calibri" charset="0"/>
                         <a:ea typeface="Calibri" charset="0"/>
                         <a:cs typeface="Calibri" charset="0"/>
                       </a:endParaRPr>
                     </a:p>
                   </a:txBody>
-                  <a:tcPr marL="109728" marR="109728" marT="36576" marB="36576" anchor="ctr">
+                  <a:tcPr marL="91440" marR="91440" marT="36576" marB="36576" anchor="ctr">
                     <a:lnL w="9525" cap="flat" cmpd="sng" algn="ctr">
                       <a:solidFill>
                         <a:srgbClr val="D5DEDC"/>
@@ -2813,7 +3629,7 @@
                   </a:tcPr>
                 </a:tc>
               </a:tr>
-              <a:tr h="457200">
+              <a:tr h="420624">
                 <a:tc>
                   <a:txBody>
                     <a:bodyPr/>
@@ -2823,7 +3639,7 @@
                         <a:buNone/>
                       </a:pPr>
                       <a:r>
-                        <a:rPr lang="en-US" sz="1400" b="1" dirty="0">
+                        <a:rPr lang="en-US" sz="1300" b="1" dirty="0">
                           <a:solidFill>
                             <a:schemeClr val="tx2"/>
                           </a:solidFill>
@@ -2833,14 +3649,79 @@
                         </a:rPr>
                         <a:t>Rhaastrake</a:t>
                       </a:r>
-                      <a:endParaRPr lang="en-US" sz="1400" dirty="0">
+                      <a:endParaRPr lang="en-US" sz="1300" dirty="0">
                         <a:latin typeface="Calibri" charset="0"/>
                         <a:ea typeface="Calibri" charset="0"/>
                         <a:cs typeface="Calibri" charset="0"/>
                       </a:endParaRPr>
                     </a:p>
                   </a:txBody>
-                  <a:tcPr marL="109728" marR="109728" marT="36576" marB="36576" anchor="ctr">
+                  <a:tcPr marL="91440" marR="91440" marT="36576" marB="36576" anchor="ctr">
+                    <a:lnL w="9525" cap="flat" cmpd="sng" algn="ctr">
+                      <a:solidFill>
+                        <a:srgbClr val="D5DEDC"/>
+                      </a:solidFill>
+                      <a:prstDash val="solid"/>
+                      <a:round/>
+                      <a:headEnd type="none" w="med" len="med"/>
+                      <a:tailEnd type="none" w="med" len="med"/>
+                    </a:lnL>
+                    <a:lnR w="9525" cap="flat" cmpd="sng" algn="ctr">
+                      <a:solidFill>
+                        <a:srgbClr val="D5DEDC"/>
+                      </a:solidFill>
+                      <a:prstDash val="solid"/>
+                      <a:round/>
+                      <a:headEnd type="none" w="med" len="med"/>
+                      <a:tailEnd type="none" w="med" len="med"/>
+                    </a:lnR>
+                    <a:lnT w="9525" cap="flat" cmpd="sng" algn="ctr">
+                      <a:solidFill>
+                        <a:srgbClr val="D5DEDC"/>
+                      </a:solidFill>
+                      <a:prstDash val="solid"/>
+                      <a:round/>
+                      <a:headEnd type="none" w="med" len="med"/>
+                      <a:tailEnd type="none" w="med" len="med"/>
+                    </a:lnT>
+                    <a:lnB w="9525" cap="flat" cmpd="sng" algn="ctr">
+                      <a:solidFill>
+                        <a:srgbClr val="D5DEDC"/>
+                      </a:solidFill>
+                      <a:prstDash val="solid"/>
+                      <a:round/>
+                      <a:headEnd type="none" w="med" len="med"/>
+                      <a:tailEnd type="none" w="med" len="med"/>
+                    </a:lnB>
+                  </a:tcPr>
+                </a:tc>
+                <a:tc>
+                  <a:txBody>
+                    <a:bodyPr/>
+                    <a:lstStyle/>
+                    <a:p>
+                      <a:pPr algn="ctr" indent="0" marL="0">
+                        <a:buNone/>
+                      </a:pPr>
+                      <a:r>
+                        <a:rPr lang="en-US" sz="1300" dirty="0">
+                          <a:solidFill>
+                            <a:schemeClr val="tx1"/>
+                          </a:solidFill>
+                          <a:latin typeface="Calibri" pitchFamily="34" charset="0"/>
+                          <a:ea typeface="Calibri" pitchFamily="34" charset="-122"/>
+                          <a:cs typeface="Calibri" pitchFamily="34" charset="-120"/>
+                        </a:rPr>
+                        <a:t>16</a:t>
+                      </a:r>
+                      <a:endParaRPr lang="en-US" sz="1300" dirty="0">
+                        <a:latin typeface="Calibri" charset="0"/>
+                        <a:ea typeface="Calibri" charset="0"/>
+                        <a:cs typeface="Calibri" charset="0"/>
+                      </a:endParaRPr>
+                    </a:p>
+                  </a:txBody>
+                  <a:tcPr marL="91440" marR="91440" marT="36576" marB="36576" anchor="ctr">
                     <a:lnL w="9525" cap="flat" cmpd="sng" algn="ctr">
                       <a:solidFill>
                         <a:srgbClr val="D5DEDC"/>
@@ -2888,7 +3769,7 @@
                         <a:buNone/>
                       </a:pPr>
                       <a:r>
-                        <a:rPr lang="en-US" sz="1400" dirty="0">
+                        <a:rPr lang="en-US" sz="1200" dirty="0">
                           <a:solidFill>
                             <a:schemeClr val="tx1"/>
                           </a:solidFill>
@@ -2896,16 +3777,16 @@
                           <a:ea typeface="Calibri" pitchFamily="34" charset="-122"/>
                           <a:cs typeface="Calibri" pitchFamily="34" charset="-120"/>
                         </a:rPr>
-                        <a:t>Bookings: schema, creazione, annullamento, vincoli, aule miste, fasce orarie, seed</a:t>
+                        <a:t>Bookings: schema, creazione, annullamento, aule miste, fasce, seed, demo</a:t>
                       </a:r>
-                      <a:endParaRPr lang="en-US" sz="1400" dirty="0">
+                      <a:endParaRPr lang="en-US" sz="1200" dirty="0">
                         <a:latin typeface="Calibri" charset="0"/>
                         <a:ea typeface="Calibri" charset="0"/>
                         <a:cs typeface="Calibri" charset="0"/>
                       </a:endParaRPr>
                     </a:p>
                   </a:txBody>
-                  <a:tcPr marL="109728" marR="109728" marT="36576" marB="36576" anchor="ctr">
+                  <a:tcPr marL="91440" marR="91440" marT="36576" marB="36576" anchor="ctr">
                     <a:lnL w="9525" cap="flat" cmpd="sng" algn="ctr">
                       <a:solidFill>
                         <a:srgbClr val="D5DEDC"/>
@@ -2945,7 +3826,7 @@
                   </a:tcPr>
                 </a:tc>
               </a:tr>
-              <a:tr h="457200">
+              <a:tr h="420624">
                 <a:tc>
                   <a:txBody>
                     <a:bodyPr/>
@@ -2955,7 +3836,7 @@
                         <a:buNone/>
                       </a:pPr>
                       <a:r>
-                        <a:rPr lang="en-US" sz="1400" b="1" dirty="0">
+                        <a:rPr lang="en-US" sz="1300" b="1" dirty="0">
                           <a:solidFill>
                             <a:schemeClr val="tx2"/>
                           </a:solidFill>
@@ -2965,14 +3846,79 @@
                         </a:rPr>
                         <a:t>FranDeSa456</a:t>
                       </a:r>
-                      <a:endParaRPr lang="en-US" sz="1400" dirty="0">
+                      <a:endParaRPr lang="en-US" sz="1300" dirty="0">
                         <a:latin typeface="Calibri" charset="0"/>
                         <a:ea typeface="Calibri" charset="0"/>
                         <a:cs typeface="Calibri" charset="0"/>
                       </a:endParaRPr>
                     </a:p>
                   </a:txBody>
-                  <a:tcPr marL="109728" marR="109728" marT="36576" marB="36576" anchor="ctr">
+                  <a:tcPr marL="91440" marR="91440" marT="36576" marB="36576" anchor="ctr">
+                    <a:lnL w="9525" cap="flat" cmpd="sng" algn="ctr">
+                      <a:solidFill>
+                        <a:srgbClr val="D5DEDC"/>
+                      </a:solidFill>
+                      <a:prstDash val="solid"/>
+                      <a:round/>
+                      <a:headEnd type="none" w="med" len="med"/>
+                      <a:tailEnd type="none" w="med" len="med"/>
+                    </a:lnL>
+                    <a:lnR w="9525" cap="flat" cmpd="sng" algn="ctr">
+                      <a:solidFill>
+                        <a:srgbClr val="D5DEDC"/>
+                      </a:solidFill>
+                      <a:prstDash val="solid"/>
+                      <a:round/>
+                      <a:headEnd type="none" w="med" len="med"/>
+                      <a:tailEnd type="none" w="med" len="med"/>
+                    </a:lnR>
+                    <a:lnT w="9525" cap="flat" cmpd="sng" algn="ctr">
+                      <a:solidFill>
+                        <a:srgbClr val="D5DEDC"/>
+                      </a:solidFill>
+                      <a:prstDash val="solid"/>
+                      <a:round/>
+                      <a:headEnd type="none" w="med" len="med"/>
+                      <a:tailEnd type="none" w="med" len="med"/>
+                    </a:lnT>
+                    <a:lnB w="9525" cap="flat" cmpd="sng" algn="ctr">
+                      <a:solidFill>
+                        <a:srgbClr val="D5DEDC"/>
+                      </a:solidFill>
+                      <a:prstDash val="solid"/>
+                      <a:round/>
+                      <a:headEnd type="none" w="med" len="med"/>
+                      <a:tailEnd type="none" w="med" len="med"/>
+                    </a:lnB>
+                  </a:tcPr>
+                </a:tc>
+                <a:tc>
+                  <a:txBody>
+                    <a:bodyPr/>
+                    <a:lstStyle/>
+                    <a:p>
+                      <a:pPr algn="ctr" indent="0" marL="0">
+                        <a:buNone/>
+                      </a:pPr>
+                      <a:r>
+                        <a:rPr lang="en-US" sz="1300" dirty="0">
+                          <a:solidFill>
+                            <a:schemeClr val="tx1"/>
+                          </a:solidFill>
+                          <a:latin typeface="Calibri" pitchFamily="34" charset="0"/>
+                          <a:ea typeface="Calibri" pitchFamily="34" charset="-122"/>
+                          <a:cs typeface="Calibri" pitchFamily="34" charset="-120"/>
+                        </a:rPr>
+                        <a:t>9</a:t>
+                      </a:r>
+                      <a:endParaRPr lang="en-US" sz="1300" dirty="0">
+                        <a:latin typeface="Calibri" charset="0"/>
+                        <a:ea typeface="Calibri" charset="0"/>
+                        <a:cs typeface="Calibri" charset="0"/>
+                      </a:endParaRPr>
+                    </a:p>
+                  </a:txBody>
+                  <a:tcPr marL="91440" marR="91440" marT="36576" marB="36576" anchor="ctr">
                     <a:lnL w="9525" cap="flat" cmpd="sng" algn="ctr">
                       <a:solidFill>
                         <a:srgbClr val="D5DEDC"/>
@@ -3020,7 +3966,7 @@
                         <a:buNone/>
                       </a:pPr>
                       <a:r>
-                        <a:rPr lang="en-US" sz="1400" dirty="0">
+                        <a:rPr lang="en-US" sz="1200" dirty="0">
                           <a:solidFill>
                             <a:schemeClr val="tx1"/>
                           </a:solidFill>
@@ -3028,16 +3974,16 @@
                           <a:ea typeface="Calibri" pitchFamily="34" charset="-122"/>
                           <a:cs typeface="Calibri" pitchFamily="34" charset="-120"/>
                         </a:rPr>
-                        <a:t>Bookings: gruppi, inviti, scadenza, email, mie prenotazioni, disponibilità</a:t>
+                        <a:t>Gruppi, inviti con scadenza, email .eml, mie prenotazioni, concorrenza</a:t>
                       </a:r>
-                      <a:endParaRPr lang="en-US" sz="1400" dirty="0">
+                      <a:endParaRPr lang="en-US" sz="1200" dirty="0">
                         <a:latin typeface="Calibri" charset="0"/>
                         <a:ea typeface="Calibri" charset="0"/>
                         <a:cs typeface="Calibri" charset="0"/>
                       </a:endParaRPr>
                     </a:p>
                   </a:txBody>
-                  <a:tcPr marL="109728" marR="109728" marT="36576" marB="36576" anchor="ctr">
+                  <a:tcPr marL="91440" marR="91440" marT="36576" marB="36576" anchor="ctr">
                     <a:lnL w="9525" cap="flat" cmpd="sng" algn="ctr">
                       <a:solidFill>
                         <a:srgbClr val="D5DEDC"/>
@@ -3077,7 +4023,7 @@
                   </a:tcPr>
                 </a:tc>
               </a:tr>
-              <a:tr h="457200">
+              <a:tr h="420624">
                 <a:tc>
                   <a:txBody>
                     <a:bodyPr/>
@@ -3087,7 +4033,7 @@
                         <a:buNone/>
                       </a:pPr>
                       <a:r>
-                        <a:rPr lang="en-US" sz="1400" b="1" dirty="0">
+                        <a:rPr lang="en-US" sz="1300" b="1" dirty="0">
                           <a:solidFill>
                             <a:schemeClr val="tx2"/>
                           </a:solidFill>
@@ -3097,14 +4043,79 @@
                         </a:rPr>
                         <a:t>fedeericodl</a:t>
                       </a:r>
-                      <a:endParaRPr lang="en-US" sz="1400" dirty="0">
+                      <a:endParaRPr lang="en-US" sz="1300" dirty="0">
                         <a:latin typeface="Calibri" charset="0"/>
                         <a:ea typeface="Calibri" charset="0"/>
                         <a:cs typeface="Calibri" charset="0"/>
                       </a:endParaRPr>
                     </a:p>
                   </a:txBody>
-                  <a:tcPr marL="109728" marR="109728" marT="36576" marB="36576" anchor="ctr">
+                  <a:tcPr marL="91440" marR="91440" marT="36576" marB="36576" anchor="ctr">
+                    <a:lnL w="9525" cap="flat" cmpd="sng" algn="ctr">
+                      <a:solidFill>
+                        <a:srgbClr val="D5DEDC"/>
+                      </a:solidFill>
+                      <a:prstDash val="solid"/>
+                      <a:round/>
+                      <a:headEnd type="none" w="med" len="med"/>
+                      <a:tailEnd type="none" w="med" len="med"/>
+                    </a:lnL>
+                    <a:lnR w="9525" cap="flat" cmpd="sng" algn="ctr">
+                      <a:solidFill>
+                        <a:srgbClr val="D5DEDC"/>
+                      </a:solidFill>
+                      <a:prstDash val="solid"/>
+                      <a:round/>
+                      <a:headEnd type="none" w="med" len="med"/>
+                      <a:tailEnd type="none" w="med" len="med"/>
+                    </a:lnR>
+                    <a:lnT w="9525" cap="flat" cmpd="sng" algn="ctr">
+                      <a:solidFill>
+                        <a:srgbClr val="D5DEDC"/>
+                      </a:solidFill>
+                      <a:prstDash val="solid"/>
+                      <a:round/>
+                      <a:headEnd type="none" w="med" len="med"/>
+                      <a:tailEnd type="none" w="med" len="med"/>
+                    </a:lnT>
+                    <a:lnB w="9525" cap="flat" cmpd="sng" algn="ctr">
+                      <a:solidFill>
+                        <a:srgbClr val="D5DEDC"/>
+                      </a:solidFill>
+                      <a:prstDash val="solid"/>
+                      <a:round/>
+                      <a:headEnd type="none" w="med" len="med"/>
+                      <a:tailEnd type="none" w="med" len="med"/>
+                    </a:lnB>
+                  </a:tcPr>
+                </a:tc>
+                <a:tc>
+                  <a:txBody>
+                    <a:bodyPr/>
+                    <a:lstStyle/>
+                    <a:p>
+                      <a:pPr algn="ctr" indent="0" marL="0">
+                        <a:buNone/>
+                      </a:pPr>
+                      <a:r>
+                        <a:rPr lang="en-US" sz="1300" dirty="0">
+                          <a:solidFill>
+                            <a:schemeClr val="tx1"/>
+                          </a:solidFill>
+                          <a:latin typeface="Calibri" pitchFamily="34" charset="0"/>
+                          <a:ea typeface="Calibri" pitchFamily="34" charset="-122"/>
+                          <a:cs typeface="Calibri" pitchFamily="34" charset="-120"/>
+                        </a:rPr>
+                        <a:t>13</a:t>
+                      </a:r>
+                      <a:endParaRPr lang="en-US" sz="1300" dirty="0">
+                        <a:latin typeface="Calibri" charset="0"/>
+                        <a:ea typeface="Calibri" charset="0"/>
+                        <a:cs typeface="Calibri" charset="0"/>
+                      </a:endParaRPr>
+                    </a:p>
+                  </a:txBody>
+                  <a:tcPr marL="91440" marR="91440" marT="36576" marB="36576" anchor="ctr">
                     <a:lnL w="9525" cap="flat" cmpd="sng" algn="ctr">
                       <a:solidFill>
                         <a:srgbClr val="D5DEDC"/>
@@ -3152,7 +4163,7 @@
                         <a:buNone/>
                       </a:pPr>
                       <a:r>
-                        <a:rPr lang="en-US" sz="1400" dirty="0">
+                        <a:rPr lang="en-US" sz="1200" dirty="0">
                           <a:solidFill>
                             <a:schemeClr val="tx1"/>
                           </a:solidFill>
@@ -3160,16 +4171,16 @@
                           <a:ea typeface="Calibri" pitchFamily="34" charset="-122"/>
                           <a:cs typeface="Calibri" pitchFamily="34" charset="-120"/>
                         </a:rPr>
-                        <a:t>Users e accesso, commento finale, dati sintetici, disponibilità</a:t>
+                        <a:t>Users e accesso, commento finale, disponibilità, dati sintetici</a:t>
                       </a:r>
-                      <a:endParaRPr lang="en-US" sz="1400" dirty="0">
+                      <a:endParaRPr lang="en-US" sz="1200" dirty="0">
                         <a:latin typeface="Calibri" charset="0"/>
                         <a:ea typeface="Calibri" charset="0"/>
                         <a:cs typeface="Calibri" charset="0"/>
                       </a:endParaRPr>
                     </a:p>
                   </a:txBody>
-                  <a:tcPr marL="109728" marR="109728" marT="36576" marB="36576" anchor="ctr">
+                  <a:tcPr marL="91440" marR="91440" marT="36576" marB="36576" anchor="ctr">
                     <a:lnL w="9525" cap="flat" cmpd="sng" algn="ctr">
                       <a:solidFill>
                         <a:srgbClr val="D5DEDC"/>
@@ -3209,7 +4220,7 @@
                   </a:tcPr>
                 </a:tc>
               </a:tr>
-              <a:tr h="457200">
+              <a:tr h="420624">
                 <a:tc>
                   <a:txBody>
                     <a:bodyPr/>
@@ -3219,7 +4230,7 @@
                         <a:buNone/>
                       </a:pPr>
                       <a:r>
-                        <a:rPr lang="en-US" sz="1400" b="1" dirty="0">
+                        <a:rPr lang="en-US" sz="1300" b="1" dirty="0">
                           <a:solidFill>
                             <a:schemeClr val="tx2"/>
                           </a:solidFill>
@@ -3229,14 +4240,79 @@
                         </a:rPr>
                         <a:t>antoStr</a:t>
                       </a:r>
-                      <a:endParaRPr lang="en-US" sz="1400" dirty="0">
+                      <a:endParaRPr lang="en-US" sz="1300" dirty="0">
                         <a:latin typeface="Calibri" charset="0"/>
                         <a:ea typeface="Calibri" charset="0"/>
                         <a:cs typeface="Calibri" charset="0"/>
                       </a:endParaRPr>
                     </a:p>
                   </a:txBody>
-                  <a:tcPr marL="109728" marR="109728" marT="36576" marB="36576" anchor="ctr">
+                  <a:tcPr marL="91440" marR="91440" marT="36576" marB="36576" anchor="ctr">
+                    <a:lnL w="9525" cap="flat" cmpd="sng" algn="ctr">
+                      <a:solidFill>
+                        <a:srgbClr val="D5DEDC"/>
+                      </a:solidFill>
+                      <a:prstDash val="solid"/>
+                      <a:round/>
+                      <a:headEnd type="none" w="med" len="med"/>
+                      <a:tailEnd type="none" w="med" len="med"/>
+                    </a:lnL>
+                    <a:lnR w="9525" cap="flat" cmpd="sng" algn="ctr">
+                      <a:solidFill>
+                        <a:srgbClr val="D5DEDC"/>
+                      </a:solidFill>
+                      <a:prstDash val="solid"/>
+                      <a:round/>
+                      <a:headEnd type="none" w="med" len="med"/>
+                      <a:tailEnd type="none" w="med" len="med"/>
+                    </a:lnR>
+                    <a:lnT w="9525" cap="flat" cmpd="sng" algn="ctr">
+                      <a:solidFill>
+                        <a:srgbClr val="D5DEDC"/>
+                      </a:solidFill>
+                      <a:prstDash val="solid"/>
+                      <a:round/>
+                      <a:headEnd type="none" w="med" len="med"/>
+                      <a:tailEnd type="none" w="med" len="med"/>
+                    </a:lnT>
+                    <a:lnB w="9525" cap="flat" cmpd="sng" algn="ctr">
+                      <a:solidFill>
+                        <a:srgbClr val="D5DEDC"/>
+                      </a:solidFill>
+                      <a:prstDash val="solid"/>
+                      <a:round/>
+                      <a:headEnd type="none" w="med" len="med"/>
+                      <a:tailEnd type="none" w="med" len="med"/>
+                    </a:lnB>
+                  </a:tcPr>
+                </a:tc>
+                <a:tc>
+                  <a:txBody>
+                    <a:bodyPr/>
+                    <a:lstStyle/>
+                    <a:p>
+                      <a:pPr algn="ctr" indent="0" marL="0">
+                        <a:buNone/>
+                      </a:pPr>
+                      <a:r>
+                        <a:rPr lang="en-US" sz="1300" dirty="0">
+                          <a:solidFill>
+                            <a:schemeClr val="tx1"/>
+                          </a:solidFill>
+                          <a:latin typeface="Calibri" pitchFamily="34" charset="0"/>
+                          <a:ea typeface="Calibri" pitchFamily="34" charset="-122"/>
+                          <a:cs typeface="Calibri" pitchFamily="34" charset="-120"/>
+                        </a:rPr>
+                        <a:t>11</a:t>
+                      </a:r>
+                      <a:endParaRPr lang="en-US" sz="1300" dirty="0">
+                        <a:latin typeface="Calibri" charset="0"/>
+                        <a:ea typeface="Calibri" charset="0"/>
+                        <a:cs typeface="Calibri" charset="0"/>
+                      </a:endParaRPr>
+                    </a:p>
+                  </a:txBody>
+                  <a:tcPr marL="91440" marR="91440" marT="36576" marB="36576" anchor="ctr">
                     <a:lnL w="9525" cap="flat" cmpd="sng" algn="ctr">
                       <a:solidFill>
                         <a:srgbClr val="D5DEDC"/>
@@ -3284,7 +4360,7 @@
                         <a:buNone/>
                       </a:pPr>
                       <a:r>
-                        <a:rPr lang="en-US" sz="1400" dirty="0">
+                        <a:rPr lang="en-US" sz="1200" dirty="0">
                           <a:solidFill>
                             <a:schemeClr val="tx1"/>
                           </a:solidFill>
@@ -3292,16 +4368,16 @@
                           <a:ea typeface="Calibri" pitchFamily="34" charset="-122"/>
                           <a:cs typeface="Calibri" pitchFamily="34" charset="-120"/>
                         </a:rPr>
-                        <a:t>Area admin: dashboard, avvisi, eccezioni, statistiche d'uso</a:t>
+                        <a:t>Area admin: dashboard, avvisi, annullamento, statistiche, report</a:t>
                       </a:r>
-                      <a:endParaRPr lang="en-US" sz="1400" dirty="0">
+                      <a:endParaRPr lang="en-US" sz="1200" dirty="0">
                         <a:latin typeface="Calibri" charset="0"/>
                         <a:ea typeface="Calibri" charset="0"/>
                         <a:cs typeface="Calibri" charset="0"/>
                       </a:endParaRPr>
                     </a:p>
                   </a:txBody>
-                  <a:tcPr marL="109728" marR="109728" marT="36576" marB="36576" anchor="ctr">
+                  <a:tcPr marL="91440" marR="91440" marT="36576" marB="36576" anchor="ctr">
                     <a:lnL w="9525" cap="flat" cmpd="sng" algn="ctr">
                       <a:solidFill>
                         <a:srgbClr val="D5DEDC"/>
@@ -3341,7 +4417,7 @@
                   </a:tcPr>
                 </a:tc>
               </a:tr>
-              <a:tr h="457200">
+              <a:tr h="420624">
                 <a:tc>
                   <a:txBody>
                     <a:bodyPr/>
@@ -3351,7 +4427,7 @@
                         <a:buNone/>
                       </a:pPr>
                       <a:r>
-                        <a:rPr lang="en-US" sz="1400" b="1" dirty="0">
+                        <a:rPr lang="en-US" sz="1300" b="1" dirty="0">
                           <a:solidFill>
                             <a:schemeClr val="tx2"/>
                           </a:solidFill>
@@ -3361,14 +4437,79 @@
                         </a:rPr>
                         <a:t>Leo-prova</a:t>
                       </a:r>
-                      <a:endParaRPr lang="en-US" sz="1400" dirty="0">
+                      <a:endParaRPr lang="en-US" sz="1300" dirty="0">
                         <a:latin typeface="Calibri" charset="0"/>
                         <a:ea typeface="Calibri" charset="0"/>
                         <a:cs typeface="Calibri" charset="0"/>
                       </a:endParaRPr>
                     </a:p>
                   </a:txBody>
-                  <a:tcPr marL="109728" marR="109728" marT="36576" marB="36576" anchor="ctr">
+                  <a:tcPr marL="91440" marR="91440" marT="36576" marB="36576" anchor="ctr">
+                    <a:lnL w="9525" cap="flat" cmpd="sng" algn="ctr">
+                      <a:solidFill>
+                        <a:srgbClr val="D5DEDC"/>
+                      </a:solidFill>
+                      <a:prstDash val="solid"/>
+                      <a:round/>
+                      <a:headEnd type="none" w="med" len="med"/>
+                      <a:tailEnd type="none" w="med" len="med"/>
+                    </a:lnL>
+                    <a:lnR w="9525" cap="flat" cmpd="sng" algn="ctr">
+                      <a:solidFill>
+                        <a:srgbClr val="D5DEDC"/>
+                      </a:solidFill>
+                      <a:prstDash val="solid"/>
+                      <a:round/>
+                      <a:headEnd type="none" w="med" len="med"/>
+                      <a:tailEnd type="none" w="med" len="med"/>
+                    </a:lnR>
+                    <a:lnT w="9525" cap="flat" cmpd="sng" algn="ctr">
+                      <a:solidFill>
+                        <a:srgbClr val="D5DEDC"/>
+                      </a:solidFill>
+                      <a:prstDash val="solid"/>
+                      <a:round/>
+                      <a:headEnd type="none" w="med" len="med"/>
+                      <a:tailEnd type="none" w="med" len="med"/>
+                    </a:lnT>
+                    <a:lnB w="9525" cap="flat" cmpd="sng" algn="ctr">
+                      <a:solidFill>
+                        <a:srgbClr val="D5DEDC"/>
+                      </a:solidFill>
+                      <a:prstDash val="solid"/>
+                      <a:round/>
+                      <a:headEnd type="none" w="med" len="med"/>
+                      <a:tailEnd type="none" w="med" len="med"/>
+                    </a:lnB>
+                  </a:tcPr>
+                </a:tc>
+                <a:tc>
+                  <a:txBody>
+                    <a:bodyPr/>
+                    <a:lstStyle/>
+                    <a:p>
+                      <a:pPr algn="ctr" indent="0" marL="0">
+                        <a:buNone/>
+                      </a:pPr>
+                      <a:r>
+                        <a:rPr lang="en-US" sz="1300" dirty="0">
+                          <a:solidFill>
+                            <a:schemeClr val="tx1"/>
+                          </a:solidFill>
+                          <a:latin typeface="Calibri" pitchFamily="34" charset="0"/>
+                          <a:ea typeface="Calibri" pitchFamily="34" charset="-122"/>
+                          <a:cs typeface="Calibri" pitchFamily="34" charset="-120"/>
+                        </a:rPr>
+                        <a:t>6</a:t>
+                      </a:r>
+                      <a:endParaRPr lang="en-US" sz="1300" dirty="0">
+                        <a:latin typeface="Calibri" charset="0"/>
+                        <a:ea typeface="Calibri" charset="0"/>
+                        <a:cs typeface="Calibri" charset="0"/>
+                      </a:endParaRPr>
+                    </a:p>
+                  </a:txBody>
+                  <a:tcPr marL="91440" marR="91440" marT="36576" marB="36576" anchor="ctr">
                     <a:lnL w="9525" cap="flat" cmpd="sng" algn="ctr">
                       <a:solidFill>
                         <a:srgbClr val="D5DEDC"/>
@@ -3416,7 +4557,7 @@
                         <a:buNone/>
                       </a:pPr>
                       <a:r>
-                        <a:rPr lang="en-US" sz="1400" dirty="0">
+                        <a:rPr lang="en-US" sz="1200" dirty="0">
                           <a:solidFill>
                             <a:schemeClr val="tx1"/>
                           </a:solidFill>
@@ -3424,16 +4565,16 @@
                           <a:ea typeface="Calibri" pitchFamily="34" charset="-122"/>
                           <a:cs typeface="Calibri" pitchFamily="34" charset="-120"/>
                         </a:rPr>
-                        <a:t>Frontend utente: accesso, registrazione, prenotazione, gestione errori</a:t>
+                        <a:t>Frontend: login, registrazione, form di prenotazione, mie prenotazioni</a:t>
                       </a:r>
-                      <a:endParaRPr lang="en-US" sz="1400" dirty="0">
+                      <a:endParaRPr lang="en-US" sz="1200" dirty="0">
                         <a:latin typeface="Calibri" charset="0"/>
                         <a:ea typeface="Calibri" charset="0"/>
                         <a:cs typeface="Calibri" charset="0"/>
                       </a:endParaRPr>
                     </a:p>
                   </a:txBody>
-                  <a:tcPr marL="109728" marR="109728" marT="36576" marB="36576" anchor="ctr">
+                  <a:tcPr marL="91440" marR="91440" marT="36576" marB="36576" anchor="ctr">
                     <a:lnL w="9525" cap="flat" cmpd="sng" algn="ctr">
                       <a:solidFill>
                         <a:srgbClr val="D5DEDC"/>
@@ -3516,7 +4657,7 @@
             <a:pPr algn="r"/>
             <a:fld id="{F7021451-1387-4CA6-816F-3879F97B5CBC}" type="slidenum">
               <a:rPr b="0" lang="en-US"/>
-              <a:t>11</a:t>
+              <a:t>12</a:t>
             </a:fld>
             <a:endParaRPr lang="en-US"/>
           </a:p>
@@ -7050,7 +8191,7 @@
                 <a:ea typeface="Cambria" pitchFamily="34" charset="-122"/>
                 <a:cs typeface="Cambria" pitchFamily="34" charset="-120"/>
               </a:rPr>
-              <a:t>La demo</a:t>
+              <a:t>Sprint 2: cosa abbiamo consegnato</a:t>
             </a:r>
             <a:endParaRPr lang="en-US" sz="3200" dirty="0"/>
           </a:p>
@@ -7064,8 +8205,8 @@
         </p:nvSpPr>
         <p:spPr>
           <a:xfrm>
-            <a:off x="457200" y="1143000"/>
-            <a:ext cx="4023360" cy="777240"/>
+            <a:off x="457200" y="1188720"/>
+            <a:ext cx="4023360" cy="1024128"/>
           </a:xfrm>
           <a:prstGeom prst="rect">
             <a:avLst/>
@@ -7089,8 +8230,8 @@
         </p:nvSpPr>
         <p:spPr>
           <a:xfrm>
-            <a:off x="640080" y="1234440"/>
-            <a:ext cx="548640" cy="594360"/>
+            <a:off x="640080" y="1280160"/>
+            <a:ext cx="3657600" cy="310896"/>
           </a:xfrm>
           <a:prstGeom prst="rect">
             <a:avLst/>
@@ -7099,24 +8240,24 @@
           <a:ln/>
         </p:spPr>
         <p:txBody>
-          <a:bodyPr wrap="square" lIns="0" tIns="0" rIns="0" bIns="0" rtlCol="0" anchor="ctr"/>
+          <a:bodyPr wrap="square" lIns="0" tIns="0" rIns="0" bIns="0" rtlCol="0" anchor="t"/>
           <a:lstStyle/>
           <a:p>
             <a:pPr indent="0" marL="0">
               <a:buNone/>
             </a:pPr>
             <a:r>
-              <a:rPr lang="en-US" sz="3000" b="1" dirty="0">
-                <a:solidFill>
-                  <a:schemeClr val="accent2"/>
+              <a:rPr lang="en-US" sz="1600" b="1" dirty="0">
+                <a:solidFill>
+                  <a:schemeClr val="tx2"/>
                 </a:solidFill>
                 <a:latin typeface="Cambria" pitchFamily="34" charset="0"/>
                 <a:ea typeface="Cambria" pitchFamily="34" charset="-122"/>
                 <a:cs typeface="Cambria" pitchFamily="34" charset="-120"/>
               </a:rPr>
-              <a:t>1</a:t>
-            </a:r>
-            <a:endParaRPr lang="en-US" sz="3000" dirty="0"/>
+              <a:t>Gruppi e inviti</a:t>
+            </a:r>
+            <a:endParaRPr lang="en-US" sz="1600" dirty="0"/>
           </a:p>
         </p:txBody>
       </p:sp>
@@ -7128,47 +8269,8 @@
         </p:nvSpPr>
         <p:spPr>
           <a:xfrm>
-            <a:off x="1325880" y="1207008"/>
-            <a:ext cx="3017520" cy="292608"/>
-          </a:xfrm>
-          <a:prstGeom prst="rect">
-            <a:avLst/>
-          </a:prstGeom>
-          <a:noFill/>
-          <a:ln/>
-        </p:spPr>
-        <p:txBody>
-          <a:bodyPr wrap="square" lIns="0" tIns="0" rIns="0" bIns="0" rtlCol="0" anchor="t"/>
-          <a:lstStyle/>
-          <a:p>
-            <a:pPr indent="0" marL="0">
-              <a:buNone/>
-            </a:pPr>
-            <a:r>
-              <a:rPr lang="en-US" sz="1600" b="1" dirty="0">
-                <a:solidFill>
-                  <a:schemeClr val="tx2"/>
-                </a:solidFill>
-                <a:latin typeface="Cambria" pitchFamily="34" charset="0"/>
-                <a:ea typeface="Cambria" pitchFamily="34" charset="-122"/>
-                <a:cs typeface="Cambria" pitchFamily="34" charset="-120"/>
-              </a:rPr>
-              <a:t>Prenotare</a:t>
-            </a:r>
-            <a:endParaRPr lang="en-US" sz="1600" dirty="0"/>
-          </a:p>
-        </p:txBody>
-      </p:sp>
-      <p:sp>
-        <p:nvSpPr>
-          <p:cNvPr id="7" name="text-66"/>
-          <p:cNvSpPr txBox="1"/>
-          <p:nvPr/>
-        </p:nvSpPr>
-        <p:spPr>
-          <a:xfrm>
-            <a:off x="1325880" y="1508760"/>
-            <a:ext cx="3017520" cy="384048"/>
+            <a:off x="640080" y="1609344"/>
+            <a:ext cx="3657600" cy="566928"/>
           </a:xfrm>
           <a:prstGeom prst="rect">
             <a:avLst/>
@@ -7192,7 +8294,7 @@
                 <a:ea typeface="Calibri" pitchFamily="34" charset="-122"/>
                 <a:cs typeface="Calibri" pitchFamily="34" charset="-120"/>
               </a:rPr>
-              <a:t>Aula 101 in una fascia libera: conferma con codice leggibile</a:t>
+              <a:t>Prenotazione con le email dei partecipanti, conferma entro 2 ore, scadenza automatica, mail come file .eml</a:t>
             </a:r>
             <a:endParaRPr lang="en-US" sz="1200" dirty="0"/>
           </a:p>
@@ -7200,14 +8302,14 @@
       </p:sp>
       <p:sp>
         <p:nvSpPr>
-          <p:cNvPr id="8" name="card-67"/>
+          <p:cNvPr id="7" name="card-66"/>
           <p:cNvSpPr/>
           <p:nvPr/>
         </p:nvSpPr>
         <p:spPr>
           <a:xfrm>
-            <a:off x="4663440" y="1143000"/>
-            <a:ext cx="4023360" cy="777240"/>
+            <a:off x="4663440" y="1188720"/>
+            <a:ext cx="4023360" cy="1024128"/>
           </a:xfrm>
           <a:prstGeom prst="rect">
             <a:avLst/>
@@ -7225,14 +8327,14 @@
       </p:sp>
       <p:sp>
         <p:nvSpPr>
-          <p:cNvPr id="9" name="text-68"/>
+          <p:cNvPr id="8" name="text-67"/>
           <p:cNvSpPr txBox="1"/>
           <p:nvPr/>
         </p:nvSpPr>
         <p:spPr>
           <a:xfrm>
-            <a:off x="4846320" y="1234440"/>
-            <a:ext cx="548640" cy="594360"/>
+            <a:off x="4846320" y="1280160"/>
+            <a:ext cx="3657600" cy="310896"/>
           </a:xfrm>
           <a:prstGeom prst="rect">
             <a:avLst/>
@@ -7241,76 +8343,37 @@
           <a:ln/>
         </p:spPr>
         <p:txBody>
-          <a:bodyPr wrap="square" lIns="0" tIns="0" rIns="0" bIns="0" rtlCol="0" anchor="ctr"/>
+          <a:bodyPr wrap="square" lIns="0" tIns="0" rIns="0" bIns="0" rtlCol="0" anchor="t"/>
           <a:lstStyle/>
           <a:p>
             <a:pPr indent="0" marL="0">
               <a:buNone/>
             </a:pPr>
             <a:r>
-              <a:rPr lang="en-US" sz="3000" b="1" dirty="0">
-                <a:solidFill>
-                  <a:schemeClr val="accent2"/>
+              <a:rPr lang="en-US" sz="1600" b="1" dirty="0">
+                <a:solidFill>
+                  <a:schemeClr val="tx2"/>
                 </a:solidFill>
                 <a:latin typeface="Cambria" pitchFamily="34" charset="0"/>
                 <a:ea typeface="Cambria" pitchFamily="34" charset="-122"/>
                 <a:cs typeface="Cambria" pitchFamily="34" charset="-120"/>
               </a:rPr>
-              <a:t>2</a:t>
-            </a:r>
-            <a:endParaRPr lang="en-US" sz="3000" dirty="0"/>
-          </a:p>
-        </p:txBody>
-      </p:sp>
-      <p:sp>
-        <p:nvSpPr>
-          <p:cNvPr id="10" name="text-69"/>
+              <a:t>Commento finale</a:t>
+            </a:r>
+            <a:endParaRPr lang="en-US" sz="1600" dirty="0"/>
+          </a:p>
+        </p:txBody>
+      </p:sp>
+      <p:sp>
+        <p:nvSpPr>
+          <p:cNvPr id="9" name="text-68"/>
           <p:cNvSpPr txBox="1"/>
           <p:nvPr/>
         </p:nvSpPr>
         <p:spPr>
           <a:xfrm>
-            <a:off x="5532120" y="1207008"/>
-            <a:ext cx="3017520" cy="292608"/>
-          </a:xfrm>
-          <a:prstGeom prst="rect">
-            <a:avLst/>
-          </a:prstGeom>
-          <a:noFill/>
-          <a:ln/>
-        </p:spPr>
-        <p:txBody>
-          <a:bodyPr wrap="square" lIns="0" tIns="0" rIns="0" bIns="0" rtlCol="0" anchor="t"/>
-          <a:lstStyle/>
-          <a:p>
-            <a:pPr indent="0" marL="0">
-              <a:buNone/>
-            </a:pPr>
-            <a:r>
-              <a:rPr lang="en-US" sz="1600" b="1" dirty="0">
-                <a:solidFill>
-                  <a:schemeClr val="tx2"/>
-                </a:solidFill>
-                <a:latin typeface="Cambria" pitchFamily="34" charset="0"/>
-                <a:ea typeface="Cambria" pitchFamily="34" charset="-122"/>
-                <a:cs typeface="Cambria" pitchFamily="34" charset="-120"/>
-              </a:rPr>
-              <a:t>Conflitto</a:t>
-            </a:r>
-            <a:endParaRPr lang="en-US" sz="1600" dirty="0"/>
-          </a:p>
-        </p:txBody>
-      </p:sp>
-      <p:sp>
-        <p:nvSpPr>
-          <p:cNvPr id="11" name="text-70"/>
-          <p:cNvSpPr txBox="1"/>
-          <p:nvPr/>
-        </p:nvSpPr>
-        <p:spPr>
-          <a:xfrm>
-            <a:off x="5532120" y="1508760"/>
-            <a:ext cx="3017520" cy="384048"/>
+            <a:off x="4846320" y="1609344"/>
+            <a:ext cx="3657600" cy="566928"/>
           </a:xfrm>
           <a:prstGeom prst="rect">
             <a:avLst/>
@@ -7334,7 +8397,7 @@
                 <a:ea typeface="Calibri" pitchFamily="34" charset="-122"/>
                 <a:cs typeface="Calibri" pitchFamily="34" charset="-120"/>
               </a:rPr>
-              <a:t>Fascia sovrapposta: messaggio e 409</a:t>
+              <a:t>Obbligatorio dopo la fine; finché manca non si prenota di nuovo; i problemi diventano avvisi per l'admin</a:t>
             </a:r>
             <a:endParaRPr lang="en-US" sz="1200" dirty="0"/>
           </a:p>
@@ -7342,14 +8405,14 @@
       </p:sp>
       <p:sp>
         <p:nvSpPr>
-          <p:cNvPr id="12" name="card-71"/>
+          <p:cNvPr id="10" name="card-69"/>
           <p:cNvSpPr/>
           <p:nvPr/>
         </p:nvSpPr>
         <p:spPr>
           <a:xfrm>
-            <a:off x="457200" y="2029968"/>
-            <a:ext cx="4023360" cy="777240"/>
+            <a:off x="457200" y="2331720"/>
+            <a:ext cx="4023360" cy="1024128"/>
           </a:xfrm>
           <a:prstGeom prst="rect">
             <a:avLst/>
@@ -7367,14 +8430,14 @@
       </p:sp>
       <p:sp>
         <p:nvSpPr>
-          <p:cNvPr id="13" name="text-72"/>
+          <p:cNvPr id="11" name="text-70"/>
           <p:cNvSpPr txBox="1"/>
           <p:nvPr/>
         </p:nvSpPr>
         <p:spPr>
           <a:xfrm>
-            <a:off x="640080" y="2121408"/>
-            <a:ext cx="548640" cy="594360"/>
+            <a:off x="640080" y="2423160"/>
+            <a:ext cx="3657600" cy="310896"/>
           </a:xfrm>
           <a:prstGeom prst="rect">
             <a:avLst/>
@@ -7383,76 +8446,37 @@
           <a:ln/>
         </p:spPr>
         <p:txBody>
-          <a:bodyPr wrap="square" lIns="0" tIns="0" rIns="0" bIns="0" rtlCol="0" anchor="ctr"/>
+          <a:bodyPr wrap="square" lIns="0" tIns="0" rIns="0" bIns="0" rtlCol="0" anchor="t"/>
           <a:lstStyle/>
           <a:p>
             <a:pPr indent="0" marL="0">
               <a:buNone/>
             </a:pPr>
             <a:r>
-              <a:rPr lang="en-US" sz="3000" b="1" dirty="0">
-                <a:solidFill>
-                  <a:schemeClr val="accent2"/>
+              <a:rPr lang="en-US" sz="1600" b="1" dirty="0">
+                <a:solidFill>
+                  <a:schemeClr val="tx2"/>
                 </a:solidFill>
                 <a:latin typeface="Cambria" pitchFamily="34" charset="0"/>
                 <a:ea typeface="Cambria" pitchFamily="34" charset="-122"/>
                 <a:cs typeface="Cambria" pitchFamily="34" charset="-120"/>
               </a:rPr>
-              <a:t>3</a:t>
-            </a:r>
-            <a:endParaRPr lang="en-US" sz="3000" dirty="0"/>
-          </a:p>
-        </p:txBody>
-      </p:sp>
-      <p:sp>
-        <p:nvSpPr>
-          <p:cNvPr id="14" name="text-73"/>
+              <a:t>Area admin</a:t>
+            </a:r>
+            <a:endParaRPr lang="en-US" sz="1600" dirty="0"/>
+          </a:p>
+        </p:txBody>
+      </p:sp>
+      <p:sp>
+        <p:nvSpPr>
+          <p:cNvPr id="12" name="text-71"/>
           <p:cNvSpPr txBox="1"/>
           <p:nvPr/>
         </p:nvSpPr>
         <p:spPr>
           <a:xfrm>
-            <a:off x="1325880" y="2093976"/>
-            <a:ext cx="3017520" cy="292608"/>
-          </a:xfrm>
-          <a:prstGeom prst="rect">
-            <a:avLst/>
-          </a:prstGeom>
-          <a:noFill/>
-          <a:ln/>
-        </p:spPr>
-        <p:txBody>
-          <a:bodyPr wrap="square" lIns="0" tIns="0" rIns="0" bIns="0" rtlCol="0" anchor="t"/>
-          <a:lstStyle/>
-          <a:p>
-            <a:pPr indent="0" marL="0">
-              <a:buNone/>
-            </a:pPr>
-            <a:r>
-              <a:rPr lang="en-US" sz="1600" b="1" dirty="0">
-                <a:solidFill>
-                  <a:schemeClr val="tx2"/>
-                </a:solidFill>
-                <a:latin typeface="Cambria" pitchFamily="34" charset="0"/>
-                <a:ea typeface="Cambria" pitchFamily="34" charset="-122"/>
-                <a:cs typeface="Cambria" pitchFamily="34" charset="-120"/>
-              </a:rPr>
-              <a:t>Adiacenti</a:t>
-            </a:r>
-            <a:endParaRPr lang="en-US" sz="1600" dirty="0"/>
-          </a:p>
-        </p:txBody>
-      </p:sp>
-      <p:sp>
-        <p:nvSpPr>
-          <p:cNvPr id="15" name="text-74"/>
-          <p:cNvSpPr txBox="1"/>
-          <p:nvPr/>
-        </p:nvSpPr>
-        <p:spPr>
-          <a:xfrm>
-            <a:off x="1325880" y="2395728"/>
-            <a:ext cx="3017520" cy="384048"/>
+            <a:off x="640080" y="2752344"/>
+            <a:ext cx="3657600" cy="566928"/>
           </a:xfrm>
           <a:prstGeom prst="rect">
             <a:avLst/>
@@ -7476,7 +8500,7 @@
                 <a:ea typeface="Calibri" pitchFamily="34" charset="-122"/>
                 <a:cs typeface="Calibri" pitchFamily="34" charset="-120"/>
               </a:rPr>
-              <a:t>Una finisce quando inizia l'altra: entrambe accettate</a:t>
+              <a:t>Dashboard, avvisi, annullamento con motivo, statistiche d'uso e report</a:t>
             </a:r>
             <a:endParaRPr lang="en-US" sz="1200" dirty="0"/>
           </a:p>
@@ -7484,14 +8508,14 @@
       </p:sp>
       <p:sp>
         <p:nvSpPr>
-          <p:cNvPr id="16" name="card-75"/>
+          <p:cNvPr id="13" name="card-72"/>
           <p:cNvSpPr/>
           <p:nvPr/>
         </p:nvSpPr>
         <p:spPr>
           <a:xfrm>
-            <a:off x="4663440" y="2029968"/>
-            <a:ext cx="4023360" cy="777240"/>
+            <a:off x="4663440" y="2331720"/>
+            <a:ext cx="4023360" cy="1024128"/>
           </a:xfrm>
           <a:prstGeom prst="rect">
             <a:avLst/>
@@ -7509,14 +8533,14 @@
       </p:sp>
       <p:sp>
         <p:nvSpPr>
-          <p:cNvPr id="17" name="text-76"/>
+          <p:cNvPr id="14" name="text-73"/>
           <p:cNvSpPr txBox="1"/>
           <p:nvPr/>
         </p:nvSpPr>
         <p:spPr>
           <a:xfrm>
-            <a:off x="4846320" y="2121408"/>
-            <a:ext cx="548640" cy="594360"/>
+            <a:off x="4846320" y="2423160"/>
+            <a:ext cx="3657600" cy="310896"/>
           </a:xfrm>
           <a:prstGeom prst="rect">
             <a:avLst/>
@@ -7525,76 +8549,37 @@
           <a:ln/>
         </p:spPr>
         <p:txBody>
-          <a:bodyPr wrap="square" lIns="0" tIns="0" rIns="0" bIns="0" rtlCol="0" anchor="ctr"/>
+          <a:bodyPr wrap="square" lIns="0" tIns="0" rIns="0" bIns="0" rtlCol="0" anchor="t"/>
           <a:lstStyle/>
           <a:p>
             <a:pPr indent="0" marL="0">
               <a:buNone/>
             </a:pPr>
             <a:r>
-              <a:rPr lang="en-US" sz="3000" b="1" dirty="0">
-                <a:solidFill>
-                  <a:schemeClr val="accent2"/>
+              <a:rPr lang="en-US" sz="1600" b="1" dirty="0">
+                <a:solidFill>
+                  <a:schemeClr val="tx2"/>
                 </a:solidFill>
                 <a:latin typeface="Cambria" pitchFamily="34" charset="0"/>
                 <a:ea typeface="Cambria" pitchFamily="34" charset="-122"/>
                 <a:cs typeface="Cambria" pitchFamily="34" charset="-120"/>
               </a:rPr>
-              <a:t>4</a:t>
-            </a:r>
-            <a:endParaRPr lang="en-US" sz="3000" dirty="0"/>
-          </a:p>
-        </p:txBody>
-      </p:sp>
-      <p:sp>
-        <p:nvSpPr>
-          <p:cNvPr id="18" name="text-77"/>
+              <a:t>Accesso e catalogo</a:t>
+            </a:r>
+            <a:endParaRPr lang="en-US" sz="1600" dirty="0"/>
+          </a:p>
+        </p:txBody>
+      </p:sp>
+      <p:sp>
+        <p:nvSpPr>
+          <p:cNvPr id="15" name="text-74"/>
           <p:cNvSpPr txBox="1"/>
           <p:nvPr/>
         </p:nvSpPr>
         <p:spPr>
           <a:xfrm>
-            <a:off x="5532120" y="2093976"/>
-            <a:ext cx="3017520" cy="292608"/>
-          </a:xfrm>
-          <a:prstGeom prst="rect">
-            <a:avLst/>
-          </a:prstGeom>
-          <a:noFill/>
-          <a:ln/>
-        </p:spPr>
-        <p:txBody>
-          <a:bodyPr wrap="square" lIns="0" tIns="0" rIns="0" bIns="0" rtlCol="0" anchor="t"/>
-          <a:lstStyle/>
-          <a:p>
-            <a:pPr indent="0" marL="0">
-              <a:buNone/>
-            </a:pPr>
-            <a:r>
-              <a:rPr lang="en-US" sz="1600" b="1" dirty="0">
-                <a:solidFill>
-                  <a:schemeClr val="tx2"/>
-                </a:solidFill>
-                <a:latin typeface="Cambria" pitchFamily="34" charset="0"/>
-                <a:ea typeface="Cambria" pitchFamily="34" charset="-122"/>
-                <a:cs typeface="Cambria" pitchFamily="34" charset="-120"/>
-              </a:rPr>
-              <a:t>Annullare</a:t>
-            </a:r>
-            <a:endParaRPr lang="en-US" sz="1600" dirty="0"/>
-          </a:p>
-        </p:txBody>
-      </p:sp>
-      <p:sp>
-        <p:nvSpPr>
-          <p:cNvPr id="19" name="text-78"/>
-          <p:cNvSpPr txBox="1"/>
-          <p:nvPr/>
-        </p:nvSpPr>
-        <p:spPr>
-          <a:xfrm>
-            <a:off x="5532120" y="2395728"/>
-            <a:ext cx="3017520" cy="384048"/>
+            <a:off x="4846320" y="2752344"/>
+            <a:ext cx="3657600" cy="566928"/>
           </a:xfrm>
           <a:prstGeom prst="rect">
             <a:avLst/>
@@ -7618,7 +8603,7 @@
                 <a:ea typeface="Calibri" pitchFamily="34" charset="-122"/>
                 <a:cs typeface="Calibri" pitchFamily="34" charset="-120"/>
               </a:rPr>
-              <a:t>Solo l'organizzatore; la fascia torna libera per tutti</a:t>
+              <a:t>Registrazione e login con token, ricerca e dettaglio degli spazi, strumenti e indisponibilità</a:t>
             </a:r>
             <a:endParaRPr lang="en-US" sz="1200" dirty="0"/>
           </a:p>
@@ -7626,14 +8611,14 @@
       </p:sp>
       <p:sp>
         <p:nvSpPr>
-          <p:cNvPr id="20" name="card-79"/>
+          <p:cNvPr id="16" name="card-75"/>
           <p:cNvSpPr/>
           <p:nvPr/>
         </p:nvSpPr>
         <p:spPr>
           <a:xfrm>
-            <a:off x="457200" y="2916936"/>
-            <a:ext cx="4023360" cy="777240"/>
+            <a:off x="457200" y="3474720"/>
+            <a:ext cx="4023360" cy="1024128"/>
           </a:xfrm>
           <a:prstGeom prst="rect">
             <a:avLst/>
@@ -7651,14 +8636,14 @@
       </p:sp>
       <p:sp>
         <p:nvSpPr>
-          <p:cNvPr id="21" name="text-80"/>
+          <p:cNvPr id="17" name="text-76"/>
           <p:cNvSpPr txBox="1"/>
           <p:nvPr/>
         </p:nvSpPr>
         <p:spPr>
           <a:xfrm>
-            <a:off x="640080" y="3008376"/>
-            <a:ext cx="548640" cy="594360"/>
+            <a:off x="640080" y="3566160"/>
+            <a:ext cx="3657600" cy="310896"/>
           </a:xfrm>
           <a:prstGeom prst="rect">
             <a:avLst/>
@@ -7667,76 +8652,37 @@
           <a:ln/>
         </p:spPr>
         <p:txBody>
-          <a:bodyPr wrap="square" lIns="0" tIns="0" rIns="0" bIns="0" rtlCol="0" anchor="ctr"/>
+          <a:bodyPr wrap="square" lIns="0" tIns="0" rIns="0" bIns="0" rtlCol="0" anchor="t"/>
           <a:lstStyle/>
           <a:p>
             <a:pPr indent="0" marL="0">
               <a:buNone/>
             </a:pPr>
             <a:r>
-              <a:rPr lang="en-US" sz="3000" b="1" dirty="0">
-                <a:solidFill>
-                  <a:schemeClr val="accent2"/>
+              <a:rPr lang="en-US" sz="1600" b="1" dirty="0">
+                <a:solidFill>
+                  <a:schemeClr val="tx2"/>
                 </a:solidFill>
                 <a:latin typeface="Cambria" pitchFamily="34" charset="0"/>
                 <a:ea typeface="Cambria" pitchFamily="34" charset="-122"/>
                 <a:cs typeface="Cambria" pitchFamily="34" charset="-120"/>
               </a:rPr>
-              <a:t>5</a:t>
-            </a:r>
-            <a:endParaRPr lang="en-US" sz="3000" dirty="0"/>
-          </a:p>
-        </p:txBody>
-      </p:sp>
-      <p:sp>
-        <p:nvSpPr>
-          <p:cNvPr id="22" name="text-81"/>
+              <a:t>Regole di prenotazione</a:t>
+            </a:r>
+            <a:endParaRPr lang="en-US" sz="1600" dirty="0"/>
+          </a:p>
+        </p:txBody>
+      </p:sp>
+      <p:sp>
+        <p:nvSpPr>
+          <p:cNvPr id="18" name="text-77"/>
           <p:cNvSpPr txBox="1"/>
           <p:nvPr/>
         </p:nvSpPr>
         <p:spPr>
           <a:xfrm>
-            <a:off x="1325880" y="2980944"/>
-            <a:ext cx="3017520" cy="292608"/>
-          </a:xfrm>
-          <a:prstGeom prst="rect">
-            <a:avLst/>
-          </a:prstGeom>
-          <a:noFill/>
-          <a:ln/>
-        </p:spPr>
-        <p:txBody>
-          <a:bodyPr wrap="square" lIns="0" tIns="0" rIns="0" bIns="0" rtlCol="0" anchor="t"/>
-          <a:lstStyle/>
-          <a:p>
-            <a:pPr indent="0" marL="0">
-              <a:buNone/>
-            </a:pPr>
-            <a:r>
-              <a:rPr lang="en-US" sz="1600" b="1" dirty="0">
-                <a:solidFill>
-                  <a:schemeClr val="tx2"/>
-                </a:solidFill>
-                <a:latin typeface="Cambria" pitchFamily="34" charset="0"/>
-                <a:ea typeface="Cambria" pitchFamily="34" charset="-122"/>
-                <a:cs typeface="Cambria" pitchFamily="34" charset="-120"/>
-              </a:rPr>
-              <a:t>Aula piena</a:t>
-            </a:r>
-            <a:endParaRPr lang="en-US" sz="1600" dirty="0"/>
-          </a:p>
-        </p:txBody>
-      </p:sp>
-      <p:sp>
-        <p:nvSpPr>
-          <p:cNvPr id="23" name="text-82"/>
-          <p:cNvSpPr txBox="1"/>
-          <p:nvPr/>
-        </p:nvSpPr>
-        <p:spPr>
-          <a:xfrm>
-            <a:off x="1325880" y="3282696"/>
-            <a:ext cx="3017520" cy="384048"/>
+            <a:off x="640080" y="3895344"/>
+            <a:ext cx="3657600" cy="566928"/>
           </a:xfrm>
           <a:prstGeom prst="rect">
             <a:avLst/>
@@ -7760,7 +8706,7 @@
                 <a:ea typeface="Calibri" pitchFamily="34" charset="-122"/>
                 <a:cs typeface="Calibri" pitchFamily="34" charset="-120"/>
               </a:rPr>
-              <a:t>Aula 204 da 6 posti: la settima persona viene rifiutata</a:t>
+              <a:t>Aule miste con posti, tre fasce orarie, una prenotazione per fascia e per giorno</a:t>
             </a:r>
             <a:endParaRPr lang="en-US" sz="1200" dirty="0"/>
           </a:p>
@@ -7768,14 +8714,14 @@
       </p:sp>
       <p:sp>
         <p:nvSpPr>
-          <p:cNvPr id="24" name="card-83"/>
+          <p:cNvPr id="19" name="card-78"/>
           <p:cNvSpPr/>
           <p:nvPr/>
         </p:nvSpPr>
         <p:spPr>
           <a:xfrm>
-            <a:off x="4663440" y="2916936"/>
-            <a:ext cx="4023360" cy="777240"/>
+            <a:off x="4663440" y="3474720"/>
+            <a:ext cx="4023360" cy="1024128"/>
           </a:xfrm>
           <a:prstGeom prst="rect">
             <a:avLst/>
@@ -7793,14 +8739,14 @@
       </p:sp>
       <p:sp>
         <p:nvSpPr>
-          <p:cNvPr id="25" name="text-84"/>
+          <p:cNvPr id="20" name="text-79"/>
           <p:cNvSpPr txBox="1"/>
           <p:nvPr/>
         </p:nvSpPr>
         <p:spPr>
           <a:xfrm>
-            <a:off x="4846320" y="3008376"/>
-            <a:ext cx="548640" cy="594360"/>
+            <a:off x="4846320" y="3566160"/>
+            <a:ext cx="3657600" cy="310896"/>
           </a:xfrm>
           <a:prstGeom prst="rect">
             <a:avLst/>
@@ -7809,76 +8755,37 @@
           <a:ln/>
         </p:spPr>
         <p:txBody>
-          <a:bodyPr wrap="square" lIns="0" tIns="0" rIns="0" bIns="0" rtlCol="0" anchor="ctr"/>
+          <a:bodyPr wrap="square" lIns="0" tIns="0" rIns="0" bIns="0" rtlCol="0" anchor="t"/>
           <a:lstStyle/>
           <a:p>
             <a:pPr indent="0" marL="0">
               <a:buNone/>
             </a:pPr>
             <a:r>
-              <a:rPr lang="en-US" sz="3000" b="1" dirty="0">
-                <a:solidFill>
-                  <a:schemeClr val="accent2"/>
+              <a:rPr lang="en-US" sz="1600" b="1" dirty="0">
+                <a:solidFill>
+                  <a:schemeClr val="tx2"/>
                 </a:solidFill>
                 <a:latin typeface="Cambria" pitchFamily="34" charset="0"/>
                 <a:ea typeface="Cambria" pitchFamily="34" charset="-122"/>
                 <a:cs typeface="Cambria" pitchFamily="34" charset="-120"/>
               </a:rPr>
-              <a:t>6</a:t>
-            </a:r>
-            <a:endParaRPr lang="en-US" sz="3000" dirty="0"/>
-          </a:p>
-        </p:txBody>
-      </p:sp>
-      <p:sp>
-        <p:nvSpPr>
-          <p:cNvPr id="26" name="text-85"/>
+              <a:t>Piattaforma e processo</a:t>
+            </a:r>
+            <a:endParaRPr lang="en-US" sz="1600" dirty="0"/>
+          </a:p>
+        </p:txBody>
+      </p:sp>
+      <p:sp>
+        <p:nvSpPr>
+          <p:cNvPr id="21" name="text-80"/>
           <p:cNvSpPr txBox="1"/>
           <p:nvPr/>
         </p:nvSpPr>
         <p:spPr>
           <a:xfrm>
-            <a:off x="5532120" y="2980944"/>
-            <a:ext cx="3017520" cy="292608"/>
-          </a:xfrm>
-          <a:prstGeom prst="rect">
-            <a:avLst/>
-          </a:prstGeom>
-          <a:noFill/>
-          <a:ln/>
-        </p:spPr>
-        <p:txBody>
-          <a:bodyPr wrap="square" lIns="0" tIns="0" rIns="0" bIns="0" rtlCol="0" anchor="t"/>
-          <a:lstStyle/>
-          <a:p>
-            <a:pPr indent="0" marL="0">
-              <a:buNone/>
-            </a:pPr>
-            <a:r>
-              <a:rPr lang="en-US" sz="1600" b="1" dirty="0">
-                <a:solidFill>
-                  <a:schemeClr val="tx2"/>
-                </a:solidFill>
-                <a:latin typeface="Cambria" pitchFamily="34" charset="0"/>
-                <a:ea typeface="Cambria" pitchFamily="34" charset="-122"/>
-                <a:cs typeface="Cambria" pitchFamily="34" charset="-120"/>
-              </a:rPr>
-              <a:t>Commento</a:t>
-            </a:r>
-            <a:endParaRPr lang="en-US" sz="1600" dirty="0"/>
-          </a:p>
-        </p:txBody>
-      </p:sp>
-      <p:sp>
-        <p:nvSpPr>
-          <p:cNvPr id="27" name="text-86"/>
-          <p:cNvSpPr txBox="1"/>
-          <p:nvPr/>
-        </p:nvSpPr>
-        <p:spPr>
-          <a:xfrm>
-            <a:off x="5532120" y="3282696"/>
-            <a:ext cx="3017520" cy="384048"/>
+            <a:off x="4846320" y="3895344"/>
+            <a:ext cx="3657600" cy="566928"/>
           </a:xfrm>
           <a:prstGeom prst="rect">
             <a:avLst/>
@@ -7902,291 +8809,7 @@
                 <a:ea typeface="Calibri" pitchFamily="34" charset="-122"/>
                 <a:cs typeface="Calibri" pitchFamily="34" charset="-120"/>
               </a:rPr>
-              <a:t>Senza commento finale non si prenota di nuovo</a:t>
-            </a:r>
-            <a:endParaRPr lang="en-US" sz="1200" dirty="0"/>
-          </a:p>
-        </p:txBody>
-      </p:sp>
-      <p:sp>
-        <p:nvSpPr>
-          <p:cNvPr id="28" name="card-87"/>
-          <p:cNvSpPr/>
-          <p:nvPr/>
-        </p:nvSpPr>
-        <p:spPr>
-          <a:xfrm>
-            <a:off x="457200" y="3803904"/>
-            <a:ext cx="4023360" cy="777240"/>
-          </a:xfrm>
-          <a:prstGeom prst="rect">
-            <a:avLst/>
-          </a:prstGeom>
-          <a:solidFill>
-            <a:schemeClr val="bg2"/>
-          </a:solidFill>
-          <a:ln w="12700">
-            <a:solidFill>
-              <a:schemeClr val="bg2"/>
-            </a:solidFill>
-            <a:prstDash val="solid"/>
-          </a:ln>
-        </p:spPr>
-      </p:sp>
-      <p:sp>
-        <p:nvSpPr>
-          <p:cNvPr id="29" name="text-88"/>
-          <p:cNvSpPr txBox="1"/>
-          <p:nvPr/>
-        </p:nvSpPr>
-        <p:spPr>
-          <a:xfrm>
-            <a:off x="640080" y="3895344"/>
-            <a:ext cx="548640" cy="594360"/>
-          </a:xfrm>
-          <a:prstGeom prst="rect">
-            <a:avLst/>
-          </a:prstGeom>
-          <a:noFill/>
-          <a:ln/>
-        </p:spPr>
-        <p:txBody>
-          <a:bodyPr wrap="square" lIns="0" tIns="0" rIns="0" bIns="0" rtlCol="0" anchor="ctr"/>
-          <a:lstStyle/>
-          <a:p>
-            <a:pPr indent="0" marL="0">
-              <a:buNone/>
-            </a:pPr>
-            <a:r>
-              <a:rPr lang="en-US" sz="3000" b="1" dirty="0">
-                <a:solidFill>
-                  <a:schemeClr val="accent2"/>
-                </a:solidFill>
-                <a:latin typeface="Cambria" pitchFamily="34" charset="0"/>
-                <a:ea typeface="Cambria" pitchFamily="34" charset="-122"/>
-                <a:cs typeface="Cambria" pitchFamily="34" charset="-120"/>
-              </a:rPr>
-              <a:t>7</a:t>
-            </a:r>
-            <a:endParaRPr lang="en-US" sz="3000" dirty="0"/>
-          </a:p>
-        </p:txBody>
-      </p:sp>
-      <p:sp>
-        <p:nvSpPr>
-          <p:cNvPr id="30" name="text-89"/>
-          <p:cNvSpPr txBox="1"/>
-          <p:nvPr/>
-        </p:nvSpPr>
-        <p:spPr>
-          <a:xfrm>
-            <a:off x="1325880" y="3867912"/>
-            <a:ext cx="3017520" cy="292608"/>
-          </a:xfrm>
-          <a:prstGeom prst="rect">
-            <a:avLst/>
-          </a:prstGeom>
-          <a:noFill/>
-          <a:ln/>
-        </p:spPr>
-        <p:txBody>
-          <a:bodyPr wrap="square" lIns="0" tIns="0" rIns="0" bIns="0" rtlCol="0" anchor="t"/>
-          <a:lstStyle/>
-          <a:p>
-            <a:pPr indent="0" marL="0">
-              <a:buNone/>
-            </a:pPr>
-            <a:r>
-              <a:rPr lang="en-US" sz="1600" b="1" dirty="0">
-                <a:solidFill>
-                  <a:schemeClr val="tx2"/>
-                </a:solidFill>
-                <a:latin typeface="Cambria" pitchFamily="34" charset="0"/>
-                <a:ea typeface="Cambria" pitchFamily="34" charset="-122"/>
-                <a:cs typeface="Cambria" pitchFamily="34" charset="-120"/>
-              </a:rPr>
-              <a:t>Gruppo</a:t>
-            </a:r>
-            <a:endParaRPr lang="en-US" sz="1600" dirty="0"/>
-          </a:p>
-        </p:txBody>
-      </p:sp>
-      <p:sp>
-        <p:nvSpPr>
-          <p:cNvPr id="31" name="text-90"/>
-          <p:cNvSpPr txBox="1"/>
-          <p:nvPr/>
-        </p:nvSpPr>
-        <p:spPr>
-          <a:xfrm>
-            <a:off x="1325880" y="4169664"/>
-            <a:ext cx="3017520" cy="384048"/>
-          </a:xfrm>
-          <a:prstGeom prst="rect">
-            <a:avLst/>
-          </a:prstGeom>
-          <a:noFill/>
-          <a:ln/>
-        </p:spPr>
-        <p:txBody>
-          <a:bodyPr wrap="square" lIns="0" tIns="0" rIns="0" bIns="0" rtlCol="0" anchor="t"/>
-          <a:lstStyle/>
-          <a:p>
-            <a:pPr indent="0" marL="0">
-              <a:buNone/>
-            </a:pPr>
-            <a:r>
-              <a:rPr lang="en-US" sz="1200" dirty="0">
-                <a:solidFill>
-                  <a:schemeClr val="tx1"/>
-                </a:solidFill>
-                <a:latin typeface="Calibri" pitchFamily="34" charset="0"/>
-                <a:ea typeface="Calibri" pitchFamily="34" charset="-122"/>
-                <a:cs typeface="Calibri" pitchFamily="34" charset="-120"/>
-              </a:rPr>
-              <a:t>Inviti per email; l'invitato conferma, un altro utente no</a:t>
-            </a:r>
-            <a:endParaRPr lang="en-US" sz="1200" dirty="0"/>
-          </a:p>
-        </p:txBody>
-      </p:sp>
-      <p:sp>
-        <p:nvSpPr>
-          <p:cNvPr id="32" name="card-91"/>
-          <p:cNvSpPr/>
-          <p:nvPr/>
-        </p:nvSpPr>
-        <p:spPr>
-          <a:xfrm>
-            <a:off x="4663440" y="3803904"/>
-            <a:ext cx="4023360" cy="777240"/>
-          </a:xfrm>
-          <a:prstGeom prst="rect">
-            <a:avLst/>
-          </a:prstGeom>
-          <a:solidFill>
-            <a:schemeClr val="bg2"/>
-          </a:solidFill>
-          <a:ln w="12700">
-            <a:solidFill>
-              <a:schemeClr val="bg2"/>
-            </a:solidFill>
-            <a:prstDash val="solid"/>
-          </a:ln>
-        </p:spPr>
-      </p:sp>
-      <p:sp>
-        <p:nvSpPr>
-          <p:cNvPr id="33" name="text-92"/>
-          <p:cNvSpPr txBox="1"/>
-          <p:nvPr/>
-        </p:nvSpPr>
-        <p:spPr>
-          <a:xfrm>
-            <a:off x="4846320" y="3895344"/>
-            <a:ext cx="548640" cy="594360"/>
-          </a:xfrm>
-          <a:prstGeom prst="rect">
-            <a:avLst/>
-          </a:prstGeom>
-          <a:noFill/>
-          <a:ln/>
-        </p:spPr>
-        <p:txBody>
-          <a:bodyPr wrap="square" lIns="0" tIns="0" rIns="0" bIns="0" rtlCol="0" anchor="ctr"/>
-          <a:lstStyle/>
-          <a:p>
-            <a:pPr indent="0" marL="0">
-              <a:buNone/>
-            </a:pPr>
-            <a:r>
-              <a:rPr lang="en-US" sz="3000" b="1" dirty="0">
-                <a:solidFill>
-                  <a:schemeClr val="accent2"/>
-                </a:solidFill>
-                <a:latin typeface="Cambria" pitchFamily="34" charset="0"/>
-                <a:ea typeface="Cambria" pitchFamily="34" charset="-122"/>
-                <a:cs typeface="Cambria" pitchFamily="34" charset="-120"/>
-              </a:rPr>
-              <a:t>8</a:t>
-            </a:r>
-            <a:endParaRPr lang="en-US" sz="3000" dirty="0"/>
-          </a:p>
-        </p:txBody>
-      </p:sp>
-      <p:sp>
-        <p:nvSpPr>
-          <p:cNvPr id="34" name="text-93"/>
-          <p:cNvSpPr txBox="1"/>
-          <p:nvPr/>
-        </p:nvSpPr>
-        <p:spPr>
-          <a:xfrm>
-            <a:off x="5532120" y="3867912"/>
-            <a:ext cx="3017520" cy="292608"/>
-          </a:xfrm>
-          <a:prstGeom prst="rect">
-            <a:avLst/>
-          </a:prstGeom>
-          <a:noFill/>
-          <a:ln/>
-        </p:spPr>
-        <p:txBody>
-          <a:bodyPr wrap="square" lIns="0" tIns="0" rIns="0" bIns="0" rtlCol="0" anchor="t"/>
-          <a:lstStyle/>
-          <a:p>
-            <a:pPr indent="0" marL="0">
-              <a:buNone/>
-            </a:pPr>
-            <a:r>
-              <a:rPr lang="en-US" sz="1600" b="1" dirty="0">
-                <a:solidFill>
-                  <a:schemeClr val="tx2"/>
-                </a:solidFill>
-                <a:latin typeface="Cambria" pitchFamily="34" charset="0"/>
-                <a:ea typeface="Cambria" pitchFamily="34" charset="-122"/>
-                <a:cs typeface="Cambria" pitchFamily="34" charset="-120"/>
-              </a:rPr>
-              <a:t>Admin</a:t>
-            </a:r>
-            <a:endParaRPr lang="en-US" sz="1600" dirty="0"/>
-          </a:p>
-        </p:txBody>
-      </p:sp>
-      <p:sp>
-        <p:nvSpPr>
-          <p:cNvPr id="35" name="text-94"/>
-          <p:cNvSpPr txBox="1"/>
-          <p:nvPr/>
-        </p:nvSpPr>
-        <p:spPr>
-          <a:xfrm>
-            <a:off x="5532120" y="4169664"/>
-            <a:ext cx="3017520" cy="384048"/>
-          </a:xfrm>
-          <a:prstGeom prst="rect">
-            <a:avLst/>
-          </a:prstGeom>
-          <a:noFill/>
-          <a:ln/>
-        </p:spPr>
-        <p:txBody>
-          <a:bodyPr wrap="square" lIns="0" tIns="0" rIns="0" bIns="0" rtlCol="0" anchor="t"/>
-          <a:lstStyle/>
-          <a:p>
-            <a:pPr indent="0" marL="0">
-              <a:buNone/>
-            </a:pPr>
-            <a:r>
-              <a:rPr lang="en-US" sz="1200" dirty="0">
-                <a:solidFill>
-                  <a:schemeClr val="tx1"/>
-                </a:solidFill>
-                <a:latin typeface="Calibri" pitchFamily="34" charset="0"/>
-                <a:ea typeface="Calibri" pitchFamily="34" charset="-122"/>
-                <a:cs typeface="Calibri" pitchFamily="34" charset="-120"/>
-              </a:rPr>
-              <a:t>La dashboard solo per l'admin; Spaces fermo: 503</a:t>
+              <a:t>CI obbligatoria, MongoDB 7.0, ADR, prove di guasto, flusso agentico con il controllo PR</a:t>
             </a:r>
             <a:endParaRPr lang="en-US" sz="1200" dirty="0"/>
           </a:p>
@@ -8297,6 +8920,1253 @@
                 <a:ea typeface="Cambria" pitchFamily="34" charset="-122"/>
                 <a:cs typeface="Cambria" pitchFamily="34" charset="-120"/>
               </a:rPr>
+              <a:t>La demo</a:t>
+            </a:r>
+            <a:endParaRPr lang="en-US" sz="3200" dirty="0"/>
+          </a:p>
+        </p:txBody>
+      </p:sp>
+      <p:sp>
+        <p:nvSpPr>
+          <p:cNvPr id="4" name="card-81"/>
+          <p:cNvSpPr/>
+          <p:nvPr/>
+        </p:nvSpPr>
+        <p:spPr>
+          <a:xfrm>
+            <a:off x="457200" y="1143000"/>
+            <a:ext cx="4023360" cy="777240"/>
+          </a:xfrm>
+          <a:prstGeom prst="rect">
+            <a:avLst/>
+          </a:prstGeom>
+          <a:solidFill>
+            <a:schemeClr val="bg2"/>
+          </a:solidFill>
+          <a:ln w="12700">
+            <a:solidFill>
+              <a:schemeClr val="bg2"/>
+            </a:solidFill>
+            <a:prstDash val="solid"/>
+          </a:ln>
+        </p:spPr>
+      </p:sp>
+      <p:sp>
+        <p:nvSpPr>
+          <p:cNvPr id="5" name="text-82"/>
+          <p:cNvSpPr txBox="1"/>
+          <p:nvPr/>
+        </p:nvSpPr>
+        <p:spPr>
+          <a:xfrm>
+            <a:off x="640080" y="1234440"/>
+            <a:ext cx="548640" cy="594360"/>
+          </a:xfrm>
+          <a:prstGeom prst="rect">
+            <a:avLst/>
+          </a:prstGeom>
+          <a:noFill/>
+          <a:ln/>
+        </p:spPr>
+        <p:txBody>
+          <a:bodyPr wrap="square" lIns="0" tIns="0" rIns="0" bIns="0" rtlCol="0" anchor="ctr"/>
+          <a:lstStyle/>
+          <a:p>
+            <a:pPr indent="0" marL="0">
+              <a:buNone/>
+            </a:pPr>
+            <a:r>
+              <a:rPr lang="en-US" sz="3000" b="1" dirty="0">
+                <a:solidFill>
+                  <a:schemeClr val="accent2"/>
+                </a:solidFill>
+                <a:latin typeface="Cambria" pitchFamily="34" charset="0"/>
+                <a:ea typeface="Cambria" pitchFamily="34" charset="-122"/>
+                <a:cs typeface="Cambria" pitchFamily="34" charset="-120"/>
+              </a:rPr>
+              <a:t>1</a:t>
+            </a:r>
+            <a:endParaRPr lang="en-US" sz="3000" dirty="0"/>
+          </a:p>
+        </p:txBody>
+      </p:sp>
+      <p:sp>
+        <p:nvSpPr>
+          <p:cNvPr id="6" name="text-83"/>
+          <p:cNvSpPr txBox="1"/>
+          <p:nvPr/>
+        </p:nvSpPr>
+        <p:spPr>
+          <a:xfrm>
+            <a:off x="1325880" y="1207008"/>
+            <a:ext cx="3017520" cy="292608"/>
+          </a:xfrm>
+          <a:prstGeom prst="rect">
+            <a:avLst/>
+          </a:prstGeom>
+          <a:noFill/>
+          <a:ln/>
+        </p:spPr>
+        <p:txBody>
+          <a:bodyPr wrap="square" lIns="0" tIns="0" rIns="0" bIns="0" rtlCol="0" anchor="t"/>
+          <a:lstStyle/>
+          <a:p>
+            <a:pPr indent="0" marL="0">
+              <a:buNone/>
+            </a:pPr>
+            <a:r>
+              <a:rPr lang="en-US" sz="1600" b="1" dirty="0">
+                <a:solidFill>
+                  <a:schemeClr val="tx2"/>
+                </a:solidFill>
+                <a:latin typeface="Cambria" pitchFamily="34" charset="0"/>
+                <a:ea typeface="Cambria" pitchFamily="34" charset="-122"/>
+                <a:cs typeface="Cambria" pitchFamily="34" charset="-120"/>
+              </a:rPr>
+              <a:t>Prenotare</a:t>
+            </a:r>
+            <a:endParaRPr lang="en-US" sz="1600" dirty="0"/>
+          </a:p>
+        </p:txBody>
+      </p:sp>
+      <p:sp>
+        <p:nvSpPr>
+          <p:cNvPr id="7" name="text-84"/>
+          <p:cNvSpPr txBox="1"/>
+          <p:nvPr/>
+        </p:nvSpPr>
+        <p:spPr>
+          <a:xfrm>
+            <a:off x="1325880" y="1508760"/>
+            <a:ext cx="3017520" cy="384048"/>
+          </a:xfrm>
+          <a:prstGeom prst="rect">
+            <a:avLst/>
+          </a:prstGeom>
+          <a:noFill/>
+          <a:ln/>
+        </p:spPr>
+        <p:txBody>
+          <a:bodyPr wrap="square" lIns="0" tIns="0" rIns="0" bIns="0" rtlCol="0" anchor="t"/>
+          <a:lstStyle/>
+          <a:p>
+            <a:pPr indent="0" marL="0">
+              <a:buNone/>
+            </a:pPr>
+            <a:r>
+              <a:rPr lang="en-US" sz="1200" dirty="0">
+                <a:solidFill>
+                  <a:schemeClr val="tx1"/>
+                </a:solidFill>
+                <a:latin typeface="Calibri" pitchFamily="34" charset="0"/>
+                <a:ea typeface="Calibri" pitchFamily="34" charset="-122"/>
+                <a:cs typeface="Calibri" pitchFamily="34" charset="-120"/>
+              </a:rPr>
+              <a:t>Aula 101 in una fascia libera: conferma con codice leggibile</a:t>
+            </a:r>
+            <a:endParaRPr lang="en-US" sz="1200" dirty="0"/>
+          </a:p>
+        </p:txBody>
+      </p:sp>
+      <p:sp>
+        <p:nvSpPr>
+          <p:cNvPr id="8" name="card-85"/>
+          <p:cNvSpPr/>
+          <p:nvPr/>
+        </p:nvSpPr>
+        <p:spPr>
+          <a:xfrm>
+            <a:off x="4663440" y="1143000"/>
+            <a:ext cx="4023360" cy="777240"/>
+          </a:xfrm>
+          <a:prstGeom prst="rect">
+            <a:avLst/>
+          </a:prstGeom>
+          <a:solidFill>
+            <a:schemeClr val="bg2"/>
+          </a:solidFill>
+          <a:ln w="12700">
+            <a:solidFill>
+              <a:schemeClr val="bg2"/>
+            </a:solidFill>
+            <a:prstDash val="solid"/>
+          </a:ln>
+        </p:spPr>
+      </p:sp>
+      <p:sp>
+        <p:nvSpPr>
+          <p:cNvPr id="9" name="text-86"/>
+          <p:cNvSpPr txBox="1"/>
+          <p:nvPr/>
+        </p:nvSpPr>
+        <p:spPr>
+          <a:xfrm>
+            <a:off x="4846320" y="1234440"/>
+            <a:ext cx="548640" cy="594360"/>
+          </a:xfrm>
+          <a:prstGeom prst="rect">
+            <a:avLst/>
+          </a:prstGeom>
+          <a:noFill/>
+          <a:ln/>
+        </p:spPr>
+        <p:txBody>
+          <a:bodyPr wrap="square" lIns="0" tIns="0" rIns="0" bIns="0" rtlCol="0" anchor="ctr"/>
+          <a:lstStyle/>
+          <a:p>
+            <a:pPr indent="0" marL="0">
+              <a:buNone/>
+            </a:pPr>
+            <a:r>
+              <a:rPr lang="en-US" sz="3000" b="1" dirty="0">
+                <a:solidFill>
+                  <a:schemeClr val="accent2"/>
+                </a:solidFill>
+                <a:latin typeface="Cambria" pitchFamily="34" charset="0"/>
+                <a:ea typeface="Cambria" pitchFamily="34" charset="-122"/>
+                <a:cs typeface="Cambria" pitchFamily="34" charset="-120"/>
+              </a:rPr>
+              <a:t>2</a:t>
+            </a:r>
+            <a:endParaRPr lang="en-US" sz="3000" dirty="0"/>
+          </a:p>
+        </p:txBody>
+      </p:sp>
+      <p:sp>
+        <p:nvSpPr>
+          <p:cNvPr id="10" name="text-87"/>
+          <p:cNvSpPr txBox="1"/>
+          <p:nvPr/>
+        </p:nvSpPr>
+        <p:spPr>
+          <a:xfrm>
+            <a:off x="5532120" y="1207008"/>
+            <a:ext cx="3017520" cy="292608"/>
+          </a:xfrm>
+          <a:prstGeom prst="rect">
+            <a:avLst/>
+          </a:prstGeom>
+          <a:noFill/>
+          <a:ln/>
+        </p:spPr>
+        <p:txBody>
+          <a:bodyPr wrap="square" lIns="0" tIns="0" rIns="0" bIns="0" rtlCol="0" anchor="t"/>
+          <a:lstStyle/>
+          <a:p>
+            <a:pPr indent="0" marL="0">
+              <a:buNone/>
+            </a:pPr>
+            <a:r>
+              <a:rPr lang="en-US" sz="1600" b="1" dirty="0">
+                <a:solidFill>
+                  <a:schemeClr val="tx2"/>
+                </a:solidFill>
+                <a:latin typeface="Cambria" pitchFamily="34" charset="0"/>
+                <a:ea typeface="Cambria" pitchFamily="34" charset="-122"/>
+                <a:cs typeface="Cambria" pitchFamily="34" charset="-120"/>
+              </a:rPr>
+              <a:t>Conflitto</a:t>
+            </a:r>
+            <a:endParaRPr lang="en-US" sz="1600" dirty="0"/>
+          </a:p>
+        </p:txBody>
+      </p:sp>
+      <p:sp>
+        <p:nvSpPr>
+          <p:cNvPr id="11" name="text-88"/>
+          <p:cNvSpPr txBox="1"/>
+          <p:nvPr/>
+        </p:nvSpPr>
+        <p:spPr>
+          <a:xfrm>
+            <a:off x="5532120" y="1508760"/>
+            <a:ext cx="3017520" cy="384048"/>
+          </a:xfrm>
+          <a:prstGeom prst="rect">
+            <a:avLst/>
+          </a:prstGeom>
+          <a:noFill/>
+          <a:ln/>
+        </p:spPr>
+        <p:txBody>
+          <a:bodyPr wrap="square" lIns="0" tIns="0" rIns="0" bIns="0" rtlCol="0" anchor="t"/>
+          <a:lstStyle/>
+          <a:p>
+            <a:pPr indent="0" marL="0">
+              <a:buNone/>
+            </a:pPr>
+            <a:r>
+              <a:rPr lang="en-US" sz="1200" dirty="0">
+                <a:solidFill>
+                  <a:schemeClr val="tx1"/>
+                </a:solidFill>
+                <a:latin typeface="Calibri" pitchFamily="34" charset="0"/>
+                <a:ea typeface="Calibri" pitchFamily="34" charset="-122"/>
+                <a:cs typeface="Calibri" pitchFamily="34" charset="-120"/>
+              </a:rPr>
+              <a:t>Fascia sovrapposta: messaggio e 409</a:t>
+            </a:r>
+            <a:endParaRPr lang="en-US" sz="1200" dirty="0"/>
+          </a:p>
+        </p:txBody>
+      </p:sp>
+      <p:sp>
+        <p:nvSpPr>
+          <p:cNvPr id="12" name="card-89"/>
+          <p:cNvSpPr/>
+          <p:nvPr/>
+        </p:nvSpPr>
+        <p:spPr>
+          <a:xfrm>
+            <a:off x="457200" y="2029968"/>
+            <a:ext cx="4023360" cy="777240"/>
+          </a:xfrm>
+          <a:prstGeom prst="rect">
+            <a:avLst/>
+          </a:prstGeom>
+          <a:solidFill>
+            <a:schemeClr val="bg2"/>
+          </a:solidFill>
+          <a:ln w="12700">
+            <a:solidFill>
+              <a:schemeClr val="bg2"/>
+            </a:solidFill>
+            <a:prstDash val="solid"/>
+          </a:ln>
+        </p:spPr>
+      </p:sp>
+      <p:sp>
+        <p:nvSpPr>
+          <p:cNvPr id="13" name="text-90"/>
+          <p:cNvSpPr txBox="1"/>
+          <p:nvPr/>
+        </p:nvSpPr>
+        <p:spPr>
+          <a:xfrm>
+            <a:off x="640080" y="2121408"/>
+            <a:ext cx="548640" cy="594360"/>
+          </a:xfrm>
+          <a:prstGeom prst="rect">
+            <a:avLst/>
+          </a:prstGeom>
+          <a:noFill/>
+          <a:ln/>
+        </p:spPr>
+        <p:txBody>
+          <a:bodyPr wrap="square" lIns="0" tIns="0" rIns="0" bIns="0" rtlCol="0" anchor="ctr"/>
+          <a:lstStyle/>
+          <a:p>
+            <a:pPr indent="0" marL="0">
+              <a:buNone/>
+            </a:pPr>
+            <a:r>
+              <a:rPr lang="en-US" sz="3000" b="1" dirty="0">
+                <a:solidFill>
+                  <a:schemeClr val="accent2"/>
+                </a:solidFill>
+                <a:latin typeface="Cambria" pitchFamily="34" charset="0"/>
+                <a:ea typeface="Cambria" pitchFamily="34" charset="-122"/>
+                <a:cs typeface="Cambria" pitchFamily="34" charset="-120"/>
+              </a:rPr>
+              <a:t>3</a:t>
+            </a:r>
+            <a:endParaRPr lang="en-US" sz="3000" dirty="0"/>
+          </a:p>
+        </p:txBody>
+      </p:sp>
+      <p:sp>
+        <p:nvSpPr>
+          <p:cNvPr id="14" name="text-91"/>
+          <p:cNvSpPr txBox="1"/>
+          <p:nvPr/>
+        </p:nvSpPr>
+        <p:spPr>
+          <a:xfrm>
+            <a:off x="1325880" y="2093976"/>
+            <a:ext cx="3017520" cy="292608"/>
+          </a:xfrm>
+          <a:prstGeom prst="rect">
+            <a:avLst/>
+          </a:prstGeom>
+          <a:noFill/>
+          <a:ln/>
+        </p:spPr>
+        <p:txBody>
+          <a:bodyPr wrap="square" lIns="0" tIns="0" rIns="0" bIns="0" rtlCol="0" anchor="t"/>
+          <a:lstStyle/>
+          <a:p>
+            <a:pPr indent="0" marL="0">
+              <a:buNone/>
+            </a:pPr>
+            <a:r>
+              <a:rPr lang="en-US" sz="1600" b="1" dirty="0">
+                <a:solidFill>
+                  <a:schemeClr val="tx2"/>
+                </a:solidFill>
+                <a:latin typeface="Cambria" pitchFamily="34" charset="0"/>
+                <a:ea typeface="Cambria" pitchFamily="34" charset="-122"/>
+                <a:cs typeface="Cambria" pitchFamily="34" charset="-120"/>
+              </a:rPr>
+              <a:t>Adiacenti</a:t>
+            </a:r>
+            <a:endParaRPr lang="en-US" sz="1600" dirty="0"/>
+          </a:p>
+        </p:txBody>
+      </p:sp>
+      <p:sp>
+        <p:nvSpPr>
+          <p:cNvPr id="15" name="text-92"/>
+          <p:cNvSpPr txBox="1"/>
+          <p:nvPr/>
+        </p:nvSpPr>
+        <p:spPr>
+          <a:xfrm>
+            <a:off x="1325880" y="2395728"/>
+            <a:ext cx="3017520" cy="384048"/>
+          </a:xfrm>
+          <a:prstGeom prst="rect">
+            <a:avLst/>
+          </a:prstGeom>
+          <a:noFill/>
+          <a:ln/>
+        </p:spPr>
+        <p:txBody>
+          <a:bodyPr wrap="square" lIns="0" tIns="0" rIns="0" bIns="0" rtlCol="0" anchor="t"/>
+          <a:lstStyle/>
+          <a:p>
+            <a:pPr indent="0" marL="0">
+              <a:buNone/>
+            </a:pPr>
+            <a:r>
+              <a:rPr lang="en-US" sz="1200" dirty="0">
+                <a:solidFill>
+                  <a:schemeClr val="tx1"/>
+                </a:solidFill>
+                <a:latin typeface="Calibri" pitchFamily="34" charset="0"/>
+                <a:ea typeface="Calibri" pitchFamily="34" charset="-122"/>
+                <a:cs typeface="Calibri" pitchFamily="34" charset="-120"/>
+              </a:rPr>
+              <a:t>Una finisce quando inizia l'altra: entrambe accettate</a:t>
+            </a:r>
+            <a:endParaRPr lang="en-US" sz="1200" dirty="0"/>
+          </a:p>
+        </p:txBody>
+      </p:sp>
+      <p:sp>
+        <p:nvSpPr>
+          <p:cNvPr id="16" name="card-93"/>
+          <p:cNvSpPr/>
+          <p:nvPr/>
+        </p:nvSpPr>
+        <p:spPr>
+          <a:xfrm>
+            <a:off x="4663440" y="2029968"/>
+            <a:ext cx="4023360" cy="777240"/>
+          </a:xfrm>
+          <a:prstGeom prst="rect">
+            <a:avLst/>
+          </a:prstGeom>
+          <a:solidFill>
+            <a:schemeClr val="bg2"/>
+          </a:solidFill>
+          <a:ln w="12700">
+            <a:solidFill>
+              <a:schemeClr val="bg2"/>
+            </a:solidFill>
+            <a:prstDash val="solid"/>
+          </a:ln>
+        </p:spPr>
+      </p:sp>
+      <p:sp>
+        <p:nvSpPr>
+          <p:cNvPr id="17" name="text-94"/>
+          <p:cNvSpPr txBox="1"/>
+          <p:nvPr/>
+        </p:nvSpPr>
+        <p:spPr>
+          <a:xfrm>
+            <a:off x="4846320" y="2121408"/>
+            <a:ext cx="548640" cy="594360"/>
+          </a:xfrm>
+          <a:prstGeom prst="rect">
+            <a:avLst/>
+          </a:prstGeom>
+          <a:noFill/>
+          <a:ln/>
+        </p:spPr>
+        <p:txBody>
+          <a:bodyPr wrap="square" lIns="0" tIns="0" rIns="0" bIns="0" rtlCol="0" anchor="ctr"/>
+          <a:lstStyle/>
+          <a:p>
+            <a:pPr indent="0" marL="0">
+              <a:buNone/>
+            </a:pPr>
+            <a:r>
+              <a:rPr lang="en-US" sz="3000" b="1" dirty="0">
+                <a:solidFill>
+                  <a:schemeClr val="accent2"/>
+                </a:solidFill>
+                <a:latin typeface="Cambria" pitchFamily="34" charset="0"/>
+                <a:ea typeface="Cambria" pitchFamily="34" charset="-122"/>
+                <a:cs typeface="Cambria" pitchFamily="34" charset="-120"/>
+              </a:rPr>
+              <a:t>4</a:t>
+            </a:r>
+            <a:endParaRPr lang="en-US" sz="3000" dirty="0"/>
+          </a:p>
+        </p:txBody>
+      </p:sp>
+      <p:sp>
+        <p:nvSpPr>
+          <p:cNvPr id="18" name="text-95"/>
+          <p:cNvSpPr txBox="1"/>
+          <p:nvPr/>
+        </p:nvSpPr>
+        <p:spPr>
+          <a:xfrm>
+            <a:off x="5532120" y="2093976"/>
+            <a:ext cx="3017520" cy="292608"/>
+          </a:xfrm>
+          <a:prstGeom prst="rect">
+            <a:avLst/>
+          </a:prstGeom>
+          <a:noFill/>
+          <a:ln/>
+        </p:spPr>
+        <p:txBody>
+          <a:bodyPr wrap="square" lIns="0" tIns="0" rIns="0" bIns="0" rtlCol="0" anchor="t"/>
+          <a:lstStyle/>
+          <a:p>
+            <a:pPr indent="0" marL="0">
+              <a:buNone/>
+            </a:pPr>
+            <a:r>
+              <a:rPr lang="en-US" sz="1600" b="1" dirty="0">
+                <a:solidFill>
+                  <a:schemeClr val="tx2"/>
+                </a:solidFill>
+                <a:latin typeface="Cambria" pitchFamily="34" charset="0"/>
+                <a:ea typeface="Cambria" pitchFamily="34" charset="-122"/>
+                <a:cs typeface="Cambria" pitchFamily="34" charset="-120"/>
+              </a:rPr>
+              <a:t>Annullare</a:t>
+            </a:r>
+            <a:endParaRPr lang="en-US" sz="1600" dirty="0"/>
+          </a:p>
+        </p:txBody>
+      </p:sp>
+      <p:sp>
+        <p:nvSpPr>
+          <p:cNvPr id="19" name="text-96"/>
+          <p:cNvSpPr txBox="1"/>
+          <p:nvPr/>
+        </p:nvSpPr>
+        <p:spPr>
+          <a:xfrm>
+            <a:off x="5532120" y="2395728"/>
+            <a:ext cx="3017520" cy="384048"/>
+          </a:xfrm>
+          <a:prstGeom prst="rect">
+            <a:avLst/>
+          </a:prstGeom>
+          <a:noFill/>
+          <a:ln/>
+        </p:spPr>
+        <p:txBody>
+          <a:bodyPr wrap="square" lIns="0" tIns="0" rIns="0" bIns="0" rtlCol="0" anchor="t"/>
+          <a:lstStyle/>
+          <a:p>
+            <a:pPr indent="0" marL="0">
+              <a:buNone/>
+            </a:pPr>
+            <a:r>
+              <a:rPr lang="en-US" sz="1200" dirty="0">
+                <a:solidFill>
+                  <a:schemeClr val="tx1"/>
+                </a:solidFill>
+                <a:latin typeface="Calibri" pitchFamily="34" charset="0"/>
+                <a:ea typeface="Calibri" pitchFamily="34" charset="-122"/>
+                <a:cs typeface="Calibri" pitchFamily="34" charset="-120"/>
+              </a:rPr>
+              <a:t>Solo l'organizzatore; la fascia torna libera per tutti</a:t>
+            </a:r>
+            <a:endParaRPr lang="en-US" sz="1200" dirty="0"/>
+          </a:p>
+        </p:txBody>
+      </p:sp>
+      <p:sp>
+        <p:nvSpPr>
+          <p:cNvPr id="20" name="card-97"/>
+          <p:cNvSpPr/>
+          <p:nvPr/>
+        </p:nvSpPr>
+        <p:spPr>
+          <a:xfrm>
+            <a:off x="457200" y="2916936"/>
+            <a:ext cx="4023360" cy="777240"/>
+          </a:xfrm>
+          <a:prstGeom prst="rect">
+            <a:avLst/>
+          </a:prstGeom>
+          <a:solidFill>
+            <a:schemeClr val="bg2"/>
+          </a:solidFill>
+          <a:ln w="12700">
+            <a:solidFill>
+              <a:schemeClr val="bg2"/>
+            </a:solidFill>
+            <a:prstDash val="solid"/>
+          </a:ln>
+        </p:spPr>
+      </p:sp>
+      <p:sp>
+        <p:nvSpPr>
+          <p:cNvPr id="21" name="text-98"/>
+          <p:cNvSpPr txBox="1"/>
+          <p:nvPr/>
+        </p:nvSpPr>
+        <p:spPr>
+          <a:xfrm>
+            <a:off x="640080" y="3008376"/>
+            <a:ext cx="548640" cy="594360"/>
+          </a:xfrm>
+          <a:prstGeom prst="rect">
+            <a:avLst/>
+          </a:prstGeom>
+          <a:noFill/>
+          <a:ln/>
+        </p:spPr>
+        <p:txBody>
+          <a:bodyPr wrap="square" lIns="0" tIns="0" rIns="0" bIns="0" rtlCol="0" anchor="ctr"/>
+          <a:lstStyle/>
+          <a:p>
+            <a:pPr indent="0" marL="0">
+              <a:buNone/>
+            </a:pPr>
+            <a:r>
+              <a:rPr lang="en-US" sz="3000" b="1" dirty="0">
+                <a:solidFill>
+                  <a:schemeClr val="accent2"/>
+                </a:solidFill>
+                <a:latin typeface="Cambria" pitchFamily="34" charset="0"/>
+                <a:ea typeface="Cambria" pitchFamily="34" charset="-122"/>
+                <a:cs typeface="Cambria" pitchFamily="34" charset="-120"/>
+              </a:rPr>
+              <a:t>5</a:t>
+            </a:r>
+            <a:endParaRPr lang="en-US" sz="3000" dirty="0"/>
+          </a:p>
+        </p:txBody>
+      </p:sp>
+      <p:sp>
+        <p:nvSpPr>
+          <p:cNvPr id="22" name="text-99"/>
+          <p:cNvSpPr txBox="1"/>
+          <p:nvPr/>
+        </p:nvSpPr>
+        <p:spPr>
+          <a:xfrm>
+            <a:off x="1325880" y="2980944"/>
+            <a:ext cx="3017520" cy="292608"/>
+          </a:xfrm>
+          <a:prstGeom prst="rect">
+            <a:avLst/>
+          </a:prstGeom>
+          <a:noFill/>
+          <a:ln/>
+        </p:spPr>
+        <p:txBody>
+          <a:bodyPr wrap="square" lIns="0" tIns="0" rIns="0" bIns="0" rtlCol="0" anchor="t"/>
+          <a:lstStyle/>
+          <a:p>
+            <a:pPr indent="0" marL="0">
+              <a:buNone/>
+            </a:pPr>
+            <a:r>
+              <a:rPr lang="en-US" sz="1600" b="1" dirty="0">
+                <a:solidFill>
+                  <a:schemeClr val="tx2"/>
+                </a:solidFill>
+                <a:latin typeface="Cambria" pitchFamily="34" charset="0"/>
+                <a:ea typeface="Cambria" pitchFamily="34" charset="-122"/>
+                <a:cs typeface="Cambria" pitchFamily="34" charset="-120"/>
+              </a:rPr>
+              <a:t>Aula piena</a:t>
+            </a:r>
+            <a:endParaRPr lang="en-US" sz="1600" dirty="0"/>
+          </a:p>
+        </p:txBody>
+      </p:sp>
+      <p:sp>
+        <p:nvSpPr>
+          <p:cNvPr id="23" name="text-100"/>
+          <p:cNvSpPr txBox="1"/>
+          <p:nvPr/>
+        </p:nvSpPr>
+        <p:spPr>
+          <a:xfrm>
+            <a:off x="1325880" y="3282696"/>
+            <a:ext cx="3017520" cy="384048"/>
+          </a:xfrm>
+          <a:prstGeom prst="rect">
+            <a:avLst/>
+          </a:prstGeom>
+          <a:noFill/>
+          <a:ln/>
+        </p:spPr>
+        <p:txBody>
+          <a:bodyPr wrap="square" lIns="0" tIns="0" rIns="0" bIns="0" rtlCol="0" anchor="t"/>
+          <a:lstStyle/>
+          <a:p>
+            <a:pPr indent="0" marL="0">
+              <a:buNone/>
+            </a:pPr>
+            <a:r>
+              <a:rPr lang="en-US" sz="1200" dirty="0">
+                <a:solidFill>
+                  <a:schemeClr val="tx1"/>
+                </a:solidFill>
+                <a:latin typeface="Calibri" pitchFamily="34" charset="0"/>
+                <a:ea typeface="Calibri" pitchFamily="34" charset="-122"/>
+                <a:cs typeface="Calibri" pitchFamily="34" charset="-120"/>
+              </a:rPr>
+              <a:t>Aula 204 da 6 posti: la settima persona viene rifiutata</a:t>
+            </a:r>
+            <a:endParaRPr lang="en-US" sz="1200" dirty="0"/>
+          </a:p>
+        </p:txBody>
+      </p:sp>
+      <p:sp>
+        <p:nvSpPr>
+          <p:cNvPr id="24" name="card-101"/>
+          <p:cNvSpPr/>
+          <p:nvPr/>
+        </p:nvSpPr>
+        <p:spPr>
+          <a:xfrm>
+            <a:off x="4663440" y="2916936"/>
+            <a:ext cx="4023360" cy="777240"/>
+          </a:xfrm>
+          <a:prstGeom prst="rect">
+            <a:avLst/>
+          </a:prstGeom>
+          <a:solidFill>
+            <a:schemeClr val="bg2"/>
+          </a:solidFill>
+          <a:ln w="12700">
+            <a:solidFill>
+              <a:schemeClr val="bg2"/>
+            </a:solidFill>
+            <a:prstDash val="solid"/>
+          </a:ln>
+        </p:spPr>
+      </p:sp>
+      <p:sp>
+        <p:nvSpPr>
+          <p:cNvPr id="25" name="text-102"/>
+          <p:cNvSpPr txBox="1"/>
+          <p:nvPr/>
+        </p:nvSpPr>
+        <p:spPr>
+          <a:xfrm>
+            <a:off x="4846320" y="3008376"/>
+            <a:ext cx="548640" cy="594360"/>
+          </a:xfrm>
+          <a:prstGeom prst="rect">
+            <a:avLst/>
+          </a:prstGeom>
+          <a:noFill/>
+          <a:ln/>
+        </p:spPr>
+        <p:txBody>
+          <a:bodyPr wrap="square" lIns="0" tIns="0" rIns="0" bIns="0" rtlCol="0" anchor="ctr"/>
+          <a:lstStyle/>
+          <a:p>
+            <a:pPr indent="0" marL="0">
+              <a:buNone/>
+            </a:pPr>
+            <a:r>
+              <a:rPr lang="en-US" sz="3000" b="1" dirty="0">
+                <a:solidFill>
+                  <a:schemeClr val="accent2"/>
+                </a:solidFill>
+                <a:latin typeface="Cambria" pitchFamily="34" charset="0"/>
+                <a:ea typeface="Cambria" pitchFamily="34" charset="-122"/>
+                <a:cs typeface="Cambria" pitchFamily="34" charset="-120"/>
+              </a:rPr>
+              <a:t>6</a:t>
+            </a:r>
+            <a:endParaRPr lang="en-US" sz="3000" dirty="0"/>
+          </a:p>
+        </p:txBody>
+      </p:sp>
+      <p:sp>
+        <p:nvSpPr>
+          <p:cNvPr id="26" name="text-103"/>
+          <p:cNvSpPr txBox="1"/>
+          <p:nvPr/>
+        </p:nvSpPr>
+        <p:spPr>
+          <a:xfrm>
+            <a:off x="5532120" y="2980944"/>
+            <a:ext cx="3017520" cy="292608"/>
+          </a:xfrm>
+          <a:prstGeom prst="rect">
+            <a:avLst/>
+          </a:prstGeom>
+          <a:noFill/>
+          <a:ln/>
+        </p:spPr>
+        <p:txBody>
+          <a:bodyPr wrap="square" lIns="0" tIns="0" rIns="0" bIns="0" rtlCol="0" anchor="t"/>
+          <a:lstStyle/>
+          <a:p>
+            <a:pPr indent="0" marL="0">
+              <a:buNone/>
+            </a:pPr>
+            <a:r>
+              <a:rPr lang="en-US" sz="1600" b="1" dirty="0">
+                <a:solidFill>
+                  <a:schemeClr val="tx2"/>
+                </a:solidFill>
+                <a:latin typeface="Cambria" pitchFamily="34" charset="0"/>
+                <a:ea typeface="Cambria" pitchFamily="34" charset="-122"/>
+                <a:cs typeface="Cambria" pitchFamily="34" charset="-120"/>
+              </a:rPr>
+              <a:t>Commento</a:t>
+            </a:r>
+            <a:endParaRPr lang="en-US" sz="1600" dirty="0"/>
+          </a:p>
+        </p:txBody>
+      </p:sp>
+      <p:sp>
+        <p:nvSpPr>
+          <p:cNvPr id="27" name="text-104"/>
+          <p:cNvSpPr txBox="1"/>
+          <p:nvPr/>
+        </p:nvSpPr>
+        <p:spPr>
+          <a:xfrm>
+            <a:off x="5532120" y="3282696"/>
+            <a:ext cx="3017520" cy="384048"/>
+          </a:xfrm>
+          <a:prstGeom prst="rect">
+            <a:avLst/>
+          </a:prstGeom>
+          <a:noFill/>
+          <a:ln/>
+        </p:spPr>
+        <p:txBody>
+          <a:bodyPr wrap="square" lIns="0" tIns="0" rIns="0" bIns="0" rtlCol="0" anchor="t"/>
+          <a:lstStyle/>
+          <a:p>
+            <a:pPr indent="0" marL="0">
+              <a:buNone/>
+            </a:pPr>
+            <a:r>
+              <a:rPr lang="en-US" sz="1200" dirty="0">
+                <a:solidFill>
+                  <a:schemeClr val="tx1"/>
+                </a:solidFill>
+                <a:latin typeface="Calibri" pitchFamily="34" charset="0"/>
+                <a:ea typeface="Calibri" pitchFamily="34" charset="-122"/>
+                <a:cs typeface="Calibri" pitchFamily="34" charset="-120"/>
+              </a:rPr>
+              <a:t>Senza commento finale non si prenota di nuovo</a:t>
+            </a:r>
+            <a:endParaRPr lang="en-US" sz="1200" dirty="0"/>
+          </a:p>
+        </p:txBody>
+      </p:sp>
+      <p:sp>
+        <p:nvSpPr>
+          <p:cNvPr id="28" name="card-105"/>
+          <p:cNvSpPr/>
+          <p:nvPr/>
+        </p:nvSpPr>
+        <p:spPr>
+          <a:xfrm>
+            <a:off x="457200" y="3803904"/>
+            <a:ext cx="4023360" cy="777240"/>
+          </a:xfrm>
+          <a:prstGeom prst="rect">
+            <a:avLst/>
+          </a:prstGeom>
+          <a:solidFill>
+            <a:schemeClr val="bg2"/>
+          </a:solidFill>
+          <a:ln w="12700">
+            <a:solidFill>
+              <a:schemeClr val="bg2"/>
+            </a:solidFill>
+            <a:prstDash val="solid"/>
+          </a:ln>
+        </p:spPr>
+      </p:sp>
+      <p:sp>
+        <p:nvSpPr>
+          <p:cNvPr id="29" name="text-106"/>
+          <p:cNvSpPr txBox="1"/>
+          <p:nvPr/>
+        </p:nvSpPr>
+        <p:spPr>
+          <a:xfrm>
+            <a:off x="640080" y="3895344"/>
+            <a:ext cx="548640" cy="594360"/>
+          </a:xfrm>
+          <a:prstGeom prst="rect">
+            <a:avLst/>
+          </a:prstGeom>
+          <a:noFill/>
+          <a:ln/>
+        </p:spPr>
+        <p:txBody>
+          <a:bodyPr wrap="square" lIns="0" tIns="0" rIns="0" bIns="0" rtlCol="0" anchor="ctr"/>
+          <a:lstStyle/>
+          <a:p>
+            <a:pPr indent="0" marL="0">
+              <a:buNone/>
+            </a:pPr>
+            <a:r>
+              <a:rPr lang="en-US" sz="3000" b="1" dirty="0">
+                <a:solidFill>
+                  <a:schemeClr val="accent2"/>
+                </a:solidFill>
+                <a:latin typeface="Cambria" pitchFamily="34" charset="0"/>
+                <a:ea typeface="Cambria" pitchFamily="34" charset="-122"/>
+                <a:cs typeface="Cambria" pitchFamily="34" charset="-120"/>
+              </a:rPr>
+              <a:t>7</a:t>
+            </a:r>
+            <a:endParaRPr lang="en-US" sz="3000" dirty="0"/>
+          </a:p>
+        </p:txBody>
+      </p:sp>
+      <p:sp>
+        <p:nvSpPr>
+          <p:cNvPr id="30" name="text-107"/>
+          <p:cNvSpPr txBox="1"/>
+          <p:nvPr/>
+        </p:nvSpPr>
+        <p:spPr>
+          <a:xfrm>
+            <a:off x="1325880" y="3867912"/>
+            <a:ext cx="3017520" cy="292608"/>
+          </a:xfrm>
+          <a:prstGeom prst="rect">
+            <a:avLst/>
+          </a:prstGeom>
+          <a:noFill/>
+          <a:ln/>
+        </p:spPr>
+        <p:txBody>
+          <a:bodyPr wrap="square" lIns="0" tIns="0" rIns="0" bIns="0" rtlCol="0" anchor="t"/>
+          <a:lstStyle/>
+          <a:p>
+            <a:pPr indent="0" marL="0">
+              <a:buNone/>
+            </a:pPr>
+            <a:r>
+              <a:rPr lang="en-US" sz="1600" b="1" dirty="0">
+                <a:solidFill>
+                  <a:schemeClr val="tx2"/>
+                </a:solidFill>
+                <a:latin typeface="Cambria" pitchFamily="34" charset="0"/>
+                <a:ea typeface="Cambria" pitchFamily="34" charset="-122"/>
+                <a:cs typeface="Cambria" pitchFamily="34" charset="-120"/>
+              </a:rPr>
+              <a:t>Gruppo</a:t>
+            </a:r>
+            <a:endParaRPr lang="en-US" sz="1600" dirty="0"/>
+          </a:p>
+        </p:txBody>
+      </p:sp>
+      <p:sp>
+        <p:nvSpPr>
+          <p:cNvPr id="31" name="text-108"/>
+          <p:cNvSpPr txBox="1"/>
+          <p:nvPr/>
+        </p:nvSpPr>
+        <p:spPr>
+          <a:xfrm>
+            <a:off x="1325880" y="4169664"/>
+            <a:ext cx="3017520" cy="384048"/>
+          </a:xfrm>
+          <a:prstGeom prst="rect">
+            <a:avLst/>
+          </a:prstGeom>
+          <a:noFill/>
+          <a:ln/>
+        </p:spPr>
+        <p:txBody>
+          <a:bodyPr wrap="square" lIns="0" tIns="0" rIns="0" bIns="0" rtlCol="0" anchor="t"/>
+          <a:lstStyle/>
+          <a:p>
+            <a:pPr indent="0" marL="0">
+              <a:buNone/>
+            </a:pPr>
+            <a:r>
+              <a:rPr lang="en-US" sz="1200" dirty="0">
+                <a:solidFill>
+                  <a:schemeClr val="tx1"/>
+                </a:solidFill>
+                <a:latin typeface="Calibri" pitchFamily="34" charset="0"/>
+                <a:ea typeface="Calibri" pitchFamily="34" charset="-122"/>
+                <a:cs typeface="Calibri" pitchFamily="34" charset="-120"/>
+              </a:rPr>
+              <a:t>Inviti per email; l'invitato conferma, un altro utente no</a:t>
+            </a:r>
+            <a:endParaRPr lang="en-US" sz="1200" dirty="0"/>
+          </a:p>
+        </p:txBody>
+      </p:sp>
+      <p:sp>
+        <p:nvSpPr>
+          <p:cNvPr id="32" name="card-109"/>
+          <p:cNvSpPr/>
+          <p:nvPr/>
+        </p:nvSpPr>
+        <p:spPr>
+          <a:xfrm>
+            <a:off x="4663440" y="3803904"/>
+            <a:ext cx="4023360" cy="777240"/>
+          </a:xfrm>
+          <a:prstGeom prst="rect">
+            <a:avLst/>
+          </a:prstGeom>
+          <a:solidFill>
+            <a:schemeClr val="bg2"/>
+          </a:solidFill>
+          <a:ln w="12700">
+            <a:solidFill>
+              <a:schemeClr val="bg2"/>
+            </a:solidFill>
+            <a:prstDash val="solid"/>
+          </a:ln>
+        </p:spPr>
+      </p:sp>
+      <p:sp>
+        <p:nvSpPr>
+          <p:cNvPr id="33" name="text-110"/>
+          <p:cNvSpPr txBox="1"/>
+          <p:nvPr/>
+        </p:nvSpPr>
+        <p:spPr>
+          <a:xfrm>
+            <a:off x="4846320" y="3895344"/>
+            <a:ext cx="548640" cy="594360"/>
+          </a:xfrm>
+          <a:prstGeom prst="rect">
+            <a:avLst/>
+          </a:prstGeom>
+          <a:noFill/>
+          <a:ln/>
+        </p:spPr>
+        <p:txBody>
+          <a:bodyPr wrap="square" lIns="0" tIns="0" rIns="0" bIns="0" rtlCol="0" anchor="ctr"/>
+          <a:lstStyle/>
+          <a:p>
+            <a:pPr indent="0" marL="0">
+              <a:buNone/>
+            </a:pPr>
+            <a:r>
+              <a:rPr lang="en-US" sz="3000" b="1" dirty="0">
+                <a:solidFill>
+                  <a:schemeClr val="accent2"/>
+                </a:solidFill>
+                <a:latin typeface="Cambria" pitchFamily="34" charset="0"/>
+                <a:ea typeface="Cambria" pitchFamily="34" charset="-122"/>
+                <a:cs typeface="Cambria" pitchFamily="34" charset="-120"/>
+              </a:rPr>
+              <a:t>8</a:t>
+            </a:r>
+            <a:endParaRPr lang="en-US" sz="3000" dirty="0"/>
+          </a:p>
+        </p:txBody>
+      </p:sp>
+      <p:sp>
+        <p:nvSpPr>
+          <p:cNvPr id="34" name="text-111"/>
+          <p:cNvSpPr txBox="1"/>
+          <p:nvPr/>
+        </p:nvSpPr>
+        <p:spPr>
+          <a:xfrm>
+            <a:off x="5532120" y="3867912"/>
+            <a:ext cx="3017520" cy="292608"/>
+          </a:xfrm>
+          <a:prstGeom prst="rect">
+            <a:avLst/>
+          </a:prstGeom>
+          <a:noFill/>
+          <a:ln/>
+        </p:spPr>
+        <p:txBody>
+          <a:bodyPr wrap="square" lIns="0" tIns="0" rIns="0" bIns="0" rtlCol="0" anchor="t"/>
+          <a:lstStyle/>
+          <a:p>
+            <a:pPr indent="0" marL="0">
+              <a:buNone/>
+            </a:pPr>
+            <a:r>
+              <a:rPr lang="en-US" sz="1600" b="1" dirty="0">
+                <a:solidFill>
+                  <a:schemeClr val="tx2"/>
+                </a:solidFill>
+                <a:latin typeface="Cambria" pitchFamily="34" charset="0"/>
+                <a:ea typeface="Cambria" pitchFamily="34" charset="-122"/>
+                <a:cs typeface="Cambria" pitchFamily="34" charset="-120"/>
+              </a:rPr>
+              <a:t>Admin</a:t>
+            </a:r>
+            <a:endParaRPr lang="en-US" sz="1600" dirty="0"/>
+          </a:p>
+        </p:txBody>
+      </p:sp>
+      <p:sp>
+        <p:nvSpPr>
+          <p:cNvPr id="35" name="text-112"/>
+          <p:cNvSpPr txBox="1"/>
+          <p:nvPr/>
+        </p:nvSpPr>
+        <p:spPr>
+          <a:xfrm>
+            <a:off x="5532120" y="4169664"/>
+            <a:ext cx="3017520" cy="384048"/>
+          </a:xfrm>
+          <a:prstGeom prst="rect">
+            <a:avLst/>
+          </a:prstGeom>
+          <a:noFill/>
+          <a:ln/>
+        </p:spPr>
+        <p:txBody>
+          <a:bodyPr wrap="square" lIns="0" tIns="0" rIns="0" bIns="0" rtlCol="0" anchor="t"/>
+          <a:lstStyle/>
+          <a:p>
+            <a:pPr indent="0" marL="0">
+              <a:buNone/>
+            </a:pPr>
+            <a:r>
+              <a:rPr lang="en-US" sz="1200" dirty="0">
+                <a:solidFill>
+                  <a:schemeClr val="tx1"/>
+                </a:solidFill>
+                <a:latin typeface="Calibri" pitchFamily="34" charset="0"/>
+                <a:ea typeface="Calibri" pitchFamily="34" charset="-122"/>
+                <a:cs typeface="Calibri" pitchFamily="34" charset="-120"/>
+              </a:rPr>
+              <a:t>La dashboard solo per l'admin; Spaces fermo: 503</a:t>
+            </a:r>
+            <a:endParaRPr lang="en-US" sz="1200" dirty="0"/>
+          </a:p>
+        </p:txBody>
+      </p:sp>
+      <p:sp>
+        <p:nvSpPr>
+          <p:cNvPr id="25" name="Slide Number Placeholder 0"/>
+          <p:cNvSpPr>
+            <a:spLocks noGrp="1"/>
+          </p:cNvSpPr>
+          <p:nvPr>
+            <p:ph type="sldNum" sz="quarter" idx="4294967295"/>
+          </p:nvPr>
+        </p:nvSpPr>
+        <p:spPr>
+          <a:xfrm>
+            <a:off x="8321040" y="4754880"/>
+            <a:ext cx="457200" cy="274320"/>
+          </a:xfrm>
+          <a:prstGeom prst="rect">
+            <a:avLst/>
+          </a:prstGeom>
+          <a:extLst>
+            <a:ext uri="{C572A759-6A51-4108-AA02-DFA0A04FC94B}">
+              <ma14:wrappingTextBoxFlag xmlns:ma14="http://schemas.microsoft.com/office/mac/drawingml/2011/main" val="0"/>
+            </a:ext>
+          </a:extLst>
+        </p:spPr>
+        <p:txBody>
+          <a:bodyPr/>
+          <a:lstStyle>
+            <a:lvl1pPr>
+              <a:defRPr sz="1000">
+                <a:solidFill>
+                  <a:schemeClr val="accent6"/>
+                </a:solidFill>
+              </a:defRPr>
+            </a:lvl1pPr>
+          </a:lstStyle>
+          <a:p>
+            <a:pPr algn="r"/>
+            <a:fld id="{F7021451-1387-4CA6-816F-3879F97B5CBC}" type="slidenum">
+              <a:rPr b="0" lang="en-US"/>
+              <a:t>8</a:t>
+            </a:fld>
+            <a:endParaRPr lang="en-US"/>
+          </a:p>
+        </p:txBody>
+      </p:sp>
+    </p:spTree>
+  </p:cSld>
+  <p:clrMapOvr>
+    <a:masterClrMapping/>
+  </p:clrMapOvr>
+</p:sld>
+</file>
+
+<file path=ppt/slides/slide9.xml><?xml version="1.0" encoding="utf-8"?>
+<p:sld xmlns:a="http://schemas.openxmlformats.org/drawingml/2006/main" xmlns:r="http://schemas.openxmlformats.org/officeDocument/2006/relationships" xmlns:p="http://schemas.openxmlformats.org/presentationml/2006/main">
+  <p:cSld name="Slide 9">
+    <p:spTree>
+      <p:nvGrpSpPr>
+        <p:cNvPr id="1" name=""/>
+        <p:cNvGrpSpPr/>
+        <p:nvPr/>
+      </p:nvGrpSpPr>
+      <p:grpSpPr>
+        <a:xfrm>
+          <a:off x="0" y="0"/>
+          <a:ext cx="0" cy="0"/>
+          <a:chOff x="0" y="0"/>
+          <a:chExt cx="0" cy="0"/>
+        </a:xfrm>
+      </p:grpSpPr>
+      <p:sp>
+        <p:nvSpPr>
+          <p:cNvPr id="2" name="Text 0"/>
+          <p:cNvSpPr/>
+          <p:nvPr>
+            <p:ph idx="100" type="title" hasCustomPrompt="1"/>
+          </p:nvPr>
+        </p:nvSpPr>
+        <p:spPr>
+          <a:xfrm>
+            <a:off x="457200" y="274320"/>
+            <a:ext cx="8229600" cy="731520"/>
+          </a:xfrm>
+          <a:prstGeom prst="rect">
+            <a:avLst/>
+          </a:prstGeom>
+          <a:noFill/>
+          <a:ln/>
+        </p:spPr>
+        <p:txBody>
+          <a:bodyPr wrap="square" lIns="0" tIns="0" rIns="0" bIns="0" rtlCol="0" anchor="ctr"/>
+          <a:lstStyle/>
+          <a:p>
+            <a:pPr algn="l" indent="0" marL="0">
+              <a:buNone/>
+            </a:pPr>
+            <a:r>
+              <a:rPr lang="en-US" sz="3200" b="1" dirty="0">
+                <a:solidFill>
+                  <a:schemeClr val="tx2"/>
+                </a:solidFill>
+                <a:latin typeface="Cambria" pitchFamily="34" charset="0"/>
+                <a:ea typeface="Cambria" pitchFamily="34" charset="-122"/>
+                <a:cs typeface="Cambria" pitchFamily="34" charset="-120"/>
+              </a:rPr>
               <a:t>Prove eseguite</a:t>
             </a:r>
             <a:endParaRPr lang="en-US" sz="3200" dirty="0"/>
@@ -8305,7 +10175,7 @@
       </p:sp>
       <p:graphicFrame>
         <p:nvGraphicFramePr>
-          <p:cNvPr id="9" name="table-95"/>
+          <p:cNvPr id="10" name="table-113"/>
           <p:cNvGraphicFramePr>
             <a:graphicFrameLocks noGrp="1"/>
           </p:cNvGraphicFramePr>
@@ -8318,7 +10188,7 @@
           </p:nvPr>
         </p:nvGraphicFramePr>
         <p:xfrm>
-          <a:off x="457200" y="1188720"/>
+          <a:off x="457200" y="1143000"/>
           <a:ext cx="8229600" cy="914400"/>
         </p:xfrm>
         <a:graphic>
@@ -8330,7 +10200,7 @@
                 <a:gridCol w="4114800"/>
                 <a:gridCol w="1920240"/>
               </a:tblGrid>
-              <a:tr h="475488">
+              <a:tr h="429768">
                 <a:tc>
                   <a:txBody>
                     <a:bodyPr/>
@@ -8536,7 +10406,7 @@
                   </a:tcPr>
                 </a:tc>
               </a:tr>
-              <a:tr h="475488">
+              <a:tr h="429768">
                 <a:tc>
                   <a:txBody>
                     <a:bodyPr/>
@@ -8733,7 +10603,7 @@
                   </a:tcPr>
                 </a:tc>
               </a:tr>
-              <a:tr h="475488">
+              <a:tr h="429768">
                 <a:tc>
                   <a:txBody>
                     <a:bodyPr/>
@@ -8930,7 +10800,7 @@
                   </a:tcPr>
                 </a:tc>
               </a:tr>
-              <a:tr h="475488">
+              <a:tr h="429768">
                 <a:tc>
                   <a:txBody>
                     <a:bodyPr/>
@@ -9127,7 +10997,7 @@
                   </a:tcPr>
                 </a:tc>
               </a:tr>
-              <a:tr h="475488">
+              <a:tr h="429768">
                 <a:tc>
                   <a:txBody>
                     <a:bodyPr/>
@@ -9324,7 +11194,7 @@
                   </a:tcPr>
                 </a:tc>
               </a:tr>
-              <a:tr h="475488">
+              <a:tr h="429768">
                 <a:tc>
                   <a:txBody>
                     <a:bodyPr/>
@@ -9521,7 +11391,7 @@
                   </a:tcPr>
                 </a:tc>
               </a:tr>
-              <a:tr h="475488">
+              <a:tr h="429768">
                 <a:tc>
                   <a:txBody>
                     <a:bodyPr/>
@@ -9718,19 +11588,216 @@
                   </a:tcPr>
                 </a:tc>
               </a:tr>
+              <a:tr h="429768">
+                <a:tc>
+                  <a:txBody>
+                    <a:bodyPr/>
+                    <a:lstStyle/>
+                    <a:p>
+                      <a:pPr indent="0" marL="0">
+                        <a:buNone/>
+                      </a:pPr>
+                      <a:r>
+                        <a:rPr lang="en-US" sz="1200" b="1" dirty="0">
+                          <a:solidFill>
+                            <a:schemeClr val="tx2"/>
+                          </a:solidFill>
+                          <a:latin typeface="Calibri" pitchFamily="34" charset="0"/>
+                          <a:ea typeface="Calibri" pitchFamily="34" charset="-122"/>
+                          <a:cs typeface="Calibri" pitchFamily="34" charset="-120"/>
+                        </a:rPr>
+                        <a:t>Prove di guasto</a:t>
+                      </a:r>
+                      <a:endParaRPr lang="en-US" sz="1200" dirty="0">
+                        <a:latin typeface="Calibri" charset="0"/>
+                        <a:ea typeface="Calibri" charset="0"/>
+                        <a:cs typeface="Calibri" charset="0"/>
+                      </a:endParaRPr>
+                    </a:p>
+                  </a:txBody>
+                  <a:tcPr marL="91440" marR="91440" marT="36576" marB="36576" anchor="ctr">
+                    <a:lnL w="9525" cap="flat" cmpd="sng" algn="ctr">
+                      <a:solidFill>
+                        <a:srgbClr val="D5DEDC"/>
+                      </a:solidFill>
+                      <a:prstDash val="solid"/>
+                      <a:round/>
+                      <a:headEnd type="none" w="med" len="med"/>
+                      <a:tailEnd type="none" w="med" len="med"/>
+                    </a:lnL>
+                    <a:lnR w="9525" cap="flat" cmpd="sng" algn="ctr">
+                      <a:solidFill>
+                        <a:srgbClr val="D5DEDC"/>
+                      </a:solidFill>
+                      <a:prstDash val="solid"/>
+                      <a:round/>
+                      <a:headEnd type="none" w="med" len="med"/>
+                      <a:tailEnd type="none" w="med" len="med"/>
+                    </a:lnR>
+                    <a:lnT w="9525" cap="flat" cmpd="sng" algn="ctr">
+                      <a:solidFill>
+                        <a:srgbClr val="D5DEDC"/>
+                      </a:solidFill>
+                      <a:prstDash val="solid"/>
+                      <a:round/>
+                      <a:headEnd type="none" w="med" len="med"/>
+                      <a:tailEnd type="none" w="med" len="med"/>
+                    </a:lnT>
+                    <a:lnB w="9525" cap="flat" cmpd="sng" algn="ctr">
+                      <a:solidFill>
+                        <a:srgbClr val="D5DEDC"/>
+                      </a:solidFill>
+                      <a:prstDash val="solid"/>
+                      <a:round/>
+                      <a:headEnd type="none" w="med" len="med"/>
+                      <a:tailEnd type="none" w="med" len="med"/>
+                    </a:lnB>
+                  </a:tcPr>
+                </a:tc>
+                <a:tc>
+                  <a:txBody>
+                    <a:bodyPr/>
+                    <a:lstStyle/>
+                    <a:p>
+                      <a:pPr indent="0" marL="0">
+                        <a:buNone/>
+                      </a:pPr>
+                      <a:r>
+                        <a:rPr lang="en-US" sz="1200" dirty="0">
+                          <a:solidFill>
+                            <a:schemeClr val="tx1"/>
+                          </a:solidFill>
+                          <a:latin typeface="Calibri" pitchFamily="34" charset="0"/>
+                          <a:ea typeface="Calibri" pitchFamily="34" charset="-122"/>
+                          <a:cs typeface="Calibri" pitchFamily="34" charset="-120"/>
+                        </a:rPr>
+                        <a:t>Servizi e database fermati uno alla volta</a:t>
+                      </a:r>
+                      <a:endParaRPr lang="en-US" sz="1200" dirty="0">
+                        <a:latin typeface="Calibri" charset="0"/>
+                        <a:ea typeface="Calibri" charset="0"/>
+                        <a:cs typeface="Calibri" charset="0"/>
+                      </a:endParaRPr>
+                    </a:p>
+                  </a:txBody>
+                  <a:tcPr marL="91440" marR="91440" marT="36576" marB="36576" anchor="ctr">
+                    <a:lnL w="9525" cap="flat" cmpd="sng" algn="ctr">
+                      <a:solidFill>
+                        <a:srgbClr val="D5DEDC"/>
+                      </a:solidFill>
+                      <a:prstDash val="solid"/>
+                      <a:round/>
+                      <a:headEnd type="none" w="med" len="med"/>
+                      <a:tailEnd type="none" w="med" len="med"/>
+                    </a:lnL>
+                    <a:lnR w="9525" cap="flat" cmpd="sng" algn="ctr">
+                      <a:solidFill>
+                        <a:srgbClr val="D5DEDC"/>
+                      </a:solidFill>
+                      <a:prstDash val="solid"/>
+                      <a:round/>
+                      <a:headEnd type="none" w="med" len="med"/>
+                      <a:tailEnd type="none" w="med" len="med"/>
+                    </a:lnR>
+                    <a:lnT w="9525" cap="flat" cmpd="sng" algn="ctr">
+                      <a:solidFill>
+                        <a:srgbClr val="D5DEDC"/>
+                      </a:solidFill>
+                      <a:prstDash val="solid"/>
+                      <a:round/>
+                      <a:headEnd type="none" w="med" len="med"/>
+                      <a:tailEnd type="none" w="med" len="med"/>
+                    </a:lnT>
+                    <a:lnB w="9525" cap="flat" cmpd="sng" algn="ctr">
+                      <a:solidFill>
+                        <a:srgbClr val="D5DEDC"/>
+                      </a:solidFill>
+                      <a:prstDash val="solid"/>
+                      <a:round/>
+                      <a:headEnd type="none" w="med" len="med"/>
+                      <a:tailEnd type="none" w="med" len="med"/>
+                    </a:lnB>
+                  </a:tcPr>
+                </a:tc>
+                <a:tc>
+                  <a:txBody>
+                    <a:bodyPr/>
+                    <a:lstStyle/>
+                    <a:p>
+                      <a:pPr indent="0" marL="0">
+                        <a:buNone/>
+                      </a:pPr>
+                      <a:r>
+                        <a:rPr lang="en-US" sz="1200" b="1" dirty="0">
+                          <a:solidFill>
+                            <a:schemeClr val="accent2"/>
+                          </a:solidFill>
+                          <a:latin typeface="Calibri" pitchFamily="34" charset="0"/>
+                          <a:ea typeface="Calibri" pitchFamily="34" charset="-122"/>
+                          <a:cs typeface="Calibri" pitchFamily="34" charset="-120"/>
+                        </a:rPr>
+                        <a:t>Da eseguire</a:t>
+                      </a:r>
+                      <a:endParaRPr lang="en-US" sz="1200" dirty="0">
+                        <a:latin typeface="Calibri" charset="0"/>
+                        <a:ea typeface="Calibri" charset="0"/>
+                        <a:cs typeface="Calibri" charset="0"/>
+                      </a:endParaRPr>
+                    </a:p>
+                  </a:txBody>
+                  <a:tcPr marL="91440" marR="91440" marT="36576" marB="36576" anchor="ctr">
+                    <a:lnL w="9525" cap="flat" cmpd="sng" algn="ctr">
+                      <a:solidFill>
+                        <a:srgbClr val="D5DEDC"/>
+                      </a:solidFill>
+                      <a:prstDash val="solid"/>
+                      <a:round/>
+                      <a:headEnd type="none" w="med" len="med"/>
+                      <a:tailEnd type="none" w="med" len="med"/>
+                    </a:lnL>
+                    <a:lnR w="9525" cap="flat" cmpd="sng" algn="ctr">
+                      <a:solidFill>
+                        <a:srgbClr val="D5DEDC"/>
+                      </a:solidFill>
+                      <a:prstDash val="solid"/>
+                      <a:round/>
+                      <a:headEnd type="none" w="med" len="med"/>
+                      <a:tailEnd type="none" w="med" len="med"/>
+                    </a:lnR>
+                    <a:lnT w="9525" cap="flat" cmpd="sng" algn="ctr">
+                      <a:solidFill>
+                        <a:srgbClr val="D5DEDC"/>
+                      </a:solidFill>
+                      <a:prstDash val="solid"/>
+                      <a:round/>
+                      <a:headEnd type="none" w="med" len="med"/>
+                      <a:tailEnd type="none" w="med" len="med"/>
+                    </a:lnT>
+                    <a:lnB w="9525" cap="flat" cmpd="sng" algn="ctr">
+                      <a:solidFill>
+                        <a:srgbClr val="D5DEDC"/>
+                      </a:solidFill>
+                      <a:prstDash val="solid"/>
+                      <a:round/>
+                      <a:headEnd type="none" w="med" len="med"/>
+                      <a:tailEnd type="none" w="med" len="med"/>
+                    </a:lnB>
+                  </a:tcPr>
+                </a:tc>
+              </a:tr>
             </a:tbl>
           </a:graphicData>
         </a:graphic>
       </p:graphicFrame>
       <p:sp>
         <p:nvSpPr>
-          <p:cNvPr id="5" name="text-96"/>
+          <p:cNvPr id="5" name="text-114"/>
           <p:cNvSpPr txBox="1"/>
           <p:nvPr/>
         </p:nvSpPr>
         <p:spPr>
           <a:xfrm>
-            <a:off x="457200" y="4572000"/>
+            <a:off x="457200" y="4617720"/>
             <a:ext cx="7680960" cy="274320"/>
           </a:xfrm>
           <a:prstGeom prst="rect">
@@ -9758,329 +11825,6 @@
               <a:t>Tutte su PostgreSQL e MongoDB reali, non in memoria. L'interfaccia non è ancora provata.</a:t>
             </a:r>
             <a:endParaRPr lang="en-US" sz="1200" dirty="0"/>
-          </a:p>
-        </p:txBody>
-      </p:sp>
-      <p:sp>
-        <p:nvSpPr>
-          <p:cNvPr id="25" name="Slide Number Placeholder 0"/>
-          <p:cNvSpPr>
-            <a:spLocks noGrp="1"/>
-          </p:cNvSpPr>
-          <p:nvPr>
-            <p:ph type="sldNum" sz="quarter" idx="4294967295"/>
-          </p:nvPr>
-        </p:nvSpPr>
-        <p:spPr>
-          <a:xfrm>
-            <a:off x="8321040" y="4754880"/>
-            <a:ext cx="457200" cy="274320"/>
-          </a:xfrm>
-          <a:prstGeom prst="rect">
-            <a:avLst/>
-          </a:prstGeom>
-          <a:extLst>
-            <a:ext uri="{C572A759-6A51-4108-AA02-DFA0A04FC94B}">
-              <ma14:wrappingTextBoxFlag xmlns:ma14="http://schemas.microsoft.com/office/mac/drawingml/2011/main" val="0"/>
-            </a:ext>
-          </a:extLst>
-        </p:spPr>
-        <p:txBody>
-          <a:bodyPr/>
-          <a:lstStyle>
-            <a:lvl1pPr>
-              <a:defRPr sz="1000">
-                <a:solidFill>
-                  <a:schemeClr val="accent6"/>
-                </a:solidFill>
-              </a:defRPr>
-            </a:lvl1pPr>
-          </a:lstStyle>
-          <a:p>
-            <a:pPr algn="r"/>
-            <a:fld id="{F7021451-1387-4CA6-816F-3879F97B5CBC}" type="slidenum">
-              <a:rPr b="0" lang="en-US"/>
-              <a:t>8</a:t>
-            </a:fld>
-            <a:endParaRPr lang="en-US"/>
-          </a:p>
-        </p:txBody>
-      </p:sp>
-    </p:spTree>
-  </p:cSld>
-  <p:clrMapOvr>
-    <a:masterClrMapping/>
-  </p:clrMapOvr>
-</p:sld>
-</file>
-
-<file path=ppt/slides/slide9.xml><?xml version="1.0" encoding="utf-8"?>
-<p:sld xmlns:a="http://schemas.openxmlformats.org/drawingml/2006/main" xmlns:r="http://schemas.openxmlformats.org/officeDocument/2006/relationships" xmlns:p="http://schemas.openxmlformats.org/presentationml/2006/main">
-  <p:cSld name="Slide 9">
-    <p:spTree>
-      <p:nvGrpSpPr>
-        <p:cNvPr id="1" name=""/>
-        <p:cNvGrpSpPr/>
-        <p:nvPr/>
-      </p:nvGrpSpPr>
-      <p:grpSpPr>
-        <a:xfrm>
-          <a:off x="0" y="0"/>
-          <a:ext cx="0" cy="0"/>
-          <a:chOff x="0" y="0"/>
-          <a:chExt cx="0" cy="0"/>
-        </a:xfrm>
-      </p:grpSpPr>
-      <p:sp>
-        <p:nvSpPr>
-          <p:cNvPr id="2" name="Text 0"/>
-          <p:cNvSpPr/>
-          <p:nvPr>
-            <p:ph idx="100" type="title" hasCustomPrompt="1"/>
-          </p:nvPr>
-        </p:nvSpPr>
-        <p:spPr>
-          <a:xfrm>
-            <a:off x="457200" y="274320"/>
-            <a:ext cx="8229600" cy="731520"/>
-          </a:xfrm>
-          <a:prstGeom prst="rect">
-            <a:avLst/>
-          </a:prstGeom>
-          <a:noFill/>
-          <a:ln/>
-        </p:spPr>
-        <p:txBody>
-          <a:bodyPr wrap="square" lIns="0" tIns="0" rIns="0" bIns="0" rtlCol="0" anchor="ctr"/>
-          <a:lstStyle/>
-          <a:p>
-            <a:pPr algn="l" indent="0" marL="0">
-              <a:buNone/>
-            </a:pPr>
-            <a:r>
-              <a:rPr lang="en-US" sz="3200" b="1" dirty="0">
-                <a:solidFill>
-                  <a:schemeClr val="tx2"/>
-                </a:solidFill>
-                <a:latin typeface="Cambria" pitchFamily="34" charset="0"/>
-                <a:ea typeface="Cambria" pitchFamily="34" charset="-122"/>
-                <a:cs typeface="Cambria" pitchFamily="34" charset="-120"/>
-              </a:rPr>
-              <a:t>Limiti noti</a:t>
-            </a:r>
-            <a:endParaRPr lang="en-US" sz="3200" dirty="0"/>
-          </a:p>
-        </p:txBody>
-      </p:sp>
-      <p:sp>
-        <p:nvSpPr>
-          <p:cNvPr id="4" name="card-97"/>
-          <p:cNvSpPr/>
-          <p:nvPr/>
-        </p:nvSpPr>
-        <p:spPr>
-          <a:xfrm>
-            <a:off x="457200" y="1188720"/>
-            <a:ext cx="8229600" cy="777240"/>
-          </a:xfrm>
-          <a:prstGeom prst="rect">
-            <a:avLst/>
-          </a:prstGeom>
-          <a:solidFill>
-            <a:schemeClr val="accent1"/>
-          </a:solidFill>
-          <a:ln w="12700">
-            <a:solidFill>
-              <a:schemeClr val="accent1"/>
-            </a:solidFill>
-            <a:prstDash val="solid"/>
-          </a:ln>
-        </p:spPr>
-      </p:sp>
-      <p:sp>
-        <p:nvSpPr>
-          <p:cNvPr id="5" name="text-98"/>
-          <p:cNvSpPr txBox="1"/>
-          <p:nvPr/>
-        </p:nvSpPr>
-        <p:spPr>
-          <a:xfrm>
-            <a:off x="685800" y="1261872"/>
-            <a:ext cx="7772400" cy="640080"/>
-          </a:xfrm>
-          <a:prstGeom prst="rect">
-            <a:avLst/>
-          </a:prstGeom>
-          <a:noFill/>
-          <a:ln/>
-        </p:spPr>
-        <p:txBody>
-          <a:bodyPr wrap="square" lIns="0" tIns="0" rIns="0" bIns="0" rtlCol="0" anchor="ctr"/>
-          <a:lstStyle/>
-          <a:p>
-            <a:pPr indent="0" marL="0">
-              <a:buNone/>
-            </a:pPr>
-            <a:r>
-              <a:rPr lang="en-US" sz="1900" b="1" dirty="0">
-                <a:solidFill>
-                  <a:schemeClr val="bg1"/>
-                </a:solidFill>
-                <a:latin typeface="Cambria" pitchFamily="34" charset="0"/>
-                <a:ea typeface="Cambria" pitchFamily="34" charset="-122"/>
-                <a:cs typeface="Cambria" pitchFamily="34" charset="-120"/>
-              </a:rPr>
-              <a:t>I dati sintetici verificano il prototipo, ma non dimostrano benefici reali per il campus.</a:t>
-            </a:r>
-            <a:endParaRPr lang="en-US" sz="1900" dirty="0"/>
-          </a:p>
-        </p:txBody>
-      </p:sp>
-      <p:sp>
-        <p:nvSpPr>
-          <p:cNvPr id="6" name="text-99"/>
-          <p:cNvSpPr txBox="1"/>
-          <p:nvPr/>
-        </p:nvSpPr>
-        <p:spPr>
-          <a:xfrm>
-            <a:off x="457200" y="2148840"/>
-            <a:ext cx="8229600" cy="2560320"/>
-          </a:xfrm>
-          <a:prstGeom prst="rect">
-            <a:avLst/>
-          </a:prstGeom>
-          <a:noFill/>
-          <a:ln/>
-        </p:spPr>
-        <p:txBody>
-          <a:bodyPr wrap="square" lIns="0" tIns="0" rIns="0" bIns="0" rtlCol="0" anchor="t"/>
-          <a:lstStyle/>
-          <a:p>
-            <a:pPr marL="342900" indent="-342900">
-              <a:spcAft>
-                <a:spcPts val="600"/>
-              </a:spcAft>
-              <a:buSzPct val="100000"/>
-              <a:buChar char="•"/>
-            </a:pPr>
-            <a:r>
-              <a:rPr lang="en-US" sz="1400" dirty="0">
-                <a:solidFill>
-                  <a:schemeClr val="tx1"/>
-                </a:solidFill>
-                <a:latin typeface="Calibri" pitchFamily="34" charset="0"/>
-                <a:ea typeface="Calibri" pitchFamily="34" charset="-122"/>
-                <a:cs typeface="Calibri" pitchFamily="34" charset="-120"/>
-              </a:rPr>
-              <a:t>Interfaccia non ancora provata su due sistemi operativi e su uno smartphone</a:t>
-            </a:r>
-            <a:endParaRPr lang="en-US" sz="1400" dirty="0"/>
-          </a:p>
-          <a:p>
-            <a:pPr marL="342900" indent="-342900">
-              <a:spcAft>
-                <a:spcPts val="600"/>
-              </a:spcAft>
-              <a:buSzPct val="100000"/>
-              <a:buChar char="•"/>
-            </a:pPr>
-            <a:r>
-              <a:rPr lang="en-US" sz="1400" dirty="0">
-                <a:solidFill>
-                  <a:schemeClr val="tx1"/>
-                </a:solidFill>
-                <a:latin typeface="Calibri" pitchFamily="34" charset="0"/>
-                <a:ea typeface="Calibri" pitchFamily="34" charset="-122"/>
-                <a:cs typeface="Calibri" pitchFamily="34" charset="-120"/>
-              </a:rPr>
-              <a:t>Concorrenza provata su un solo servizio e un solo database; con più istanze va ripetuta</a:t>
-            </a:r>
-            <a:endParaRPr lang="en-US" sz="1400" dirty="0"/>
-          </a:p>
-          <a:p>
-            <a:pPr marL="342900" indent="-342900">
-              <a:spcAft>
-                <a:spcPts val="600"/>
-              </a:spcAft>
-              <a:buSzPct val="100000"/>
-              <a:buChar char="•"/>
-            </a:pPr>
-            <a:r>
-              <a:rPr lang="en-US" sz="1400" dirty="0">
-                <a:solidFill>
-                  <a:schemeClr val="tx1"/>
-                </a:solidFill>
-                <a:latin typeface="Calibri" pitchFamily="34" charset="0"/>
-                <a:ea typeface="Calibri" pitchFamily="34" charset="-122"/>
-                <a:cs typeface="Calibri" pitchFamily="34" charset="-120"/>
-              </a:rPr>
-              <a:t>Aula mista: un fallimento in CI visto una volta e non riprodotto; causa probabile, non dimostrata</a:t>
-            </a:r>
-            <a:endParaRPr lang="en-US" sz="1400" dirty="0"/>
-          </a:p>
-          <a:p>
-            <a:pPr marL="342900" indent="-342900">
-              <a:spcAft>
-                <a:spcPts val="600"/>
-              </a:spcAft>
-              <a:buSzPct val="100000"/>
-              <a:buChar char="•"/>
-            </a:pPr>
-            <a:r>
-              <a:rPr lang="en-US" sz="1400" dirty="0">
-                <a:solidFill>
-                  <a:schemeClr val="tx1"/>
-                </a:solidFill>
-                <a:latin typeface="Calibri" pitchFamily="34" charset="0"/>
-                <a:ea typeface="Calibri" pitchFamily="34" charset="-122"/>
-                <a:cs typeface="Calibri" pitchFamily="34" charset="-120"/>
-              </a:rPr>
-              <a:t>Con PostgreSQL fermo Bookings risponde dopo circa un minuto: da correggere</a:t>
-            </a:r>
-            <a:endParaRPr lang="en-US" sz="1400" dirty="0"/>
-          </a:p>
-          <a:p>
-            <a:pPr marL="342900" indent="-342900">
-              <a:spcAft>
-                <a:spcPts val="600"/>
-              </a:spcAft>
-              <a:buSzPct val="100000"/>
-              <a:buChar char="•"/>
-            </a:pPr>
-            <a:r>
-              <a:rPr lang="en-US" sz="1400" dirty="0">
-                <a:solidFill>
-                  <a:schemeClr val="tx1"/>
-                </a:solidFill>
-                <a:latin typeface="Calibri" pitchFamily="34" charset="0"/>
-                <a:ea typeface="Calibri" pitchFamily="34" charset="-122"/>
-                <a:cs typeface="Calibri" pitchFamily="34" charset="-120"/>
-              </a:rPr>
-              <a:t>Email in coda nel database: i file .eml arrivano con un task successivo</a:t>
-            </a:r>
-            <a:endParaRPr lang="en-US" sz="1400" dirty="0"/>
-          </a:p>
-          <a:p>
-            <a:pPr marL="342900" indent="-342900">
-              <a:spcAft>
-                <a:spcPts val="600"/>
-              </a:spcAft>
-              <a:buSzPct val="100000"/>
-              <a:buChar char="•"/>
-            </a:pPr>
-            <a:r>
-              <a:rPr lang="en-US" sz="1400" dirty="0">
-                <a:solidFill>
-                  <a:schemeClr val="tx1"/>
-                </a:solidFill>
-                <a:latin typeface="Calibri" pitchFamily="34" charset="0"/>
-                <a:ea typeface="Calibri" pitchFamily="34" charset="-122"/>
-                <a:cs typeface="Calibri" pitchFamily="34" charset="-120"/>
-              </a:rPr>
-              <a:t>Decisioni del PO ancora in attesa nel registro</a:t>
-            </a:r>
-            <a:endParaRPr lang="en-US" sz="1400" dirty="0"/>
           </a:p>
         </p:txBody>
       </p:sp>
